--- a/submission/발표자료_전력피크조기경보.pptx
+++ b/submission/발표자료_전력피크조기경보.pptx
@@ -23,6 +23,10 @@
     <p:sldId id="271" r:id="rId22"/>
     <p:sldId id="272" r:id="rId23"/>
     <p:sldId id="273" r:id="rId24"/>
+    <p:sldId id="274" r:id="rId25"/>
+    <p:sldId id="275" r:id="rId26"/>
+    <p:sldId id="276" r:id="rId27"/>
+    <p:sldId id="277" r:id="rId28"/>
   </p:sldIdLst>
   <p:sldSz cx="12191695" cy="6858000" type="screen4x3"/>
   <p:notesSz cx="6858000" cy="9144000"/>
@@ -3275,7 +3279,41 @@
                 </a:solidFill>
                 <a:latin typeface="맑은 고딕"/>
               </a:rPr>
-              <a:t>핵심 결과 — h60 MAE 8.773 → 7.790 kw (-11.2%), 고사용량 구간 MAE 20.878 → 15.649 kw (-25.0%)</a:t>
+              <a:t>수치 예측 — h60 MAE 8.773 → 7.790 kw (-11.2%), 고사용량 구간 20.878 → 15.649 kw (-25.0%)</a:t>
+            </a:r>
+          </a:p>
+        </p:txBody>
+      </p:sp>
+      <p:sp>
+        <p:nvSpPr>
+          <p:cNvPr id="6" name="TextBox 5"/>
+          <p:cNvSpPr txBox="1"/>
+          <p:nvPr/>
+        </p:nvSpPr>
+        <p:spPr>
+          <a:xfrm>
+            <a:off x="594360" y="4343400"/>
+            <a:ext cx="10972800" cy="411480"/>
+          </a:xfrm>
+          <a:prstGeom prst="rect">
+            <a:avLst/>
+          </a:prstGeom>
+          <a:noFill/>
+        </p:spPr>
+        <p:txBody>
+          <a:bodyPr wrap="square">
+            <a:spAutoFit/>
+          </a:bodyPr>
+          <a:lstStyle/>
+          <a:p>
+            <a:r>
+              <a:rPr sz="1100">
+                <a:solidFill>
+                  <a:srgbClr val="C0392B"/>
+                </a:solidFill>
+                <a:latin typeface="맑은 고딕"/>
+              </a:rPr>
+              <a:t>고사용량 경보 — F1 0.468 (persistence 규칙 0.305, 무편향 오라클 상한 0.693) · 사건 recall 0.903</a:t>
             </a:r>
           </a:p>
         </p:txBody>
@@ -3378,7 +3416,7 @@
                 </a:solidFill>
                 <a:latin typeface="맑은 고딕"/>
               </a:rPr>
-              <a:t>제3장 · OOD — '포기 신호' 가 아니라 '취약조건 지도'</a:t>
+              <a:t>제2장 · 모델 비교 ② 고사용량 경보 — 베이스라인 포함 9종</a:t>
             </a:r>
           </a:p>
         </p:txBody>
@@ -3412,7 +3450,7 @@
                 </a:solidFill>
                 <a:latin typeface="맑은 고딕"/>
               </a:rPr>
-              <a:t>처음 보는 입력 조합(마할라노비스 거리, TRAIN p99 컷)을 어떻게 쓸 것인가</a:t>
+              <a:t>clean_Jul_Sep, h60, OOF 7,288 스텝 / 419 양성 / 186 사건</a:t>
             </a:r>
           </a:p>
         </p:txBody>
@@ -3427,7 +3465,7 @@
         </p:nvGraphicFramePr>
         <p:xfrm>
           <a:off x="594360" y="1463040"/>
-          <a:ext cx="4206240" cy="3319272"/>
+          <a:ext cx="11155680" cy="3017520"/>
         </p:xfrm>
         <a:graphic>
           <a:graphicData uri="http://schemas.openxmlformats.org/drawingml/2006/table">
@@ -3436,9 +3474,15 @@
                 <a:tableStyleId>{5C22544A-7EE6-4342-B048-85BDC9FD1C3A}</a:tableStyleId>
               </a:tblPr>
               <a:tblGrid>
-                <a:gridCol w="1402080"/>
-                <a:gridCol w="1402080"/>
-                <a:gridCol w="1402080"/>
+                <a:gridCol w="1239520"/>
+                <a:gridCol w="1239520"/>
+                <a:gridCol w="1239520"/>
+                <a:gridCol w="1239520"/>
+                <a:gridCol w="1239520"/>
+                <a:gridCol w="1239520"/>
+                <a:gridCol w="1239520"/>
+                <a:gridCol w="1239520"/>
+                <a:gridCol w="1239520"/>
               </a:tblGrid>
               <a:tr h="301752">
                 <a:tc>
@@ -3453,7 +3497,7 @@
                           </a:solidFill>
                           <a:latin typeface="맑은 고딕"/>
                         </a:rPr>
-                        <a:t>거리 십분위</a:t>
+                        <a:t>모델</a:t>
                       </a:r>
                     </a:p>
                   </a:txBody>
@@ -3475,7 +3519,7 @@
                           </a:solidFill>
                           <a:latin typeface="맑은 고딕"/>
                         </a:rPr>
-                        <a:t>평균 거리</a:t>
+                        <a:t>F1</a:t>
                       </a:r>
                     </a:p>
                   </a:txBody>
@@ -3497,7 +3541,139 @@
                           </a:solidFill>
                           <a:latin typeface="맑은 고딕"/>
                         </a:rPr>
-                        <a:t>MAE</a:t>
+                        <a:t>정밀도</a:t>
+                      </a:r>
+                    </a:p>
+                  </a:txBody>
+                  <a:tcPr>
+                    <a:solidFill>
+                      <a:srgbClr val="1F5C99"/>
+                    </a:solidFill>
+                  </a:tcPr>
+                </a:tc>
+                <a:tc>
+                  <a:txBody>
+                    <a:bodyPr/>
+                    <a:lstStyle/>
+                    <a:p>
+                      <a:r>
+                        <a:rPr sz="1100" b="1">
+                          <a:solidFill>
+                            <a:srgbClr val="FFFFFF"/>
+                          </a:solidFill>
+                          <a:latin typeface="맑은 고딕"/>
+                        </a:rPr>
+                        <a:t>재현율</a:t>
+                      </a:r>
+                    </a:p>
+                  </a:txBody>
+                  <a:tcPr>
+                    <a:solidFill>
+                      <a:srgbClr val="1F5C99"/>
+                    </a:solidFill>
+                  </a:tcPr>
+                </a:tc>
+                <a:tc>
+                  <a:txBody>
+                    <a:bodyPr/>
+                    <a:lstStyle/>
+                    <a:p>
+                      <a:r>
+                        <a:rPr sz="1100" b="1">
+                          <a:solidFill>
+                            <a:srgbClr val="FFFFFF"/>
+                          </a:solidFill>
+                          <a:latin typeface="맑은 고딕"/>
+                        </a:rPr>
+                        <a:t>사건 recall</a:t>
+                      </a:r>
+                    </a:p>
+                  </a:txBody>
+                  <a:tcPr>
+                    <a:solidFill>
+                      <a:srgbClr val="1F5C99"/>
+                    </a:solidFill>
+                  </a:tcPr>
+                </a:tc>
+                <a:tc>
+                  <a:txBody>
+                    <a:bodyPr/>
+                    <a:lstStyle/>
+                    <a:p>
+                      <a:r>
+                        <a:rPr sz="1100" b="1">
+                          <a:solidFill>
+                            <a:srgbClr val="FFFFFF"/>
+                          </a:solidFill>
+                          <a:latin typeface="맑은 고딕"/>
+                        </a:rPr>
+                        <a:t>경보/일</a:t>
+                      </a:r>
+                    </a:p>
+                  </a:txBody>
+                  <a:tcPr>
+                    <a:solidFill>
+                      <a:srgbClr val="1F5C99"/>
+                    </a:solidFill>
+                  </a:tcPr>
+                </a:tc>
+                <a:tc>
+                  <a:txBody>
+                    <a:bodyPr/>
+                    <a:lstStyle/>
+                    <a:p>
+                      <a:r>
+                        <a:rPr sz="1100" b="1">
+                          <a:solidFill>
+                            <a:srgbClr val="FFFFFF"/>
+                          </a:solidFill>
+                          <a:latin typeface="맑은 고딕"/>
+                        </a:rPr>
+                        <a:t>TP</a:t>
+                      </a:r>
+                    </a:p>
+                  </a:txBody>
+                  <a:tcPr>
+                    <a:solidFill>
+                      <a:srgbClr val="1F5C99"/>
+                    </a:solidFill>
+                  </a:tcPr>
+                </a:tc>
+                <a:tc>
+                  <a:txBody>
+                    <a:bodyPr/>
+                    <a:lstStyle/>
+                    <a:p>
+                      <a:r>
+                        <a:rPr sz="1100" b="1">
+                          <a:solidFill>
+                            <a:srgbClr val="FFFFFF"/>
+                          </a:solidFill>
+                          <a:latin typeface="맑은 고딕"/>
+                        </a:rPr>
+                        <a:t>FP</a:t>
+                      </a:r>
+                    </a:p>
+                  </a:txBody>
+                  <a:tcPr>
+                    <a:solidFill>
+                      <a:srgbClr val="1F5C99"/>
+                    </a:solidFill>
+                  </a:tcPr>
+                </a:tc>
+                <a:tc>
+                  <a:txBody>
+                    <a:bodyPr/>
+                    <a:lstStyle/>
+                    <a:p>
+                      <a:r>
+                        <a:rPr sz="1100" b="1">
+                          <a:solidFill>
+                            <a:srgbClr val="FFFFFF"/>
+                          </a:solidFill>
+                          <a:latin typeface="맑은 고딕"/>
+                        </a:rPr>
+                        <a:t>FN</a:t>
                       </a:r>
                     </a:p>
                   </a:txBody>
@@ -3521,51 +3697,183 @@
                           </a:solidFill>
                           <a:latin typeface="맑은 고딕"/>
                         </a:rPr>
-                        <a:t>0</a:t>
-                      </a:r>
-                    </a:p>
-                  </a:txBody>
-                  <a:tcPr>
-                    <a:solidFill>
-                      <a:srgbClr val="FFFFFF"/>
-                    </a:solidFill>
-                  </a:tcPr>
-                </a:tc>
-                <a:tc>
-                  <a:txBody>
-                    <a:bodyPr/>
-                    <a:lstStyle/>
-                    <a:p>
-                      <a:r>
-                        <a:rPr sz="1100">
-                          <a:solidFill>
-                            <a:srgbClr val="1A1A1A"/>
-                          </a:solidFill>
-                          <a:latin typeface="맑은 고딕"/>
-                        </a:rPr>
-                        <a:t>2.920</a:t>
-                      </a:r>
-                    </a:p>
-                  </a:txBody>
-                  <a:tcPr>
-                    <a:solidFill>
-                      <a:srgbClr val="FFFFFF"/>
-                    </a:solidFill>
-                  </a:tcPr>
-                </a:tc>
-                <a:tc>
-                  <a:txBody>
-                    <a:bodyPr/>
-                    <a:lstStyle/>
-                    <a:p>
-                      <a:r>
-                        <a:rPr sz="1100">
-                          <a:solidFill>
-                            <a:srgbClr val="1A1A1A"/>
-                          </a:solidFill>
-                          <a:latin typeface="맑은 고딕"/>
-                        </a:rPr>
-                        <a:t>6.440</a:t>
+                        <a:t>ExtraTrees(balanced) ★선정</a:t>
+                      </a:r>
+                    </a:p>
+                  </a:txBody>
+                  <a:tcPr>
+                    <a:solidFill>
+                      <a:srgbClr val="FFFFFF"/>
+                    </a:solidFill>
+                  </a:tcPr>
+                </a:tc>
+                <a:tc>
+                  <a:txBody>
+                    <a:bodyPr/>
+                    <a:lstStyle/>
+                    <a:p>
+                      <a:r>
+                        <a:rPr sz="1100">
+                          <a:solidFill>
+                            <a:srgbClr val="1A1A1A"/>
+                          </a:solidFill>
+                          <a:latin typeface="맑은 고딕"/>
+                        </a:rPr>
+                        <a:t>0.481</a:t>
+                      </a:r>
+                    </a:p>
+                  </a:txBody>
+                  <a:tcPr>
+                    <a:solidFill>
+                      <a:srgbClr val="FFFFFF"/>
+                    </a:solidFill>
+                  </a:tcPr>
+                </a:tc>
+                <a:tc>
+                  <a:txBody>
+                    <a:bodyPr/>
+                    <a:lstStyle/>
+                    <a:p>
+                      <a:r>
+                        <a:rPr sz="1100">
+                          <a:solidFill>
+                            <a:srgbClr val="1A1A1A"/>
+                          </a:solidFill>
+                          <a:latin typeface="맑은 고딕"/>
+                        </a:rPr>
+                        <a:t>0.360</a:t>
+                      </a:r>
+                    </a:p>
+                  </a:txBody>
+                  <a:tcPr>
+                    <a:solidFill>
+                      <a:srgbClr val="FFFFFF"/>
+                    </a:solidFill>
+                  </a:tcPr>
+                </a:tc>
+                <a:tc>
+                  <a:txBody>
+                    <a:bodyPr/>
+                    <a:lstStyle/>
+                    <a:p>
+                      <a:r>
+                        <a:rPr sz="1100">
+                          <a:solidFill>
+                            <a:srgbClr val="1A1A1A"/>
+                          </a:solidFill>
+                          <a:latin typeface="맑은 고딕"/>
+                        </a:rPr>
+                        <a:t>0.726</a:t>
+                      </a:r>
+                    </a:p>
+                  </a:txBody>
+                  <a:tcPr>
+                    <a:solidFill>
+                      <a:srgbClr val="FFFFFF"/>
+                    </a:solidFill>
+                  </a:tcPr>
+                </a:tc>
+                <a:tc>
+                  <a:txBody>
+                    <a:bodyPr/>
+                    <a:lstStyle/>
+                    <a:p>
+                      <a:r>
+                        <a:rPr sz="1100">
+                          <a:solidFill>
+                            <a:srgbClr val="1A1A1A"/>
+                          </a:solidFill>
+                          <a:latin typeface="맑은 고딕"/>
+                        </a:rPr>
+                        <a:t>0.903</a:t>
+                      </a:r>
+                    </a:p>
+                  </a:txBody>
+                  <a:tcPr>
+                    <a:solidFill>
+                      <a:srgbClr val="FFFFFF"/>
+                    </a:solidFill>
+                  </a:tcPr>
+                </a:tc>
+                <a:tc>
+                  <a:txBody>
+                    <a:bodyPr/>
+                    <a:lstStyle/>
+                    <a:p>
+                      <a:r>
+                        <a:rPr sz="1100">
+                          <a:solidFill>
+                            <a:srgbClr val="1A1A1A"/>
+                          </a:solidFill>
+                          <a:latin typeface="맑은 고딕"/>
+                        </a:rPr>
+                        <a:t>11.131</a:t>
+                      </a:r>
+                    </a:p>
+                  </a:txBody>
+                  <a:tcPr>
+                    <a:solidFill>
+                      <a:srgbClr val="FFFFFF"/>
+                    </a:solidFill>
+                  </a:tcPr>
+                </a:tc>
+                <a:tc>
+                  <a:txBody>
+                    <a:bodyPr/>
+                    <a:lstStyle/>
+                    <a:p>
+                      <a:r>
+                        <a:rPr sz="1100">
+                          <a:solidFill>
+                            <a:srgbClr val="1A1A1A"/>
+                          </a:solidFill>
+                          <a:latin typeface="맑은 고딕"/>
+                        </a:rPr>
+                        <a:t>304</a:t>
+                      </a:r>
+                    </a:p>
+                  </a:txBody>
+                  <a:tcPr>
+                    <a:solidFill>
+                      <a:srgbClr val="FFFFFF"/>
+                    </a:solidFill>
+                  </a:tcPr>
+                </a:tc>
+                <a:tc>
+                  <a:txBody>
+                    <a:bodyPr/>
+                    <a:lstStyle/>
+                    <a:p>
+                      <a:r>
+                        <a:rPr sz="1100">
+                          <a:solidFill>
+                            <a:srgbClr val="1A1A1A"/>
+                          </a:solidFill>
+                          <a:latin typeface="맑은 고딕"/>
+                        </a:rPr>
+                        <a:t>541</a:t>
+                      </a:r>
+                    </a:p>
+                  </a:txBody>
+                  <a:tcPr>
+                    <a:solidFill>
+                      <a:srgbClr val="FFFFFF"/>
+                    </a:solidFill>
+                  </a:tcPr>
+                </a:tc>
+                <a:tc>
+                  <a:txBody>
+                    <a:bodyPr/>
+                    <a:lstStyle/>
+                    <a:p>
+                      <a:r>
+                        <a:rPr sz="1100">
+                          <a:solidFill>
+                            <a:srgbClr val="1A1A1A"/>
+                          </a:solidFill>
+                          <a:latin typeface="맑은 고딕"/>
+                        </a:rPr>
+                        <a:t>115</a:t>
                       </a:r>
                     </a:p>
                   </a:txBody>
@@ -3589,51 +3897,183 @@
                           </a:solidFill>
                           <a:latin typeface="맑은 고딕"/>
                         </a:rPr>
-                        <a:t>1</a:t>
-                      </a:r>
-                    </a:p>
-                  </a:txBody>
-                  <a:tcPr>
-                    <a:solidFill>
-                      <a:srgbClr val="F2F5F8"/>
-                    </a:solidFill>
-                  </a:tcPr>
-                </a:tc>
-                <a:tc>
-                  <a:txBody>
-                    <a:bodyPr/>
-                    <a:lstStyle/>
-                    <a:p>
-                      <a:r>
-                        <a:rPr sz="1100">
-                          <a:solidFill>
-                            <a:srgbClr val="1A1A1A"/>
-                          </a:solidFill>
-                          <a:latin typeface="맑은 고딕"/>
-                        </a:rPr>
-                        <a:t>4.010</a:t>
-                      </a:r>
-                    </a:p>
-                  </a:txBody>
-                  <a:tcPr>
-                    <a:solidFill>
-                      <a:srgbClr val="F2F5F8"/>
-                    </a:solidFill>
-                  </a:tcPr>
-                </a:tc>
-                <a:tc>
-                  <a:txBody>
-                    <a:bodyPr/>
-                    <a:lstStyle/>
-                    <a:p>
-                      <a:r>
-                        <a:rPr sz="1100">
-                          <a:solidFill>
-                            <a:srgbClr val="1A1A1A"/>
-                          </a:solidFill>
-                          <a:latin typeface="맑은 고딕"/>
-                        </a:rPr>
-                        <a:t>7.940</a:t>
+                        <a:t>HistGBM</a:t>
+                      </a:r>
+                    </a:p>
+                  </a:txBody>
+                  <a:tcPr>
+                    <a:solidFill>
+                      <a:srgbClr val="F2F5F8"/>
+                    </a:solidFill>
+                  </a:tcPr>
+                </a:tc>
+                <a:tc>
+                  <a:txBody>
+                    <a:bodyPr/>
+                    <a:lstStyle/>
+                    <a:p>
+                      <a:r>
+                        <a:rPr sz="1100">
+                          <a:solidFill>
+                            <a:srgbClr val="1A1A1A"/>
+                          </a:solidFill>
+                          <a:latin typeface="맑은 고딕"/>
+                        </a:rPr>
+                        <a:t>0.455</a:t>
+                      </a:r>
+                    </a:p>
+                  </a:txBody>
+                  <a:tcPr>
+                    <a:solidFill>
+                      <a:srgbClr val="F2F5F8"/>
+                    </a:solidFill>
+                  </a:tcPr>
+                </a:tc>
+                <a:tc>
+                  <a:txBody>
+                    <a:bodyPr/>
+                    <a:lstStyle/>
+                    <a:p>
+                      <a:r>
+                        <a:rPr sz="1100">
+                          <a:solidFill>
+                            <a:srgbClr val="1A1A1A"/>
+                          </a:solidFill>
+                          <a:latin typeface="맑은 고딕"/>
+                        </a:rPr>
+                        <a:t>0.329</a:t>
+                      </a:r>
+                    </a:p>
+                  </a:txBody>
+                  <a:tcPr>
+                    <a:solidFill>
+                      <a:srgbClr val="F2F5F8"/>
+                    </a:solidFill>
+                  </a:tcPr>
+                </a:tc>
+                <a:tc>
+                  <a:txBody>
+                    <a:bodyPr/>
+                    <a:lstStyle/>
+                    <a:p>
+                      <a:r>
+                        <a:rPr sz="1100">
+                          <a:solidFill>
+                            <a:srgbClr val="1A1A1A"/>
+                          </a:solidFill>
+                          <a:latin typeface="맑은 고딕"/>
+                        </a:rPr>
+                        <a:t>0.740</a:t>
+                      </a:r>
+                    </a:p>
+                  </a:txBody>
+                  <a:tcPr>
+                    <a:solidFill>
+                      <a:srgbClr val="F2F5F8"/>
+                    </a:solidFill>
+                  </a:tcPr>
+                </a:tc>
+                <a:tc>
+                  <a:txBody>
+                    <a:bodyPr/>
+                    <a:lstStyle/>
+                    <a:p>
+                      <a:r>
+                        <a:rPr sz="1100">
+                          <a:solidFill>
+                            <a:srgbClr val="1A1A1A"/>
+                          </a:solidFill>
+                          <a:latin typeface="맑은 고딕"/>
+                        </a:rPr>
+                        <a:t>0.903</a:t>
+                      </a:r>
+                    </a:p>
+                  </a:txBody>
+                  <a:tcPr>
+                    <a:solidFill>
+                      <a:srgbClr val="F2F5F8"/>
+                    </a:solidFill>
+                  </a:tcPr>
+                </a:tc>
+                <a:tc>
+                  <a:txBody>
+                    <a:bodyPr/>
+                    <a:lstStyle/>
+                    <a:p>
+                      <a:r>
+                        <a:rPr sz="1100">
+                          <a:solidFill>
+                            <a:srgbClr val="1A1A1A"/>
+                          </a:solidFill>
+                          <a:latin typeface="맑은 고딕"/>
+                        </a:rPr>
+                        <a:t>12.422</a:t>
+                      </a:r>
+                    </a:p>
+                  </a:txBody>
+                  <a:tcPr>
+                    <a:solidFill>
+                      <a:srgbClr val="F2F5F8"/>
+                    </a:solidFill>
+                  </a:tcPr>
+                </a:tc>
+                <a:tc>
+                  <a:txBody>
+                    <a:bodyPr/>
+                    <a:lstStyle/>
+                    <a:p>
+                      <a:r>
+                        <a:rPr sz="1100">
+                          <a:solidFill>
+                            <a:srgbClr val="1A1A1A"/>
+                          </a:solidFill>
+                          <a:latin typeface="맑은 고딕"/>
+                        </a:rPr>
+                        <a:t>310</a:t>
+                      </a:r>
+                    </a:p>
+                  </a:txBody>
+                  <a:tcPr>
+                    <a:solidFill>
+                      <a:srgbClr val="F2F5F8"/>
+                    </a:solidFill>
+                  </a:tcPr>
+                </a:tc>
+                <a:tc>
+                  <a:txBody>
+                    <a:bodyPr/>
+                    <a:lstStyle/>
+                    <a:p>
+                      <a:r>
+                        <a:rPr sz="1100">
+                          <a:solidFill>
+                            <a:srgbClr val="1A1A1A"/>
+                          </a:solidFill>
+                          <a:latin typeface="맑은 고딕"/>
+                        </a:rPr>
+                        <a:t>633</a:t>
+                      </a:r>
+                    </a:p>
+                  </a:txBody>
+                  <a:tcPr>
+                    <a:solidFill>
+                      <a:srgbClr val="F2F5F8"/>
+                    </a:solidFill>
+                  </a:tcPr>
+                </a:tc>
+                <a:tc>
+                  <a:txBody>
+                    <a:bodyPr/>
+                    <a:lstStyle/>
+                    <a:p>
+                      <a:r>
+                        <a:rPr sz="1100">
+                          <a:solidFill>
+                            <a:srgbClr val="1A1A1A"/>
+                          </a:solidFill>
+                          <a:latin typeface="맑은 고딕"/>
+                        </a:rPr>
+                        <a:t>109</a:t>
                       </a:r>
                     </a:p>
                   </a:txBody>
@@ -3657,51 +4097,183 @@
                           </a:solidFill>
                           <a:latin typeface="맑은 고딕"/>
                         </a:rPr>
-                        <a:t>2</a:t>
-                      </a:r>
-                    </a:p>
-                  </a:txBody>
-                  <a:tcPr>
-                    <a:solidFill>
-                      <a:srgbClr val="FFFFFF"/>
-                    </a:solidFill>
-                  </a:tcPr>
-                </a:tc>
-                <a:tc>
-                  <a:txBody>
-                    <a:bodyPr/>
-                    <a:lstStyle/>
-                    <a:p>
-                      <a:r>
-                        <a:rPr sz="1100">
-                          <a:solidFill>
-                            <a:srgbClr val="1A1A1A"/>
-                          </a:solidFill>
-                          <a:latin typeface="맑은 고딕"/>
-                        </a:rPr>
-                        <a:t>4.720</a:t>
-                      </a:r>
-                    </a:p>
-                  </a:txBody>
-                  <a:tcPr>
-                    <a:solidFill>
-                      <a:srgbClr val="FFFFFF"/>
-                    </a:solidFill>
-                  </a:tcPr>
-                </a:tc>
-                <a:tc>
-                  <a:txBody>
-                    <a:bodyPr/>
-                    <a:lstStyle/>
-                    <a:p>
-                      <a:r>
-                        <a:rPr sz="1100">
-                          <a:solidFill>
-                            <a:srgbClr val="1A1A1A"/>
-                          </a:solidFill>
-                          <a:latin typeface="맑은 고딕"/>
-                        </a:rPr>
-                        <a:t>7.610</a:t>
+                        <a:t>분위회귀 q0.90 마진</a:t>
+                      </a:r>
+                    </a:p>
+                  </a:txBody>
+                  <a:tcPr>
+                    <a:solidFill>
+                      <a:srgbClr val="FFFFFF"/>
+                    </a:solidFill>
+                  </a:tcPr>
+                </a:tc>
+                <a:tc>
+                  <a:txBody>
+                    <a:bodyPr/>
+                    <a:lstStyle/>
+                    <a:p>
+                      <a:r>
+                        <a:rPr sz="1100">
+                          <a:solidFill>
+                            <a:srgbClr val="1A1A1A"/>
+                          </a:solidFill>
+                          <a:latin typeface="맑은 고딕"/>
+                        </a:rPr>
+                        <a:t>0.436</a:t>
+                      </a:r>
+                    </a:p>
+                  </a:txBody>
+                  <a:tcPr>
+                    <a:solidFill>
+                      <a:srgbClr val="FFFFFF"/>
+                    </a:solidFill>
+                  </a:tcPr>
+                </a:tc>
+                <a:tc>
+                  <a:txBody>
+                    <a:bodyPr/>
+                    <a:lstStyle/>
+                    <a:p>
+                      <a:r>
+                        <a:rPr sz="1100">
+                          <a:solidFill>
+                            <a:srgbClr val="1A1A1A"/>
+                          </a:solidFill>
+                          <a:latin typeface="맑은 고딕"/>
+                        </a:rPr>
+                        <a:t>0.432</a:t>
+                      </a:r>
+                    </a:p>
+                  </a:txBody>
+                  <a:tcPr>
+                    <a:solidFill>
+                      <a:srgbClr val="FFFFFF"/>
+                    </a:solidFill>
+                  </a:tcPr>
+                </a:tc>
+                <a:tc>
+                  <a:txBody>
+                    <a:bodyPr/>
+                    <a:lstStyle/>
+                    <a:p>
+                      <a:r>
+                        <a:rPr sz="1100">
+                          <a:solidFill>
+                            <a:srgbClr val="1A1A1A"/>
+                          </a:solidFill>
+                          <a:latin typeface="맑은 고딕"/>
+                        </a:rPr>
+                        <a:t>0.439</a:t>
+                      </a:r>
+                    </a:p>
+                  </a:txBody>
+                  <a:tcPr>
+                    <a:solidFill>
+                      <a:srgbClr val="FFFFFF"/>
+                    </a:solidFill>
+                  </a:tcPr>
+                </a:tc>
+                <a:tc>
+                  <a:txBody>
+                    <a:bodyPr/>
+                    <a:lstStyle/>
+                    <a:p>
+                      <a:r>
+                        <a:rPr sz="1100">
+                          <a:solidFill>
+                            <a:srgbClr val="1A1A1A"/>
+                          </a:solidFill>
+                          <a:latin typeface="맑은 고딕"/>
+                        </a:rPr>
+                        <a:t>0.710</a:t>
+                      </a:r>
+                    </a:p>
+                  </a:txBody>
+                  <a:tcPr>
+                    <a:solidFill>
+                      <a:srgbClr val="FFFFFF"/>
+                    </a:solidFill>
+                  </a:tcPr>
+                </a:tc>
+                <a:tc>
+                  <a:txBody>
+                    <a:bodyPr/>
+                    <a:lstStyle/>
+                    <a:p>
+                      <a:r>
+                        <a:rPr sz="1100">
+                          <a:solidFill>
+                            <a:srgbClr val="1A1A1A"/>
+                          </a:solidFill>
+                          <a:latin typeface="맑은 고딕"/>
+                        </a:rPr>
+                        <a:t>5.611</a:t>
+                      </a:r>
+                    </a:p>
+                  </a:txBody>
+                  <a:tcPr>
+                    <a:solidFill>
+                      <a:srgbClr val="FFFFFF"/>
+                    </a:solidFill>
+                  </a:tcPr>
+                </a:tc>
+                <a:tc>
+                  <a:txBody>
+                    <a:bodyPr/>
+                    <a:lstStyle/>
+                    <a:p>
+                      <a:r>
+                        <a:rPr sz="1100">
+                          <a:solidFill>
+                            <a:srgbClr val="1A1A1A"/>
+                          </a:solidFill>
+                          <a:latin typeface="맑은 고딕"/>
+                        </a:rPr>
+                        <a:t>184</a:t>
+                      </a:r>
+                    </a:p>
+                  </a:txBody>
+                  <a:tcPr>
+                    <a:solidFill>
+                      <a:srgbClr val="FFFFFF"/>
+                    </a:solidFill>
+                  </a:tcPr>
+                </a:tc>
+                <a:tc>
+                  <a:txBody>
+                    <a:bodyPr/>
+                    <a:lstStyle/>
+                    <a:p>
+                      <a:r>
+                        <a:rPr sz="1100">
+                          <a:solidFill>
+                            <a:srgbClr val="1A1A1A"/>
+                          </a:solidFill>
+                          <a:latin typeface="맑은 고딕"/>
+                        </a:rPr>
+                        <a:t>242</a:t>
+                      </a:r>
+                    </a:p>
+                  </a:txBody>
+                  <a:tcPr>
+                    <a:solidFill>
+                      <a:srgbClr val="FFFFFF"/>
+                    </a:solidFill>
+                  </a:tcPr>
+                </a:tc>
+                <a:tc>
+                  <a:txBody>
+                    <a:bodyPr/>
+                    <a:lstStyle/>
+                    <a:p>
+                      <a:r>
+                        <a:rPr sz="1100">
+                          <a:solidFill>
+                            <a:srgbClr val="1A1A1A"/>
+                          </a:solidFill>
+                          <a:latin typeface="맑은 고딕"/>
+                        </a:rPr>
+                        <a:t>235</a:t>
                       </a:r>
                     </a:p>
                   </a:txBody>
@@ -3725,51 +4297,183 @@
                           </a:solidFill>
                           <a:latin typeface="맑은 고딕"/>
                         </a:rPr>
-                        <a:t>3</a:t>
-                      </a:r>
-                    </a:p>
-                  </a:txBody>
-                  <a:tcPr>
-                    <a:solidFill>
-                      <a:srgbClr val="F2F5F8"/>
-                    </a:solidFill>
-                  </a:tcPr>
-                </a:tc>
-                <a:tc>
-                  <a:txBody>
-                    <a:bodyPr/>
-                    <a:lstStyle/>
-                    <a:p>
-                      <a:r>
-                        <a:rPr sz="1100">
-                          <a:solidFill>
-                            <a:srgbClr val="1A1A1A"/>
-                          </a:solidFill>
-                          <a:latin typeface="맑은 고딕"/>
-                        </a:rPr>
-                        <a:t>5.410</a:t>
-                      </a:r>
-                    </a:p>
-                  </a:txBody>
-                  <a:tcPr>
-                    <a:solidFill>
-                      <a:srgbClr val="F2F5F8"/>
-                    </a:solidFill>
-                  </a:tcPr>
-                </a:tc>
-                <a:tc>
-                  <a:txBody>
-                    <a:bodyPr/>
-                    <a:lstStyle/>
-                    <a:p>
-                      <a:r>
-                        <a:rPr sz="1100">
-                          <a:solidFill>
-                            <a:srgbClr val="1A1A1A"/>
-                          </a:solidFill>
-                          <a:latin typeface="맑은 고딕"/>
-                        </a:rPr>
-                        <a:t>8.130</a:t>
+                        <a:t>Logistic (베이스라인)</a:t>
+                      </a:r>
+                    </a:p>
+                  </a:txBody>
+                  <a:tcPr>
+                    <a:solidFill>
+                      <a:srgbClr val="F2F5F8"/>
+                    </a:solidFill>
+                  </a:tcPr>
+                </a:tc>
+                <a:tc>
+                  <a:txBody>
+                    <a:bodyPr/>
+                    <a:lstStyle/>
+                    <a:p>
+                      <a:r>
+                        <a:rPr sz="1100">
+                          <a:solidFill>
+                            <a:srgbClr val="1A1A1A"/>
+                          </a:solidFill>
+                          <a:latin typeface="맑은 고딕"/>
+                        </a:rPr>
+                        <a:t>0.406</a:t>
+                      </a:r>
+                    </a:p>
+                  </a:txBody>
+                  <a:tcPr>
+                    <a:solidFill>
+                      <a:srgbClr val="F2F5F8"/>
+                    </a:solidFill>
+                  </a:tcPr>
+                </a:tc>
+                <a:tc>
+                  <a:txBody>
+                    <a:bodyPr/>
+                    <a:lstStyle/>
+                    <a:p>
+                      <a:r>
+                        <a:rPr sz="1100">
+                          <a:solidFill>
+                            <a:srgbClr val="1A1A1A"/>
+                          </a:solidFill>
+                          <a:latin typeface="맑은 고딕"/>
+                        </a:rPr>
+                        <a:t>0.345</a:t>
+                      </a:r>
+                    </a:p>
+                  </a:txBody>
+                  <a:tcPr>
+                    <a:solidFill>
+                      <a:srgbClr val="F2F5F8"/>
+                    </a:solidFill>
+                  </a:tcPr>
+                </a:tc>
+                <a:tc>
+                  <a:txBody>
+                    <a:bodyPr/>
+                    <a:lstStyle/>
+                    <a:p>
+                      <a:r>
+                        <a:rPr sz="1100">
+                          <a:solidFill>
+                            <a:srgbClr val="1A1A1A"/>
+                          </a:solidFill>
+                          <a:latin typeface="맑은 고딕"/>
+                        </a:rPr>
+                        <a:t>0.494</a:t>
+                      </a:r>
+                    </a:p>
+                  </a:txBody>
+                  <a:tcPr>
+                    <a:solidFill>
+                      <a:srgbClr val="F2F5F8"/>
+                    </a:solidFill>
+                  </a:tcPr>
+                </a:tc>
+                <a:tc>
+                  <a:txBody>
+                    <a:bodyPr/>
+                    <a:lstStyle/>
+                    <a:p>
+                      <a:r>
+                        <a:rPr sz="1100">
+                          <a:solidFill>
+                            <a:srgbClr val="1A1A1A"/>
+                          </a:solidFill>
+                          <a:latin typeface="맑은 고딕"/>
+                        </a:rPr>
+                        <a:t>0.731</a:t>
+                      </a:r>
+                    </a:p>
+                  </a:txBody>
+                  <a:tcPr>
+                    <a:solidFill>
+                      <a:srgbClr val="F2F5F8"/>
+                    </a:solidFill>
+                  </a:tcPr>
+                </a:tc>
+                <a:tc>
+                  <a:txBody>
+                    <a:bodyPr/>
+                    <a:lstStyle/>
+                    <a:p>
+                      <a:r>
+                        <a:rPr sz="1100">
+                          <a:solidFill>
+                            <a:srgbClr val="1A1A1A"/>
+                          </a:solidFill>
+                          <a:latin typeface="맑은 고딕"/>
+                        </a:rPr>
+                        <a:t>7.903</a:t>
+                      </a:r>
+                    </a:p>
+                  </a:txBody>
+                  <a:tcPr>
+                    <a:solidFill>
+                      <a:srgbClr val="F2F5F8"/>
+                    </a:solidFill>
+                  </a:tcPr>
+                </a:tc>
+                <a:tc>
+                  <a:txBody>
+                    <a:bodyPr/>
+                    <a:lstStyle/>
+                    <a:p>
+                      <a:r>
+                        <a:rPr sz="1100">
+                          <a:solidFill>
+                            <a:srgbClr val="1A1A1A"/>
+                          </a:solidFill>
+                          <a:latin typeface="맑은 고딕"/>
+                        </a:rPr>
+                        <a:t>207</a:t>
+                      </a:r>
+                    </a:p>
+                  </a:txBody>
+                  <a:tcPr>
+                    <a:solidFill>
+                      <a:srgbClr val="F2F5F8"/>
+                    </a:solidFill>
+                  </a:tcPr>
+                </a:tc>
+                <a:tc>
+                  <a:txBody>
+                    <a:bodyPr/>
+                    <a:lstStyle/>
+                    <a:p>
+                      <a:r>
+                        <a:rPr sz="1100">
+                          <a:solidFill>
+                            <a:srgbClr val="1A1A1A"/>
+                          </a:solidFill>
+                          <a:latin typeface="맑은 고딕"/>
+                        </a:rPr>
+                        <a:t>393</a:t>
+                      </a:r>
+                    </a:p>
+                  </a:txBody>
+                  <a:tcPr>
+                    <a:solidFill>
+                      <a:srgbClr val="F2F5F8"/>
+                    </a:solidFill>
+                  </a:tcPr>
+                </a:tc>
+                <a:tc>
+                  <a:txBody>
+                    <a:bodyPr/>
+                    <a:lstStyle/>
+                    <a:p>
+                      <a:r>
+                        <a:rPr sz="1100">
+                          <a:solidFill>
+                            <a:srgbClr val="1A1A1A"/>
+                          </a:solidFill>
+                          <a:latin typeface="맑은 고딕"/>
+                        </a:rPr>
+                        <a:t>212</a:t>
                       </a:r>
                     </a:p>
                   </a:txBody>
@@ -3793,51 +4497,183 @@
                           </a:solidFill>
                           <a:latin typeface="맑은 고딕"/>
                         </a:rPr>
-                        <a:t>4</a:t>
-                      </a:r>
-                    </a:p>
-                  </a:txBody>
-                  <a:tcPr>
-                    <a:solidFill>
-                      <a:srgbClr val="FFFFFF"/>
-                    </a:solidFill>
-                  </a:tcPr>
-                </a:tc>
-                <a:tc>
-                  <a:txBody>
-                    <a:bodyPr/>
-                    <a:lstStyle/>
-                    <a:p>
-                      <a:r>
-                        <a:rPr sz="1100">
-                          <a:solidFill>
-                            <a:srgbClr val="1A1A1A"/>
-                          </a:solidFill>
-                          <a:latin typeface="맑은 고딕"/>
-                        </a:rPr>
-                        <a:t>6.110</a:t>
-                      </a:r>
-                    </a:p>
-                  </a:txBody>
-                  <a:tcPr>
-                    <a:solidFill>
-                      <a:srgbClr val="FFFFFF"/>
-                    </a:solidFill>
-                  </a:tcPr>
-                </a:tc>
-                <a:tc>
-                  <a:txBody>
-                    <a:bodyPr/>
-                    <a:lstStyle/>
-                    <a:p>
-                      <a:r>
-                        <a:rPr sz="1100">
-                          <a:solidFill>
-                            <a:srgbClr val="1A1A1A"/>
-                          </a:solidFill>
-                          <a:latin typeface="맑은 고딕"/>
-                        </a:rPr>
-                        <a:t>7.820</a:t>
+                        <a:t>RandomForest</a:t>
+                      </a:r>
+                    </a:p>
+                  </a:txBody>
+                  <a:tcPr>
+                    <a:solidFill>
+                      <a:srgbClr val="FFFFFF"/>
+                    </a:solidFill>
+                  </a:tcPr>
+                </a:tc>
+                <a:tc>
+                  <a:txBody>
+                    <a:bodyPr/>
+                    <a:lstStyle/>
+                    <a:p>
+                      <a:r>
+                        <a:rPr sz="1100">
+                          <a:solidFill>
+                            <a:srgbClr val="1A1A1A"/>
+                          </a:solidFill>
+                          <a:latin typeface="맑은 고딕"/>
+                        </a:rPr>
+                        <a:t>0.396</a:t>
+                      </a:r>
+                    </a:p>
+                  </a:txBody>
+                  <a:tcPr>
+                    <a:solidFill>
+                      <a:srgbClr val="FFFFFF"/>
+                    </a:solidFill>
+                  </a:tcPr>
+                </a:tc>
+                <a:tc>
+                  <a:txBody>
+                    <a:bodyPr/>
+                    <a:lstStyle/>
+                    <a:p>
+                      <a:r>
+                        <a:rPr sz="1100">
+                          <a:solidFill>
+                            <a:srgbClr val="1A1A1A"/>
+                          </a:solidFill>
+                          <a:latin typeface="맑은 고딕"/>
+                        </a:rPr>
+                        <a:t>0.294</a:t>
+                      </a:r>
+                    </a:p>
+                  </a:txBody>
+                  <a:tcPr>
+                    <a:solidFill>
+                      <a:srgbClr val="FFFFFF"/>
+                    </a:solidFill>
+                  </a:tcPr>
+                </a:tc>
+                <a:tc>
+                  <a:txBody>
+                    <a:bodyPr/>
+                    <a:lstStyle/>
+                    <a:p>
+                      <a:r>
+                        <a:rPr sz="1100">
+                          <a:solidFill>
+                            <a:srgbClr val="1A1A1A"/>
+                          </a:solidFill>
+                          <a:latin typeface="맑은 고딕"/>
+                        </a:rPr>
+                        <a:t>0.606</a:t>
+                      </a:r>
+                    </a:p>
+                  </a:txBody>
+                  <a:tcPr>
+                    <a:solidFill>
+                      <a:srgbClr val="FFFFFF"/>
+                    </a:solidFill>
+                  </a:tcPr>
+                </a:tc>
+                <a:tc>
+                  <a:txBody>
+                    <a:bodyPr/>
+                    <a:lstStyle/>
+                    <a:p>
+                      <a:r>
+                        <a:rPr sz="1100">
+                          <a:solidFill>
+                            <a:srgbClr val="1A1A1A"/>
+                          </a:solidFill>
+                          <a:latin typeface="맑은 고딕"/>
+                        </a:rPr>
+                        <a:t>0.882</a:t>
+                      </a:r>
+                    </a:p>
+                  </a:txBody>
+                  <a:tcPr>
+                    <a:solidFill>
+                      <a:srgbClr val="FFFFFF"/>
+                    </a:solidFill>
+                  </a:tcPr>
+                </a:tc>
+                <a:tc>
+                  <a:txBody>
+                    <a:bodyPr/>
+                    <a:lstStyle/>
+                    <a:p>
+                      <a:r>
+                        <a:rPr sz="1100">
+                          <a:solidFill>
+                            <a:srgbClr val="1A1A1A"/>
+                          </a:solidFill>
+                          <a:latin typeface="맑은 고딕"/>
+                        </a:rPr>
+                        <a:t>11.381</a:t>
+                      </a:r>
+                    </a:p>
+                  </a:txBody>
+                  <a:tcPr>
+                    <a:solidFill>
+                      <a:srgbClr val="FFFFFF"/>
+                    </a:solidFill>
+                  </a:tcPr>
+                </a:tc>
+                <a:tc>
+                  <a:txBody>
+                    <a:bodyPr/>
+                    <a:lstStyle/>
+                    <a:p>
+                      <a:r>
+                        <a:rPr sz="1100">
+                          <a:solidFill>
+                            <a:srgbClr val="1A1A1A"/>
+                          </a:solidFill>
+                          <a:latin typeface="맑은 고딕"/>
+                        </a:rPr>
+                        <a:t>254</a:t>
+                      </a:r>
+                    </a:p>
+                  </a:txBody>
+                  <a:tcPr>
+                    <a:solidFill>
+                      <a:srgbClr val="FFFFFF"/>
+                    </a:solidFill>
+                  </a:tcPr>
+                </a:tc>
+                <a:tc>
+                  <a:txBody>
+                    <a:bodyPr/>
+                    <a:lstStyle/>
+                    <a:p>
+                      <a:r>
+                        <a:rPr sz="1100">
+                          <a:solidFill>
+                            <a:srgbClr val="1A1A1A"/>
+                          </a:solidFill>
+                          <a:latin typeface="맑은 고딕"/>
+                        </a:rPr>
+                        <a:t>610</a:t>
+                      </a:r>
+                    </a:p>
+                  </a:txBody>
+                  <a:tcPr>
+                    <a:solidFill>
+                      <a:srgbClr val="FFFFFF"/>
+                    </a:solidFill>
+                  </a:tcPr>
+                </a:tc>
+                <a:tc>
+                  <a:txBody>
+                    <a:bodyPr/>
+                    <a:lstStyle/>
+                    <a:p>
+                      <a:r>
+                        <a:rPr sz="1100">
+                          <a:solidFill>
+                            <a:srgbClr val="1A1A1A"/>
+                          </a:solidFill>
+                          <a:latin typeface="맑은 고딕"/>
+                        </a:rPr>
+                        <a:t>165</a:t>
                       </a:r>
                     </a:p>
                   </a:txBody>
@@ -3861,51 +4697,183 @@
                           </a:solidFill>
                           <a:latin typeface="맑은 고딕"/>
                         </a:rPr>
-                        <a:t>5</a:t>
-                      </a:r>
-                    </a:p>
-                  </a:txBody>
-                  <a:tcPr>
-                    <a:solidFill>
-                      <a:srgbClr val="F2F5F8"/>
-                    </a:solidFill>
-                  </a:tcPr>
-                </a:tc>
-                <a:tc>
-                  <a:txBody>
-                    <a:bodyPr/>
-                    <a:lstStyle/>
-                    <a:p>
-                      <a:r>
-                        <a:rPr sz="1100">
-                          <a:solidFill>
-                            <a:srgbClr val="1A1A1A"/>
-                          </a:solidFill>
-                          <a:latin typeface="맑은 고딕"/>
-                        </a:rPr>
-                        <a:t>6.920</a:t>
-                      </a:r>
-                    </a:p>
-                  </a:txBody>
-                  <a:tcPr>
-                    <a:solidFill>
-                      <a:srgbClr val="F2F5F8"/>
-                    </a:solidFill>
-                  </a:tcPr>
-                </a:tc>
-                <a:tc>
-                  <a:txBody>
-                    <a:bodyPr/>
-                    <a:lstStyle/>
-                    <a:p>
-                      <a:r>
-                        <a:rPr sz="1100">
-                          <a:solidFill>
-                            <a:srgbClr val="1A1A1A"/>
-                          </a:solidFill>
-                          <a:latin typeface="맑은 고딕"/>
-                        </a:rPr>
-                        <a:t>7.760</a:t>
+                        <a:t>persistence 규칙 (베이스라인)</a:t>
+                      </a:r>
+                    </a:p>
+                  </a:txBody>
+                  <a:tcPr>
+                    <a:solidFill>
+                      <a:srgbClr val="F2F5F8"/>
+                    </a:solidFill>
+                  </a:tcPr>
+                </a:tc>
+                <a:tc>
+                  <a:txBody>
+                    <a:bodyPr/>
+                    <a:lstStyle/>
+                    <a:p>
+                      <a:r>
+                        <a:rPr sz="1100">
+                          <a:solidFill>
+                            <a:srgbClr val="1A1A1A"/>
+                          </a:solidFill>
+                          <a:latin typeface="맑은 고딕"/>
+                        </a:rPr>
+                        <a:t>0.327</a:t>
+                      </a:r>
+                    </a:p>
+                  </a:txBody>
+                  <a:tcPr>
+                    <a:solidFill>
+                      <a:srgbClr val="F2F5F8"/>
+                    </a:solidFill>
+                  </a:tcPr>
+                </a:tc>
+                <a:tc>
+                  <a:txBody>
+                    <a:bodyPr/>
+                    <a:lstStyle/>
+                    <a:p>
+                      <a:r>
+                        <a:rPr sz="1100">
+                          <a:solidFill>
+                            <a:srgbClr val="1A1A1A"/>
+                          </a:solidFill>
+                          <a:latin typeface="맑은 고딕"/>
+                        </a:rPr>
+                        <a:t>0.298</a:t>
+                      </a:r>
+                    </a:p>
+                  </a:txBody>
+                  <a:tcPr>
+                    <a:solidFill>
+                      <a:srgbClr val="F2F5F8"/>
+                    </a:solidFill>
+                  </a:tcPr>
+                </a:tc>
+                <a:tc>
+                  <a:txBody>
+                    <a:bodyPr/>
+                    <a:lstStyle/>
+                    <a:p>
+                      <a:r>
+                        <a:rPr sz="1100">
+                          <a:solidFill>
+                            <a:srgbClr val="1A1A1A"/>
+                          </a:solidFill>
+                          <a:latin typeface="맑은 고딕"/>
+                        </a:rPr>
+                        <a:t>0.363</a:t>
+                      </a:r>
+                    </a:p>
+                  </a:txBody>
+                  <a:tcPr>
+                    <a:solidFill>
+                      <a:srgbClr val="F2F5F8"/>
+                    </a:solidFill>
+                  </a:tcPr>
+                </a:tc>
+                <a:tc>
+                  <a:txBody>
+                    <a:bodyPr/>
+                    <a:lstStyle/>
+                    <a:p>
+                      <a:r>
+                        <a:rPr sz="1100">
+                          <a:solidFill>
+                            <a:srgbClr val="1A1A1A"/>
+                          </a:solidFill>
+                          <a:latin typeface="맑은 고딕"/>
+                        </a:rPr>
+                        <a:t>0.661</a:t>
+                      </a:r>
+                    </a:p>
+                  </a:txBody>
+                  <a:tcPr>
+                    <a:solidFill>
+                      <a:srgbClr val="F2F5F8"/>
+                    </a:solidFill>
+                  </a:tcPr>
+                </a:tc>
+                <a:tc>
+                  <a:txBody>
+                    <a:bodyPr/>
+                    <a:lstStyle/>
+                    <a:p>
+                      <a:r>
+                        <a:rPr sz="1100">
+                          <a:solidFill>
+                            <a:srgbClr val="1A1A1A"/>
+                          </a:solidFill>
+                          <a:latin typeface="맑은 고딕"/>
+                        </a:rPr>
+                        <a:t>6.718</a:t>
+                      </a:r>
+                    </a:p>
+                  </a:txBody>
+                  <a:tcPr>
+                    <a:solidFill>
+                      <a:srgbClr val="F2F5F8"/>
+                    </a:solidFill>
+                  </a:tcPr>
+                </a:tc>
+                <a:tc>
+                  <a:txBody>
+                    <a:bodyPr/>
+                    <a:lstStyle/>
+                    <a:p>
+                      <a:r>
+                        <a:rPr sz="1100">
+                          <a:solidFill>
+                            <a:srgbClr val="1A1A1A"/>
+                          </a:solidFill>
+                          <a:latin typeface="맑은 고딕"/>
+                        </a:rPr>
+                        <a:t>152</a:t>
+                      </a:r>
+                    </a:p>
+                  </a:txBody>
+                  <a:tcPr>
+                    <a:solidFill>
+                      <a:srgbClr val="F2F5F8"/>
+                    </a:solidFill>
+                  </a:tcPr>
+                </a:tc>
+                <a:tc>
+                  <a:txBody>
+                    <a:bodyPr/>
+                    <a:lstStyle/>
+                    <a:p>
+                      <a:r>
+                        <a:rPr sz="1100">
+                          <a:solidFill>
+                            <a:srgbClr val="1A1A1A"/>
+                          </a:solidFill>
+                          <a:latin typeface="맑은 고딕"/>
+                        </a:rPr>
+                        <a:t>358</a:t>
+                      </a:r>
+                    </a:p>
+                  </a:txBody>
+                  <a:tcPr>
+                    <a:solidFill>
+                      <a:srgbClr val="F2F5F8"/>
+                    </a:solidFill>
+                  </a:tcPr>
+                </a:tc>
+                <a:tc>
+                  <a:txBody>
+                    <a:bodyPr/>
+                    <a:lstStyle/>
+                    <a:p>
+                      <a:r>
+                        <a:rPr sz="1100">
+                          <a:solidFill>
+                            <a:srgbClr val="1A1A1A"/>
+                          </a:solidFill>
+                          <a:latin typeface="맑은 고딕"/>
+                        </a:rPr>
+                        <a:t>267</a:t>
                       </a:r>
                     </a:p>
                   </a:txBody>
@@ -3929,51 +4897,183 @@
                           </a:solidFill>
                           <a:latin typeface="맑은 고딕"/>
                         </a:rPr>
-                        <a:t>6</a:t>
-                      </a:r>
-                    </a:p>
-                  </a:txBody>
-                  <a:tcPr>
-                    <a:solidFill>
-                      <a:srgbClr val="FFFFFF"/>
-                    </a:solidFill>
-                  </a:tcPr>
-                </a:tc>
-                <a:tc>
-                  <a:txBody>
-                    <a:bodyPr/>
-                    <a:lstStyle/>
-                    <a:p>
-                      <a:r>
-                        <a:rPr sz="1100">
-                          <a:solidFill>
-                            <a:srgbClr val="1A1A1A"/>
-                          </a:solidFill>
-                          <a:latin typeface="맑은 고딕"/>
-                        </a:rPr>
-                        <a:t>7.910</a:t>
-                      </a:r>
-                    </a:p>
-                  </a:txBody>
-                  <a:tcPr>
-                    <a:solidFill>
-                      <a:srgbClr val="FFFFFF"/>
-                    </a:solidFill>
-                  </a:tcPr>
-                </a:tc>
-                <a:tc>
-                  <a:txBody>
-                    <a:bodyPr/>
-                    <a:lstStyle/>
-                    <a:p>
-                      <a:r>
-                        <a:rPr sz="1100">
-                          <a:solidFill>
-                            <a:srgbClr val="1A1A1A"/>
-                          </a:solidFill>
-                          <a:latin typeface="맑은 고딕"/>
-                        </a:rPr>
-                        <a:t>7.900</a:t>
+                        <a:t>회귀 마진 (현행 점예측)</a:t>
+                      </a:r>
+                    </a:p>
+                  </a:txBody>
+                  <a:tcPr>
+                    <a:solidFill>
+                      <a:srgbClr val="FFFFFF"/>
+                    </a:solidFill>
+                  </a:tcPr>
+                </a:tc>
+                <a:tc>
+                  <a:txBody>
+                    <a:bodyPr/>
+                    <a:lstStyle/>
+                    <a:p>
+                      <a:r>
+                        <a:rPr sz="1100">
+                          <a:solidFill>
+                            <a:srgbClr val="1A1A1A"/>
+                          </a:solidFill>
+                          <a:latin typeface="맑은 고딕"/>
+                        </a:rPr>
+                        <a:t>0.322</a:t>
+                      </a:r>
+                    </a:p>
+                  </a:txBody>
+                  <a:tcPr>
+                    <a:solidFill>
+                      <a:srgbClr val="FFFFFF"/>
+                    </a:solidFill>
+                  </a:tcPr>
+                </a:tc>
+                <a:tc>
+                  <a:txBody>
+                    <a:bodyPr/>
+                    <a:lstStyle/>
+                    <a:p>
+                      <a:r>
+                        <a:rPr sz="1100">
+                          <a:solidFill>
+                            <a:srgbClr val="1A1A1A"/>
+                          </a:solidFill>
+                          <a:latin typeface="맑은 고딕"/>
+                        </a:rPr>
+                        <a:t>0.318</a:t>
+                      </a:r>
+                    </a:p>
+                  </a:txBody>
+                  <a:tcPr>
+                    <a:solidFill>
+                      <a:srgbClr val="FFFFFF"/>
+                    </a:solidFill>
+                  </a:tcPr>
+                </a:tc>
+                <a:tc>
+                  <a:txBody>
+                    <a:bodyPr/>
+                    <a:lstStyle/>
+                    <a:p>
+                      <a:r>
+                        <a:rPr sz="1100">
+                          <a:solidFill>
+                            <a:srgbClr val="1A1A1A"/>
+                          </a:solidFill>
+                          <a:latin typeface="맑은 고딕"/>
+                        </a:rPr>
+                        <a:t>0.327</a:t>
+                      </a:r>
+                    </a:p>
+                  </a:txBody>
+                  <a:tcPr>
+                    <a:solidFill>
+                      <a:srgbClr val="FFFFFF"/>
+                    </a:solidFill>
+                  </a:tcPr>
+                </a:tc>
+                <a:tc>
+                  <a:txBody>
+                    <a:bodyPr/>
+                    <a:lstStyle/>
+                    <a:p>
+                      <a:r>
+                        <a:rPr sz="1100">
+                          <a:solidFill>
+                            <a:srgbClr val="1A1A1A"/>
+                          </a:solidFill>
+                          <a:latin typeface="맑은 고딕"/>
+                        </a:rPr>
+                        <a:t>0.651</a:t>
+                      </a:r>
+                    </a:p>
+                  </a:txBody>
+                  <a:tcPr>
+                    <a:solidFill>
+                      <a:srgbClr val="FFFFFF"/>
+                    </a:solidFill>
+                  </a:tcPr>
+                </a:tc>
+                <a:tc>
+                  <a:txBody>
+                    <a:bodyPr/>
+                    <a:lstStyle/>
+                    <a:p>
+                      <a:r>
+                        <a:rPr sz="1100">
+                          <a:solidFill>
+                            <a:srgbClr val="1A1A1A"/>
+                          </a:solidFill>
+                          <a:latin typeface="맑은 고딕"/>
+                        </a:rPr>
+                        <a:t>5.677</a:t>
+                      </a:r>
+                    </a:p>
+                  </a:txBody>
+                  <a:tcPr>
+                    <a:solidFill>
+                      <a:srgbClr val="FFFFFF"/>
+                    </a:solidFill>
+                  </a:tcPr>
+                </a:tc>
+                <a:tc>
+                  <a:txBody>
+                    <a:bodyPr/>
+                    <a:lstStyle/>
+                    <a:p>
+                      <a:r>
+                        <a:rPr sz="1100">
+                          <a:solidFill>
+                            <a:srgbClr val="1A1A1A"/>
+                          </a:solidFill>
+                          <a:latin typeface="맑은 고딕"/>
+                        </a:rPr>
+                        <a:t>137</a:t>
+                      </a:r>
+                    </a:p>
+                  </a:txBody>
+                  <a:tcPr>
+                    <a:solidFill>
+                      <a:srgbClr val="FFFFFF"/>
+                    </a:solidFill>
+                  </a:tcPr>
+                </a:tc>
+                <a:tc>
+                  <a:txBody>
+                    <a:bodyPr/>
+                    <a:lstStyle/>
+                    <a:p>
+                      <a:r>
+                        <a:rPr sz="1100">
+                          <a:solidFill>
+                            <a:srgbClr val="1A1A1A"/>
+                          </a:solidFill>
+                          <a:latin typeface="맑은 고딕"/>
+                        </a:rPr>
+                        <a:t>294</a:t>
+                      </a:r>
+                    </a:p>
+                  </a:txBody>
+                  <a:tcPr>
+                    <a:solidFill>
+                      <a:srgbClr val="FFFFFF"/>
+                    </a:solidFill>
+                  </a:tcPr>
+                </a:tc>
+                <a:tc>
+                  <a:txBody>
+                    <a:bodyPr/>
+                    <a:lstStyle/>
+                    <a:p>
+                      <a:r>
+                        <a:rPr sz="1100">
+                          <a:solidFill>
+                            <a:srgbClr val="1A1A1A"/>
+                          </a:solidFill>
+                          <a:latin typeface="맑은 고딕"/>
+                        </a:rPr>
+                        <a:t>282</a:t>
                       </a:r>
                     </a:p>
                   </a:txBody>
@@ -3997,51 +5097,183 @@
                           </a:solidFill>
                           <a:latin typeface="맑은 고딕"/>
                         </a:rPr>
-                        <a:t>7</a:t>
-                      </a:r>
-                    </a:p>
-                  </a:txBody>
-                  <a:tcPr>
-                    <a:solidFill>
-                      <a:srgbClr val="F2F5F8"/>
-                    </a:solidFill>
-                  </a:tcPr>
-                </a:tc>
-                <a:tc>
-                  <a:txBody>
-                    <a:bodyPr/>
-                    <a:lstStyle/>
-                    <a:p>
-                      <a:r>
-                        <a:rPr sz="1100">
-                          <a:solidFill>
-                            <a:srgbClr val="1A1A1A"/>
-                          </a:solidFill>
-                          <a:latin typeface="맑은 고딕"/>
-                        </a:rPr>
-                        <a:t>9.370</a:t>
-                      </a:r>
-                    </a:p>
-                  </a:txBody>
-                  <a:tcPr>
-                    <a:solidFill>
-                      <a:srgbClr val="F2F5F8"/>
-                    </a:solidFill>
-                  </a:tcPr>
-                </a:tc>
-                <a:tc>
-                  <a:txBody>
-                    <a:bodyPr/>
-                    <a:lstStyle/>
-                    <a:p>
-                      <a:r>
-                        <a:rPr sz="1100">
-                          <a:solidFill>
-                            <a:srgbClr val="1A1A1A"/>
-                          </a:solidFill>
-                          <a:latin typeface="맑은 고딕"/>
-                        </a:rPr>
-                        <a:t>7.910</a:t>
+                        <a:t>스태킹+isotonic</a:t>
+                      </a:r>
+                    </a:p>
+                  </a:txBody>
+                  <a:tcPr>
+                    <a:solidFill>
+                      <a:srgbClr val="F2F5F8"/>
+                    </a:solidFill>
+                  </a:tcPr>
+                </a:tc>
+                <a:tc>
+                  <a:txBody>
+                    <a:bodyPr/>
+                    <a:lstStyle/>
+                    <a:p>
+                      <a:r>
+                        <a:rPr sz="1100">
+                          <a:solidFill>
+                            <a:srgbClr val="1A1A1A"/>
+                          </a:solidFill>
+                          <a:latin typeface="맑은 고딕"/>
+                        </a:rPr>
+                        <a:t>0.251</a:t>
+                      </a:r>
+                    </a:p>
+                  </a:txBody>
+                  <a:tcPr>
+                    <a:solidFill>
+                      <a:srgbClr val="F2F5F8"/>
+                    </a:solidFill>
+                  </a:tcPr>
+                </a:tc>
+                <a:tc>
+                  <a:txBody>
+                    <a:bodyPr/>
+                    <a:lstStyle/>
+                    <a:p>
+                      <a:r>
+                        <a:rPr sz="1100">
+                          <a:solidFill>
+                            <a:srgbClr val="1A1A1A"/>
+                          </a:solidFill>
+                          <a:latin typeface="맑은 고딕"/>
+                        </a:rPr>
+                        <a:t>0.244</a:t>
+                      </a:r>
+                    </a:p>
+                  </a:txBody>
+                  <a:tcPr>
+                    <a:solidFill>
+                      <a:srgbClr val="F2F5F8"/>
+                    </a:solidFill>
+                  </a:tcPr>
+                </a:tc>
+                <a:tc>
+                  <a:txBody>
+                    <a:bodyPr/>
+                    <a:lstStyle/>
+                    <a:p>
+                      <a:r>
+                        <a:rPr sz="1100">
+                          <a:solidFill>
+                            <a:srgbClr val="1A1A1A"/>
+                          </a:solidFill>
+                          <a:latin typeface="맑은 고딕"/>
+                        </a:rPr>
+                        <a:t>0.258</a:t>
+                      </a:r>
+                    </a:p>
+                  </a:txBody>
+                  <a:tcPr>
+                    <a:solidFill>
+                      <a:srgbClr val="F2F5F8"/>
+                    </a:solidFill>
+                  </a:tcPr>
+                </a:tc>
+                <a:tc>
+                  <a:txBody>
+                    <a:bodyPr/>
+                    <a:lstStyle/>
+                    <a:p>
+                      <a:r>
+                        <a:rPr sz="1100">
+                          <a:solidFill>
+                            <a:srgbClr val="1A1A1A"/>
+                          </a:solidFill>
+                          <a:latin typeface="맑은 고딕"/>
+                        </a:rPr>
+                        <a:t>0.565</a:t>
+                      </a:r>
+                    </a:p>
+                  </a:txBody>
+                  <a:tcPr>
+                    <a:solidFill>
+                      <a:srgbClr val="F2F5F8"/>
+                    </a:solidFill>
+                  </a:tcPr>
+                </a:tc>
+                <a:tc>
+                  <a:txBody>
+                    <a:bodyPr/>
+                    <a:lstStyle/>
+                    <a:p>
+                      <a:r>
+                        <a:rPr sz="1100">
+                          <a:solidFill>
+                            <a:srgbClr val="1A1A1A"/>
+                          </a:solidFill>
+                          <a:latin typeface="맑은 고딕"/>
+                        </a:rPr>
+                        <a:t>5.822</a:t>
+                      </a:r>
+                    </a:p>
+                  </a:txBody>
+                  <a:tcPr>
+                    <a:solidFill>
+                      <a:srgbClr val="F2F5F8"/>
+                    </a:solidFill>
+                  </a:tcPr>
+                </a:tc>
+                <a:tc>
+                  <a:txBody>
+                    <a:bodyPr/>
+                    <a:lstStyle/>
+                    <a:p>
+                      <a:r>
+                        <a:rPr sz="1100">
+                          <a:solidFill>
+                            <a:srgbClr val="1A1A1A"/>
+                          </a:solidFill>
+                          <a:latin typeface="맑은 고딕"/>
+                        </a:rPr>
+                        <a:t>108</a:t>
+                      </a:r>
+                    </a:p>
+                  </a:txBody>
+                  <a:tcPr>
+                    <a:solidFill>
+                      <a:srgbClr val="F2F5F8"/>
+                    </a:solidFill>
+                  </a:tcPr>
+                </a:tc>
+                <a:tc>
+                  <a:txBody>
+                    <a:bodyPr/>
+                    <a:lstStyle/>
+                    <a:p>
+                      <a:r>
+                        <a:rPr sz="1100">
+                          <a:solidFill>
+                            <a:srgbClr val="1A1A1A"/>
+                          </a:solidFill>
+                          <a:latin typeface="맑은 고딕"/>
+                        </a:rPr>
+                        <a:t>334</a:t>
+                      </a:r>
+                    </a:p>
+                  </a:txBody>
+                  <a:tcPr>
+                    <a:solidFill>
+                      <a:srgbClr val="F2F5F8"/>
+                    </a:solidFill>
+                  </a:tcPr>
+                </a:tc>
+                <a:tc>
+                  <a:txBody>
+                    <a:bodyPr/>
+                    <a:lstStyle/>
+                    <a:p>
+                      <a:r>
+                        <a:rPr sz="1100">
+                          <a:solidFill>
+                            <a:srgbClr val="1A1A1A"/>
+                          </a:solidFill>
+                          <a:latin typeface="맑은 고딕"/>
+                        </a:rPr>
+                        <a:t>311</a:t>
                       </a:r>
                     </a:p>
                   </a:txBody>
@@ -4065,125 +5297,189 @@
                           </a:solidFill>
                           <a:latin typeface="맑은 고딕"/>
                         </a:rPr>
-                        <a:t>8</a:t>
-                      </a:r>
-                    </a:p>
-                  </a:txBody>
-                  <a:tcPr>
-                    <a:solidFill>
-                      <a:srgbClr val="FFFFFF"/>
-                    </a:solidFill>
-                  </a:tcPr>
-                </a:tc>
-                <a:tc>
-                  <a:txBody>
-                    <a:bodyPr/>
-                    <a:lstStyle/>
-                    <a:p>
-                      <a:r>
-                        <a:rPr sz="1100">
-                          <a:solidFill>
-                            <a:srgbClr val="1A1A1A"/>
-                          </a:solidFill>
-                          <a:latin typeface="맑은 고딕"/>
-                        </a:rPr>
-                        <a:t>11.670</a:t>
-                      </a:r>
-                    </a:p>
-                  </a:txBody>
-                  <a:tcPr>
-                    <a:solidFill>
-                      <a:srgbClr val="FFFFFF"/>
-                    </a:solidFill>
-                  </a:tcPr>
-                </a:tc>
-                <a:tc>
-                  <a:txBody>
-                    <a:bodyPr/>
-                    <a:lstStyle/>
-                    <a:p>
-                      <a:r>
-                        <a:rPr sz="1100">
-                          <a:solidFill>
-                            <a:srgbClr val="1A1A1A"/>
-                          </a:solidFill>
-                          <a:latin typeface="맑은 고딕"/>
-                        </a:rPr>
-                        <a:t>8.860</a:t>
-                      </a:r>
-                    </a:p>
-                  </a:txBody>
-                  <a:tcPr>
-                    <a:solidFill>
-                      <a:srgbClr val="FFFFFF"/>
-                    </a:solidFill>
-                  </a:tcPr>
-                </a:tc>
-              </a:tr>
-              <a:tr h="301752">
-                <a:tc>
-                  <a:txBody>
-                    <a:bodyPr/>
-                    <a:lstStyle/>
-                    <a:p>
-                      <a:r>
-                        <a:rPr sz="1100">
-                          <a:solidFill>
-                            <a:srgbClr val="1A1A1A"/>
-                          </a:solidFill>
-                          <a:latin typeface="맑은 고딕"/>
-                        </a:rPr>
-                        <a:t>9</a:t>
-                      </a:r>
-                    </a:p>
-                  </a:txBody>
-                  <a:tcPr>
-                    <a:solidFill>
-                      <a:srgbClr val="F2F5F8"/>
-                    </a:solidFill>
-                  </a:tcPr>
-                </a:tc>
-                <a:tc>
-                  <a:txBody>
-                    <a:bodyPr/>
-                    <a:lstStyle/>
-                    <a:p>
-                      <a:r>
-                        <a:rPr sz="1100">
-                          <a:solidFill>
-                            <a:srgbClr val="1A1A1A"/>
-                          </a:solidFill>
-                          <a:latin typeface="맑은 고딕"/>
-                        </a:rPr>
-                        <a:t>23.240</a:t>
-                      </a:r>
-                    </a:p>
-                  </a:txBody>
-                  <a:tcPr>
-                    <a:solidFill>
-                      <a:srgbClr val="F2F5F8"/>
-                    </a:solidFill>
-                  </a:tcPr>
-                </a:tc>
-                <a:tc>
-                  <a:txBody>
-                    <a:bodyPr/>
-                    <a:lstStyle/>
-                    <a:p>
-                      <a:r>
-                        <a:rPr sz="1100">
-                          <a:solidFill>
-                            <a:srgbClr val="1A1A1A"/>
-                          </a:solidFill>
-                          <a:latin typeface="맑은 고딕"/>
-                        </a:rPr>
-                        <a:t>10.100</a:t>
-                      </a:r>
-                    </a:p>
-                  </a:txBody>
-                  <a:tcPr>
-                    <a:solidFill>
-                      <a:srgbClr val="F2F5F8"/>
+                        <a:t>스태킹</a:t>
+                      </a:r>
+                    </a:p>
+                  </a:txBody>
+                  <a:tcPr>
+                    <a:solidFill>
+                      <a:srgbClr val="FFFFFF"/>
+                    </a:solidFill>
+                  </a:tcPr>
+                </a:tc>
+                <a:tc>
+                  <a:txBody>
+                    <a:bodyPr/>
+                    <a:lstStyle/>
+                    <a:p>
+                      <a:r>
+                        <a:rPr sz="1100">
+                          <a:solidFill>
+                            <a:srgbClr val="1A1A1A"/>
+                          </a:solidFill>
+                          <a:latin typeface="맑은 고딕"/>
+                        </a:rPr>
+                        <a:t>0.251</a:t>
+                      </a:r>
+                    </a:p>
+                  </a:txBody>
+                  <a:tcPr>
+                    <a:solidFill>
+                      <a:srgbClr val="FFFFFF"/>
+                    </a:solidFill>
+                  </a:tcPr>
+                </a:tc>
+                <a:tc>
+                  <a:txBody>
+                    <a:bodyPr/>
+                    <a:lstStyle/>
+                    <a:p>
+                      <a:r>
+                        <a:rPr sz="1100">
+                          <a:solidFill>
+                            <a:srgbClr val="1A1A1A"/>
+                          </a:solidFill>
+                          <a:latin typeface="맑은 고딕"/>
+                        </a:rPr>
+                        <a:t>0.244</a:t>
+                      </a:r>
+                    </a:p>
+                  </a:txBody>
+                  <a:tcPr>
+                    <a:solidFill>
+                      <a:srgbClr val="FFFFFF"/>
+                    </a:solidFill>
+                  </a:tcPr>
+                </a:tc>
+                <a:tc>
+                  <a:txBody>
+                    <a:bodyPr/>
+                    <a:lstStyle/>
+                    <a:p>
+                      <a:r>
+                        <a:rPr sz="1100">
+                          <a:solidFill>
+                            <a:srgbClr val="1A1A1A"/>
+                          </a:solidFill>
+                          <a:latin typeface="맑은 고딕"/>
+                        </a:rPr>
+                        <a:t>0.258</a:t>
+                      </a:r>
+                    </a:p>
+                  </a:txBody>
+                  <a:tcPr>
+                    <a:solidFill>
+                      <a:srgbClr val="FFFFFF"/>
+                    </a:solidFill>
+                  </a:tcPr>
+                </a:tc>
+                <a:tc>
+                  <a:txBody>
+                    <a:bodyPr/>
+                    <a:lstStyle/>
+                    <a:p>
+                      <a:r>
+                        <a:rPr sz="1100">
+                          <a:solidFill>
+                            <a:srgbClr val="1A1A1A"/>
+                          </a:solidFill>
+                          <a:latin typeface="맑은 고딕"/>
+                        </a:rPr>
+                        <a:t>0.570</a:t>
+                      </a:r>
+                    </a:p>
+                  </a:txBody>
+                  <a:tcPr>
+                    <a:solidFill>
+                      <a:srgbClr val="FFFFFF"/>
+                    </a:solidFill>
+                  </a:tcPr>
+                </a:tc>
+                <a:tc>
+                  <a:txBody>
+                    <a:bodyPr/>
+                    <a:lstStyle/>
+                    <a:p>
+                      <a:r>
+                        <a:rPr sz="1100">
+                          <a:solidFill>
+                            <a:srgbClr val="1A1A1A"/>
+                          </a:solidFill>
+                          <a:latin typeface="맑은 고딕"/>
+                        </a:rPr>
+                        <a:t>5.835</a:t>
+                      </a:r>
+                    </a:p>
+                  </a:txBody>
+                  <a:tcPr>
+                    <a:solidFill>
+                      <a:srgbClr val="FFFFFF"/>
+                    </a:solidFill>
+                  </a:tcPr>
+                </a:tc>
+                <a:tc>
+                  <a:txBody>
+                    <a:bodyPr/>
+                    <a:lstStyle/>
+                    <a:p>
+                      <a:r>
+                        <a:rPr sz="1100">
+                          <a:solidFill>
+                            <a:srgbClr val="1A1A1A"/>
+                          </a:solidFill>
+                          <a:latin typeface="맑은 고딕"/>
+                        </a:rPr>
+                        <a:t>108</a:t>
+                      </a:r>
+                    </a:p>
+                  </a:txBody>
+                  <a:tcPr>
+                    <a:solidFill>
+                      <a:srgbClr val="FFFFFF"/>
+                    </a:solidFill>
+                  </a:tcPr>
+                </a:tc>
+                <a:tc>
+                  <a:txBody>
+                    <a:bodyPr/>
+                    <a:lstStyle/>
+                    <a:p>
+                      <a:r>
+                        <a:rPr sz="1100">
+                          <a:solidFill>
+                            <a:srgbClr val="1A1A1A"/>
+                          </a:solidFill>
+                          <a:latin typeface="맑은 고딕"/>
+                        </a:rPr>
+                        <a:t>335</a:t>
+                      </a:r>
+                    </a:p>
+                  </a:txBody>
+                  <a:tcPr>
+                    <a:solidFill>
+                      <a:srgbClr val="FFFFFF"/>
+                    </a:solidFill>
+                  </a:tcPr>
+                </a:tc>
+                <a:tc>
+                  <a:txBody>
+                    <a:bodyPr/>
+                    <a:lstStyle/>
+                    <a:p>
+                      <a:r>
+                        <a:rPr sz="1100">
+                          <a:solidFill>
+                            <a:srgbClr val="1A1A1A"/>
+                          </a:solidFill>
+                          <a:latin typeface="맑은 고딕"/>
+                        </a:rPr>
+                        <a:t>311</a:t>
+                      </a:r>
+                    </a:p>
+                  </a:txBody>
+                  <a:tcPr>
+                    <a:solidFill>
+                      <a:srgbClr val="FFFFFF"/>
                     </a:solidFill>
                   </a:tcPr>
                 </a:tc>
@@ -4200,126 +5496,7 @@
         </p:nvSpPr>
         <p:spPr>
           <a:xfrm>
-            <a:off x="5120640" y="1554480"/>
-            <a:ext cx="6583680" cy="4846320"/>
-          </a:xfrm>
-          <a:prstGeom prst="rect">
-            <a:avLst/>
-          </a:prstGeom>
-          <a:noFill/>
-        </p:spPr>
-        <p:txBody>
-          <a:bodyPr wrap="square">
-            <a:spAutoFit/>
-          </a:bodyPr>
-          <a:lstStyle/>
-          <a:p>
-            <a:pPr>
-              <a:spcAft>
-                <a:spcPts val="500"/>
-              </a:spcAft>
-            </a:pPr>
-            <a:r>
-              <a:rPr sz="1400" b="1">
-                <a:solidFill>
-                  <a:srgbClr val="1A1A1A"/>
-                </a:solidFill>
-                <a:latin typeface="맑은 고딕"/>
-              </a:rPr>
-              <a:t>■ ① 지시력은 있다 — 거리 최하위 십분위 MAE 6.44 → 최상위 10.10 kw</a:t>
-            </a:r>
-          </a:p>
-          <a:p>
-            <a:pPr>
-              <a:spcAft>
-                <a:spcPts val="500"/>
-              </a:spcAft>
-            </a:pPr>
-            <a:r>
-              <a:rPr sz="1400" b="1">
-                <a:solidFill>
-                  <a:srgbClr val="1A1A1A"/>
-                </a:solidFill>
-                <a:latin typeface="맑은 고딕"/>
-              </a:rPr>
-              <a:t>■ ② 그러나 포기 기준으로 쓰기엔 약하다 — OOD 판정은 전체의 0.8%뿐</a:t>
-            </a:r>
-          </a:p>
-          <a:p>
-            <a:pPr>
-              <a:spcAft>
-                <a:spcPts val="500"/>
-              </a:spcAft>
-            </a:pPr>
-            <a:r>
-              <a:rPr sz="1400" b="1">
-                <a:solidFill>
-                  <a:srgbClr val="1A1A1A"/>
-                </a:solidFill>
-                <a:latin typeface="맑은 고딕"/>
-              </a:rPr>
-              <a:t>■ ③ 답은 '모델을 좋게 만드는 것' 이었다</a:t>
-            </a:r>
-          </a:p>
-          <a:p>
-            <a:pPr lvl="1">
-              <a:spcAft>
-                <a:spcPts val="500"/>
-              </a:spcAft>
-            </a:pPr>
-            <a:r>
-              <a:rPr sz="1250" b="0">
-                <a:solidFill>
-                  <a:srgbClr val="555A60"/>
-                </a:solidFill>
-                <a:latin typeface="맑은 고딕"/>
-              </a:rPr>
-              <a:t>– OOD 구간 MAE / 정상 구간 MAE = 1.69(A0) → 1.55(A5)</a:t>
-            </a:r>
-          </a:p>
-          <a:p>
-            <a:pPr>
-              <a:spcAft>
-                <a:spcPts val="500"/>
-              </a:spcAft>
-            </a:pPr>
-            <a:r>
-              <a:rPr sz="1400" b="1">
-                <a:solidFill>
-                  <a:srgbClr val="1A1A1A"/>
-                </a:solidFill>
-                <a:latin typeface="맑은 고딕"/>
-              </a:rPr>
-              <a:t>■ ④ OOD 구간을 일부러 더 보게 가중(A6)하면 오히려 악화 — 기각</a:t>
-            </a:r>
-          </a:p>
-          <a:p>
-            <a:pPr lvl="1">
-              <a:spcAft>
-                <a:spcPts val="500"/>
-              </a:spcAft>
-            </a:pPr>
-            <a:r>
-              <a:rPr sz="1250" b="0">
-                <a:solidFill>
-                  <a:srgbClr val="555A60"/>
-                </a:solidFill>
-                <a:latin typeface="맑은 고딕"/>
-              </a:rPr>
-              <a:t>– OOD 구간 MAE 차 +1.099 kw, 95% CI [0.017, 2.541] (0 미포함, 악화 방향)</a:t>
-            </a:r>
-          </a:p>
-        </p:txBody>
-      </p:sp>
-      <p:sp>
-        <p:nvSpPr>
-          <p:cNvPr id="7" name="TextBox 6"/>
-          <p:cNvSpPr txBox="1"/>
-          <p:nvPr/>
-        </p:nvSpPr>
-        <p:spPr>
-          <a:xfrm>
-            <a:off x="594360" y="6263640"/>
+            <a:off x="594360" y="6035040"/>
             <a:ext cx="10972800" cy="411480"/>
           </a:xfrm>
           <a:prstGeom prst="rect">
@@ -4340,7 +5517,7 @@
                 </a:solidFill>
                 <a:latin typeface="맑은 고딕"/>
               </a:rPr>
-              <a:t>결론: OOD 는 '어디가 약한지' 를 보여주는 진단 도구다. 그 구간을 피하거나 억지로 가중하는 것은 검증 결과 효과가 없었다. 공개한다.</a:t>
+              <a:t>선정 규칙(제약은 실험 이전부터 config 에 있던 operator_advisory_capacity=12): 경보 12건/일 이하 후보 중 clean F1 최대, 동점 시 사건 recall. HistGBM 은 12.4건/일로 용량 초과. 스태킹은 전 구간 F1 0.477 이었으나 clean 에서 0.251 로 붕괴(중복일 과적합) → 기각.</a:t>
             </a:r>
           </a:p>
         </p:txBody>
@@ -4443,7 +5620,7 @@
                 </a:solidFill>
                 <a:latin typeface="맑은 고딕"/>
               </a:rPr>
-              <a:t>제4장 · 현장 활용 — 사건당 한 번, 남은 준비시간과 함께</a:t>
+              <a:t>제3장 · F1 감사 — 0.47 은 한계인가 결함인가</a:t>
             </a:r>
           </a:p>
         </p:txBody>
@@ -4477,7 +5654,7 @@
                 </a:solidFill>
                 <a:latin typeface="맑은 고딕"/>
               </a:rPr>
-              <a:t>선행시간이 제도적으로 의미 있는 길이여야 한다</a:t>
+              <a:t>같은 크기의 오차를 '편향 없이' 가졌을 때의 F1 상한을 측정했다</a:t>
             </a:r>
           </a:p>
         </p:txBody>
@@ -4492,7 +5669,7 @@
         </p:nvGraphicFramePr>
         <p:xfrm>
           <a:off x="594360" y="1463040"/>
-          <a:ext cx="10972800" cy="1508760"/>
+          <a:ext cx="6035040" cy="2112264"/>
         </p:xfrm>
         <a:graphic>
           <a:graphicData uri="http://schemas.openxmlformats.org/drawingml/2006/table">
@@ -4501,9 +5678,12 @@
                 <a:tableStyleId>{5C22544A-7EE6-4342-B048-85BDC9FD1C3A}</a:tableStyleId>
               </a:tblPr>
               <a:tblGrid>
-                <a:gridCol w="3657600"/>
-                <a:gridCol w="3657600"/>
-                <a:gridCol w="3657600"/>
+                <a:gridCol w="1005840"/>
+                <a:gridCol w="1005840"/>
+                <a:gridCol w="1005840"/>
+                <a:gridCol w="1005840"/>
+                <a:gridCol w="1005840"/>
+                <a:gridCol w="1005840"/>
               </a:tblGrid>
               <a:tr h="301752">
                 <a:tc>
@@ -4512,13 +5692,13 @@
                     <a:lstStyle/>
                     <a:p>
                       <a:r>
-                        <a:rPr sz="1100" b="1">
+                        <a:rPr sz="1000" b="1">
                           <a:solidFill>
                             <a:srgbClr val="FFFFFF"/>
                           </a:solidFill>
                           <a:latin typeface="맑은 고딕"/>
                         </a:rPr>
-                        <a:t>선행(분)</a:t>
+                        <a:t>모델</a:t>
                       </a:r>
                     </a:p>
                   </a:txBody>
@@ -4534,13 +5714,13 @@
                     <a:lstStyle/>
                     <a:p>
                       <a:r>
-                        <a:rPr sz="1100" b="1">
+                        <a:rPr sz="1000" b="1">
                           <a:solidFill>
                             <a:srgbClr val="FFFFFF"/>
                           </a:solidFill>
                           <a:latin typeface="맑은 고딕"/>
                         </a:rPr>
-                        <a:t>제도·문헌 근거</a:t>
+                        <a:t>MAE</a:t>
                       </a:r>
                     </a:p>
                   </a:txBody>
@@ -4556,13 +5736,79 @@
                     <a:lstStyle/>
                     <a:p>
                       <a:r>
-                        <a:rPr sz="1100" b="1">
+                        <a:rPr sz="1000" b="1">
                           <a:solidFill>
                             <a:srgbClr val="FFFFFF"/>
                           </a:solidFill>
                           <a:latin typeface="맑은 고딕"/>
                         </a:rPr>
-                        <a:t>본 시스템에서의 역할</a:t>
+                        <a:t>전체 편향</a:t>
+                      </a:r>
+                    </a:p>
+                  </a:txBody>
+                  <a:tcPr>
+                    <a:solidFill>
+                      <a:srgbClr val="1F5C99"/>
+                    </a:solidFill>
+                  </a:tcPr>
+                </a:tc>
+                <a:tc>
+                  <a:txBody>
+                    <a:bodyPr/>
+                    <a:lstStyle/>
+                    <a:p>
+                      <a:r>
+                        <a:rPr sz="1000" b="1">
+                          <a:solidFill>
+                            <a:srgbClr val="FFFFFF"/>
+                          </a:solidFill>
+                          <a:latin typeface="맑은 고딕"/>
+                        </a:rPr>
+                        <a:t>고사용량 편향</a:t>
+                      </a:r>
+                    </a:p>
+                  </a:txBody>
+                  <a:tcPr>
+                    <a:solidFill>
+                      <a:srgbClr val="1F5C99"/>
+                    </a:solidFill>
+                  </a:tcPr>
+                </a:tc>
+                <a:tc>
+                  <a:txBody>
+                    <a:bodyPr/>
+                    <a:lstStyle/>
+                    <a:p>
+                      <a:r>
+                        <a:rPr sz="1000" b="1">
+                          <a:solidFill>
+                            <a:srgbClr val="FFFFFF"/>
+                          </a:solidFill>
+                          <a:latin typeface="맑은 고딕"/>
+                        </a:rPr>
+                        <a:t>피크 중 임계초과</a:t>
+                      </a:r>
+                    </a:p>
+                  </a:txBody>
+                  <a:tcPr>
+                    <a:solidFill>
+                      <a:srgbClr val="1F5C99"/>
+                    </a:solidFill>
+                  </a:tcPr>
+                </a:tc>
+                <a:tc>
+                  <a:txBody>
+                    <a:bodyPr/>
+                    <a:lstStyle/>
+                    <a:p>
+                      <a:r>
+                        <a:rPr sz="1000" b="1">
+                          <a:solidFill>
+                            <a:srgbClr val="FFFFFF"/>
+                          </a:solidFill>
+                          <a:latin typeface="맑은 고딕"/>
+                        </a:rPr>
+                        <a:t>오라클 F1</a:t>
                       </a:r>
                     </a:p>
                   </a:txBody>
@@ -4580,57 +5826,123 @@
                     <a:lstStyle/>
                     <a:p>
                       <a:r>
-                        <a:rPr sz="1100">
-                          <a:solidFill>
-                            <a:srgbClr val="1A1A1A"/>
-                          </a:solidFill>
-                          <a:latin typeface="맑은 고딕"/>
-                        </a:rPr>
-                        <a:t>15</a:t>
-                      </a:r>
-                    </a:p>
-                  </a:txBody>
-                  <a:tcPr>
-                    <a:solidFill>
-                      <a:srgbClr val="FFFFFF"/>
-                    </a:solidFill>
-                  </a:tcPr>
-                </a:tc>
-                <a:tc>
-                  <a:txBody>
-                    <a:bodyPr/>
-                    <a:lstStyle/>
-                    <a:p>
-                      <a:r>
-                        <a:rPr sz="1100">
-                          <a:solidFill>
-                            <a:srgbClr val="1A1A1A"/>
-                          </a:solidFill>
-                          <a:latin typeface="맑은 고딕"/>
-                        </a:rPr>
-                        <a:t>한전 수요시한(디멘드 타임) 15분</a:t>
-                      </a:r>
-                    </a:p>
-                  </a:txBody>
-                  <a:tcPr>
-                    <a:solidFill>
-                      <a:srgbClr val="FFFFFF"/>
-                    </a:solidFill>
-                  </a:tcPr>
-                </a:tc>
-                <a:tc>
-                  <a:txBody>
-                    <a:bodyPr/>
-                    <a:lstStyle/>
-                    <a:p>
-                      <a:r>
-                        <a:rPr sz="1100">
-                          <a:solidFill>
-                            <a:srgbClr val="1A1A1A"/>
-                          </a:solidFill>
-                          <a:latin typeface="맑은 고딕"/>
-                        </a:rPr>
-                        <a:t>기존 제어기가 이미 커버하는 구간. h15 는 '기존 수준 재현' 비교군</a:t>
+                        <a:rPr sz="1000">
+                          <a:solidFill>
+                            <a:srgbClr val="1A1A1A"/>
+                          </a:solidFill>
+                          <a:latin typeface="맑은 고딕"/>
+                        </a:rPr>
+                        <a:t>HistGBM ★현행</a:t>
+                      </a:r>
+                    </a:p>
+                  </a:txBody>
+                  <a:tcPr>
+                    <a:solidFill>
+                      <a:srgbClr val="FFFFFF"/>
+                    </a:solidFill>
+                  </a:tcPr>
+                </a:tc>
+                <a:tc>
+                  <a:txBody>
+                    <a:bodyPr/>
+                    <a:lstStyle/>
+                    <a:p>
+                      <a:r>
+                        <a:rPr sz="1000">
+                          <a:solidFill>
+                            <a:srgbClr val="1A1A1A"/>
+                          </a:solidFill>
+                          <a:latin typeface="맑은 고딕"/>
+                        </a:rPr>
+                        <a:t>7.862</a:t>
+                      </a:r>
+                    </a:p>
+                  </a:txBody>
+                  <a:tcPr>
+                    <a:solidFill>
+                      <a:srgbClr val="FFFFFF"/>
+                    </a:solidFill>
+                  </a:tcPr>
+                </a:tc>
+                <a:tc>
+                  <a:txBody>
+                    <a:bodyPr/>
+                    <a:lstStyle/>
+                    <a:p>
+                      <a:r>
+                        <a:rPr sz="1000">
+                          <a:solidFill>
+                            <a:srgbClr val="1A1A1A"/>
+                          </a:solidFill>
+                          <a:latin typeface="맑은 고딕"/>
+                        </a:rPr>
+                        <a:t>-0.962</a:t>
+                      </a:r>
+                    </a:p>
+                  </a:txBody>
+                  <a:tcPr>
+                    <a:solidFill>
+                      <a:srgbClr val="FFFFFF"/>
+                    </a:solidFill>
+                  </a:tcPr>
+                </a:tc>
+                <a:tc>
+                  <a:txBody>
+                    <a:bodyPr/>
+                    <a:lstStyle/>
+                    <a:p>
+                      <a:r>
+                        <a:rPr sz="1000">
+                          <a:solidFill>
+                            <a:srgbClr val="1A1A1A"/>
+                          </a:solidFill>
+                          <a:latin typeface="맑은 고딕"/>
+                        </a:rPr>
+                        <a:t>14.750</a:t>
+                      </a:r>
+                    </a:p>
+                  </a:txBody>
+                  <a:tcPr>
+                    <a:solidFill>
+                      <a:srgbClr val="FFFFFF"/>
+                    </a:solidFill>
+                  </a:tcPr>
+                </a:tc>
+                <a:tc>
+                  <a:txBody>
+                    <a:bodyPr/>
+                    <a:lstStyle/>
+                    <a:p>
+                      <a:r>
+                        <a:rPr sz="1000">
+                          <a:solidFill>
+                            <a:srgbClr val="1A1A1A"/>
+                          </a:solidFill>
+                          <a:latin typeface="맑은 고딕"/>
+                        </a:rPr>
+                        <a:t>0.184</a:t>
+                      </a:r>
+                    </a:p>
+                  </a:txBody>
+                  <a:tcPr>
+                    <a:solidFill>
+                      <a:srgbClr val="FFFFFF"/>
+                    </a:solidFill>
+                  </a:tcPr>
+                </a:tc>
+                <a:tc>
+                  <a:txBody>
+                    <a:bodyPr/>
+                    <a:lstStyle/>
+                    <a:p>
+                      <a:r>
+                        <a:rPr sz="1000">
+                          <a:solidFill>
+                            <a:srgbClr val="1A1A1A"/>
+                          </a:solidFill>
+                          <a:latin typeface="맑은 고딕"/>
+                        </a:rPr>
+                        <a:t>0.693</a:t>
                       </a:r>
                     </a:p>
                   </a:txBody>
@@ -4648,57 +5960,123 @@
                     <a:lstStyle/>
                     <a:p>
                       <a:r>
-                        <a:rPr sz="1100">
-                          <a:solidFill>
-                            <a:srgbClr val="1A1A1A"/>
-                          </a:solidFill>
-                          <a:latin typeface="맑은 고딕"/>
-                        </a:rPr>
-                        <a:t>60</a:t>
-                      </a:r>
-                    </a:p>
-                  </a:txBody>
-                  <a:tcPr>
-                    <a:solidFill>
-                      <a:srgbClr val="F2F5F8"/>
-                    </a:solidFill>
-                  </a:tcPr>
-                </a:tc>
-                <a:tc>
-                  <a:txBody>
-                    <a:bodyPr/>
-                    <a:lstStyle/>
-                    <a:p>
-                      <a:r>
-                        <a:rPr sz="1100">
-                          <a:solidFill>
-                            <a:srgbClr val="1A1A1A"/>
-                          </a:solidFill>
-                          <a:latin typeface="맑은 고딕"/>
-                        </a:rPr>
-                        <a:t>KPX 수요자원 거래시장 감축요청 통보 리드타임</a:t>
-                      </a:r>
-                    </a:p>
-                  </a:txBody>
-                  <a:tcPr>
-                    <a:solidFill>
-                      <a:srgbClr val="F2F5F8"/>
-                    </a:solidFill>
-                  </a:tcPr>
-                </a:tc>
-                <a:tc>
-                  <a:txBody>
-                    <a:bodyPr/>
-                    <a:lstStyle/>
-                    <a:p>
-                      <a:r>
-                        <a:rPr sz="1100">
-                          <a:solidFill>
-                            <a:srgbClr val="1A1A1A"/>
-                          </a:solidFill>
-                          <a:latin typeface="맑은 고딕"/>
-                        </a:rPr>
-                        <a:t>h60 = 제도상 표준 통보 리드타임과 일치. 본 시스템의 주 호라이즌</a:t>
+                        <a:rPr sz="1000">
+                          <a:solidFill>
+                            <a:srgbClr val="1A1A1A"/>
+                          </a:solidFill>
+                          <a:latin typeface="맑은 고딕"/>
+                        </a:rPr>
+                        <a:t>ExtraTrees</a:t>
+                      </a:r>
+                    </a:p>
+                  </a:txBody>
+                  <a:tcPr>
+                    <a:solidFill>
+                      <a:srgbClr val="F2F5F8"/>
+                    </a:solidFill>
+                  </a:tcPr>
+                </a:tc>
+                <a:tc>
+                  <a:txBody>
+                    <a:bodyPr/>
+                    <a:lstStyle/>
+                    <a:p>
+                      <a:r>
+                        <a:rPr sz="1000">
+                          <a:solidFill>
+                            <a:srgbClr val="1A1A1A"/>
+                          </a:solidFill>
+                          <a:latin typeface="맑은 고딕"/>
+                        </a:rPr>
+                        <a:t>7.077</a:t>
+                      </a:r>
+                    </a:p>
+                  </a:txBody>
+                  <a:tcPr>
+                    <a:solidFill>
+                      <a:srgbClr val="F2F5F8"/>
+                    </a:solidFill>
+                  </a:tcPr>
+                </a:tc>
+                <a:tc>
+                  <a:txBody>
+                    <a:bodyPr/>
+                    <a:lstStyle/>
+                    <a:p>
+                      <a:r>
+                        <a:rPr sz="1000">
+                          <a:solidFill>
+                            <a:srgbClr val="1A1A1A"/>
+                          </a:solidFill>
+                          <a:latin typeface="맑은 고딕"/>
+                        </a:rPr>
+                        <a:t>0.155</a:t>
+                      </a:r>
+                    </a:p>
+                  </a:txBody>
+                  <a:tcPr>
+                    <a:solidFill>
+                      <a:srgbClr val="F2F5F8"/>
+                    </a:solidFill>
+                  </a:tcPr>
+                </a:tc>
+                <a:tc>
+                  <a:txBody>
+                    <a:bodyPr/>
+                    <a:lstStyle/>
+                    <a:p>
+                      <a:r>
+                        <a:rPr sz="1000">
+                          <a:solidFill>
+                            <a:srgbClr val="1A1A1A"/>
+                          </a:solidFill>
+                          <a:latin typeface="맑은 고딕"/>
+                        </a:rPr>
+                        <a:t>16.142</a:t>
+                      </a:r>
+                    </a:p>
+                  </a:txBody>
+                  <a:tcPr>
+                    <a:solidFill>
+                      <a:srgbClr val="F2F5F8"/>
+                    </a:solidFill>
+                  </a:tcPr>
+                </a:tc>
+                <a:tc>
+                  <a:txBody>
+                    <a:bodyPr/>
+                    <a:lstStyle/>
+                    <a:p>
+                      <a:r>
+                        <a:rPr sz="1000">
+                          <a:solidFill>
+                            <a:srgbClr val="1A1A1A"/>
+                          </a:solidFill>
+                          <a:latin typeface="맑은 고딕"/>
+                        </a:rPr>
+                        <a:t>0.126</a:t>
+                      </a:r>
+                    </a:p>
+                  </a:txBody>
+                  <a:tcPr>
+                    <a:solidFill>
+                      <a:srgbClr val="F2F5F8"/>
+                    </a:solidFill>
+                  </a:tcPr>
+                </a:tc>
+                <a:tc>
+                  <a:txBody>
+                    <a:bodyPr/>
+                    <a:lstStyle/>
+                    <a:p>
+                      <a:r>
+                        <a:rPr sz="1000">
+                          <a:solidFill>
+                            <a:srgbClr val="1A1A1A"/>
+                          </a:solidFill>
+                          <a:latin typeface="맑은 고딕"/>
+                        </a:rPr>
+                        <a:t>0.710</a:t>
                       </a:r>
                     </a:p>
                   </a:txBody>
@@ -4716,57 +6094,123 @@
                     <a:lstStyle/>
                     <a:p>
                       <a:r>
-                        <a:rPr sz="1100">
-                          <a:solidFill>
-                            <a:srgbClr val="1A1A1A"/>
-                          </a:solidFill>
-                          <a:latin typeface="맑은 고딕"/>
-                        </a:rPr>
-                        <a:t>30</a:t>
-                      </a:r>
-                    </a:p>
-                  </a:txBody>
-                  <a:tcPr>
-                    <a:solidFill>
-                      <a:srgbClr val="FFFFFF"/>
-                    </a:solidFill>
-                  </a:tcPr>
-                </a:tc>
-                <a:tc>
-                  <a:txBody>
-                    <a:bodyPr/>
-                    <a:lstStyle/>
-                    <a:p>
-                      <a:r>
-                        <a:rPr sz="1100">
-                          <a:solidFill>
-                            <a:srgbClr val="1A1A1A"/>
-                          </a:solidFill>
-                          <a:latin typeface="맑은 고딕"/>
-                        </a:rPr>
-                        <a:t>KPX 추가 감축요청 여유(30분)</a:t>
-                      </a:r>
-                    </a:p>
-                  </a:txBody>
-                  <a:tcPr>
-                    <a:solidFill>
-                      <a:srgbClr val="FFFFFF"/>
-                    </a:solidFill>
-                  </a:tcPr>
-                </a:tc>
-                <a:tc>
-                  <a:txBody>
-                    <a:bodyPr/>
-                    <a:lstStyle/>
-                    <a:p>
-                      <a:r>
-                        <a:rPr sz="1100">
-                          <a:solidFill>
-                            <a:srgbClr val="1A1A1A"/>
-                          </a:solidFill>
-                          <a:latin typeface="맑은 고딕"/>
-                        </a:rPr>
-                        <a:t>minimum_lead_minutes=30 의 근거. 이보다 짧으면 제도적 조치 창이 없음</a:t>
+                        <a:rPr sz="1000">
+                          <a:solidFill>
+                            <a:srgbClr val="1A1A1A"/>
+                          </a:solidFill>
+                          <a:latin typeface="맑은 고딕"/>
+                        </a:rPr>
+                        <a:t>RandomForest</a:t>
+                      </a:r>
+                    </a:p>
+                  </a:txBody>
+                  <a:tcPr>
+                    <a:solidFill>
+                      <a:srgbClr val="FFFFFF"/>
+                    </a:solidFill>
+                  </a:tcPr>
+                </a:tc>
+                <a:tc>
+                  <a:txBody>
+                    <a:bodyPr/>
+                    <a:lstStyle/>
+                    <a:p>
+                      <a:r>
+                        <a:rPr sz="1000">
+                          <a:solidFill>
+                            <a:srgbClr val="1A1A1A"/>
+                          </a:solidFill>
+                          <a:latin typeface="맑은 고딕"/>
+                        </a:rPr>
+                        <a:t>7.595</a:t>
+                      </a:r>
+                    </a:p>
+                  </a:txBody>
+                  <a:tcPr>
+                    <a:solidFill>
+                      <a:srgbClr val="FFFFFF"/>
+                    </a:solidFill>
+                  </a:tcPr>
+                </a:tc>
+                <a:tc>
+                  <a:txBody>
+                    <a:bodyPr/>
+                    <a:lstStyle/>
+                    <a:p>
+                      <a:r>
+                        <a:rPr sz="1000">
+                          <a:solidFill>
+                            <a:srgbClr val="1A1A1A"/>
+                          </a:solidFill>
+                          <a:latin typeface="맑은 고딕"/>
+                        </a:rPr>
+                        <a:t>0.208</a:t>
+                      </a:r>
+                    </a:p>
+                  </a:txBody>
+                  <a:tcPr>
+                    <a:solidFill>
+                      <a:srgbClr val="FFFFFF"/>
+                    </a:solidFill>
+                  </a:tcPr>
+                </a:tc>
+                <a:tc>
+                  <a:txBody>
+                    <a:bodyPr/>
+                    <a:lstStyle/>
+                    <a:p>
+                      <a:r>
+                        <a:rPr sz="1000">
+                          <a:solidFill>
+                            <a:srgbClr val="1A1A1A"/>
+                          </a:solidFill>
+                          <a:latin typeface="맑은 고딕"/>
+                        </a:rPr>
+                        <a:t>16.931</a:t>
+                      </a:r>
+                    </a:p>
+                  </a:txBody>
+                  <a:tcPr>
+                    <a:solidFill>
+                      <a:srgbClr val="FFFFFF"/>
+                    </a:solidFill>
+                  </a:tcPr>
+                </a:tc>
+                <a:tc>
+                  <a:txBody>
+                    <a:bodyPr/>
+                    <a:lstStyle/>
+                    <a:p>
+                      <a:r>
+                        <a:rPr sz="1000">
+                          <a:solidFill>
+                            <a:srgbClr val="1A1A1A"/>
+                          </a:solidFill>
+                          <a:latin typeface="맑은 고딕"/>
+                        </a:rPr>
+                        <a:t>0.119</a:t>
+                      </a:r>
+                    </a:p>
+                  </a:txBody>
+                  <a:tcPr>
+                    <a:solidFill>
+                      <a:srgbClr val="FFFFFF"/>
+                    </a:solidFill>
+                  </a:tcPr>
+                </a:tc>
+                <a:tc>
+                  <a:txBody>
+                    <a:bodyPr/>
+                    <a:lstStyle/>
+                    <a:p>
+                      <a:r>
+                        <a:rPr sz="1000">
+                          <a:solidFill>
+                            <a:srgbClr val="1A1A1A"/>
+                          </a:solidFill>
+                          <a:latin typeface="맑은 고딕"/>
+                        </a:rPr>
+                        <a:t>0.698</a:t>
                       </a:r>
                     </a:p>
                   </a:txBody>
@@ -4784,57 +6228,391 @@
                     <a:lstStyle/>
                     <a:p>
                       <a:r>
-                        <a:rPr sz="1100">
-                          <a:solidFill>
-                            <a:srgbClr val="1A1A1A"/>
-                          </a:solidFill>
-                          <a:latin typeface="맑은 고딕"/>
-                        </a:rPr>
-                        <a:t>30</a:t>
-                      </a:r>
-                    </a:p>
-                  </a:txBody>
-                  <a:tcPr>
-                    <a:solidFill>
-                      <a:srgbClr val="F2F5F8"/>
-                    </a:solidFill>
-                  </a:tcPr>
-                </a:tc>
-                <a:tc>
-                  <a:txBody>
-                    <a:bodyPr/>
-                    <a:lstStyle/>
-                    <a:p>
-                      <a:r>
-                        <a:rPr sz="1100">
-                          <a:solidFill>
-                            <a:srgbClr val="1A1A1A"/>
-                          </a:solidFill>
-                          <a:latin typeface="맑은 고딕"/>
-                        </a:rPr>
-                        <a:t>산업 수요관리 스케줄링의 표준 시간슬롯</a:t>
-                      </a:r>
-                    </a:p>
-                  </a:txBody>
-                  <a:tcPr>
-                    <a:solidFill>
-                      <a:srgbClr val="F2F5F8"/>
-                    </a:solidFill>
-                  </a:tcPr>
-                </a:tc>
-                <a:tc>
-                  <a:txBody>
-                    <a:bodyPr/>
-                    <a:lstStyle/>
-                    <a:p>
-                      <a:r>
-                        <a:rPr sz="1100">
-                          <a:solidFill>
-                            <a:srgbClr val="1A1A1A"/>
-                          </a:solidFill>
-                          <a:latin typeface="맑은 고딕"/>
-                        </a:rPr>
-                        <a:t>30분 하한의 문헌적 보강</a:t>
+                        <a:rPr sz="1000">
+                          <a:solidFill>
+                            <a:srgbClr val="1A1A1A"/>
+                          </a:solidFill>
+                          <a:latin typeface="맑은 고딕"/>
+                        </a:rPr>
+                        <a:t>HistGBM-deep</a:t>
+                      </a:r>
+                    </a:p>
+                  </a:txBody>
+                  <a:tcPr>
+                    <a:solidFill>
+                      <a:srgbClr val="F2F5F8"/>
+                    </a:solidFill>
+                  </a:tcPr>
+                </a:tc>
+                <a:tc>
+                  <a:txBody>
+                    <a:bodyPr/>
+                    <a:lstStyle/>
+                    <a:p>
+                      <a:r>
+                        <a:rPr sz="1000">
+                          <a:solidFill>
+                            <a:srgbClr val="1A1A1A"/>
+                          </a:solidFill>
+                          <a:latin typeface="맑은 고딕"/>
+                        </a:rPr>
+                        <a:t>7.853</a:t>
+                      </a:r>
+                    </a:p>
+                  </a:txBody>
+                  <a:tcPr>
+                    <a:solidFill>
+                      <a:srgbClr val="F2F5F8"/>
+                    </a:solidFill>
+                  </a:tcPr>
+                </a:tc>
+                <a:tc>
+                  <a:txBody>
+                    <a:bodyPr/>
+                    <a:lstStyle/>
+                    <a:p>
+                      <a:r>
+                        <a:rPr sz="1000">
+                          <a:solidFill>
+                            <a:srgbClr val="1A1A1A"/>
+                          </a:solidFill>
+                          <a:latin typeface="맑은 고딕"/>
+                        </a:rPr>
+                        <a:t>-0.055</a:t>
+                      </a:r>
+                    </a:p>
+                  </a:txBody>
+                  <a:tcPr>
+                    <a:solidFill>
+                      <a:srgbClr val="F2F5F8"/>
+                    </a:solidFill>
+                  </a:tcPr>
+                </a:tc>
+                <a:tc>
+                  <a:txBody>
+                    <a:bodyPr/>
+                    <a:lstStyle/>
+                    <a:p>
+                      <a:r>
+                        <a:rPr sz="1000">
+                          <a:solidFill>
+                            <a:srgbClr val="1A1A1A"/>
+                          </a:solidFill>
+                          <a:latin typeface="맑은 고딕"/>
+                        </a:rPr>
+                        <a:t>17.098</a:t>
+                      </a:r>
+                    </a:p>
+                  </a:txBody>
+                  <a:tcPr>
+                    <a:solidFill>
+                      <a:srgbClr val="F2F5F8"/>
+                    </a:solidFill>
+                  </a:tcPr>
+                </a:tc>
+                <a:tc>
+                  <a:txBody>
+                    <a:bodyPr/>
+                    <a:lstStyle/>
+                    <a:p>
+                      <a:r>
+                        <a:rPr sz="1000">
+                          <a:solidFill>
+                            <a:srgbClr val="1A1A1A"/>
+                          </a:solidFill>
+                          <a:latin typeface="맑은 고딕"/>
+                        </a:rPr>
+                        <a:t>0.134</a:t>
+                      </a:r>
+                    </a:p>
+                  </a:txBody>
+                  <a:tcPr>
+                    <a:solidFill>
+                      <a:srgbClr val="F2F5F8"/>
+                    </a:solidFill>
+                  </a:tcPr>
+                </a:tc>
+                <a:tc>
+                  <a:txBody>
+                    <a:bodyPr/>
+                    <a:lstStyle/>
+                    <a:p>
+                      <a:r>
+                        <a:rPr sz="1000">
+                          <a:solidFill>
+                            <a:srgbClr val="1A1A1A"/>
+                          </a:solidFill>
+                          <a:latin typeface="맑은 고딕"/>
+                        </a:rPr>
+                        <a:t>0.692</a:t>
+                      </a:r>
+                    </a:p>
+                  </a:txBody>
+                  <a:tcPr>
+                    <a:solidFill>
+                      <a:srgbClr val="F2F5F8"/>
+                    </a:solidFill>
+                  </a:tcPr>
+                </a:tc>
+              </a:tr>
+              <a:tr h="301752">
+                <a:tc>
+                  <a:txBody>
+                    <a:bodyPr/>
+                    <a:lstStyle/>
+                    <a:p>
+                      <a:r>
+                        <a:rPr sz="1000">
+                          <a:solidFill>
+                            <a:srgbClr val="1A1A1A"/>
+                          </a:solidFill>
+                          <a:latin typeface="맑은 고딕"/>
+                        </a:rPr>
+                        <a:t>직전값 지속 (베이스라인)</a:t>
+                      </a:r>
+                    </a:p>
+                  </a:txBody>
+                  <a:tcPr>
+                    <a:solidFill>
+                      <a:srgbClr val="FFFFFF"/>
+                    </a:solidFill>
+                  </a:tcPr>
+                </a:tc>
+                <a:tc>
+                  <a:txBody>
+                    <a:bodyPr/>
+                    <a:lstStyle/>
+                    <a:p>
+                      <a:r>
+                        <a:rPr sz="1000">
+                          <a:solidFill>
+                            <a:srgbClr val="1A1A1A"/>
+                          </a:solidFill>
+                          <a:latin typeface="맑은 고딕"/>
+                        </a:rPr>
+                        <a:t>16.827</a:t>
+                      </a:r>
+                    </a:p>
+                  </a:txBody>
+                  <a:tcPr>
+                    <a:solidFill>
+                      <a:srgbClr val="FFFFFF"/>
+                    </a:solidFill>
+                  </a:tcPr>
+                </a:tc>
+                <a:tc>
+                  <a:txBody>
+                    <a:bodyPr/>
+                    <a:lstStyle/>
+                    <a:p>
+                      <a:r>
+                        <a:rPr sz="1000">
+                          <a:solidFill>
+                            <a:srgbClr val="1A1A1A"/>
+                          </a:solidFill>
+                          <a:latin typeface="맑은 고딕"/>
+                        </a:rPr>
+                        <a:t>0.021</a:t>
+                      </a:r>
+                    </a:p>
+                  </a:txBody>
+                  <a:tcPr>
+                    <a:solidFill>
+                      <a:srgbClr val="FFFFFF"/>
+                    </a:solidFill>
+                  </a:tcPr>
+                </a:tc>
+                <a:tc>
+                  <a:txBody>
+                    <a:bodyPr/>
+                    <a:lstStyle/>
+                    <a:p>
+                      <a:r>
+                        <a:rPr sz="1000">
+                          <a:solidFill>
+                            <a:srgbClr val="1A1A1A"/>
+                          </a:solidFill>
+                          <a:latin typeface="맑은 고딕"/>
+                        </a:rPr>
+                        <a:t>29.504</a:t>
+                      </a:r>
+                    </a:p>
+                  </a:txBody>
+                  <a:tcPr>
+                    <a:solidFill>
+                      <a:srgbClr val="FFFFFF"/>
+                    </a:solidFill>
+                  </a:tcPr>
+                </a:tc>
+                <a:tc>
+                  <a:txBody>
+                    <a:bodyPr/>
+                    <a:lstStyle/>
+                    <a:p>
+                      <a:r>
+                        <a:rPr sz="1000">
+                          <a:solidFill>
+                            <a:srgbClr val="1A1A1A"/>
+                          </a:solidFill>
+                          <a:latin typeface="맑은 고딕"/>
+                        </a:rPr>
+                        <a:t>0.334</a:t>
+                      </a:r>
+                    </a:p>
+                  </a:txBody>
+                  <a:tcPr>
+                    <a:solidFill>
+                      <a:srgbClr val="FFFFFF"/>
+                    </a:solidFill>
+                  </a:tcPr>
+                </a:tc>
+                <a:tc>
+                  <a:txBody>
+                    <a:bodyPr/>
+                    <a:lstStyle/>
+                    <a:p>
+                      <a:r>
+                        <a:rPr sz="1000">
+                          <a:solidFill>
+                            <a:srgbClr val="1A1A1A"/>
+                          </a:solidFill>
+                          <a:latin typeface="맑은 고딕"/>
+                        </a:rPr>
+                        <a:t>0.552</a:t>
+                      </a:r>
+                    </a:p>
+                  </a:txBody>
+                  <a:tcPr>
+                    <a:solidFill>
+                      <a:srgbClr val="FFFFFF"/>
+                    </a:solidFill>
+                  </a:tcPr>
+                </a:tc>
+              </a:tr>
+              <a:tr h="301752">
+                <a:tc>
+                  <a:txBody>
+                    <a:bodyPr/>
+                    <a:lstStyle/>
+                    <a:p>
+                      <a:r>
+                        <a:rPr sz="1000">
+                          <a:solidFill>
+                            <a:srgbClr val="1A1A1A"/>
+                          </a:solidFill>
+                          <a:latin typeface="맑은 고딕"/>
+                        </a:rPr>
+                        <a:t>Ridge (베이스라인)</a:t>
+                      </a:r>
+                    </a:p>
+                  </a:txBody>
+                  <a:tcPr>
+                    <a:solidFill>
+                      <a:srgbClr val="F2F5F8"/>
+                    </a:solidFill>
+                  </a:tcPr>
+                </a:tc>
+                <a:tc>
+                  <a:txBody>
+                    <a:bodyPr/>
+                    <a:lstStyle/>
+                    <a:p>
+                      <a:r>
+                        <a:rPr sz="1000">
+                          <a:solidFill>
+                            <a:srgbClr val="1A1A1A"/>
+                          </a:solidFill>
+                          <a:latin typeface="맑은 고딕"/>
+                        </a:rPr>
+                        <a:t>15.723</a:t>
+                      </a:r>
+                    </a:p>
+                  </a:txBody>
+                  <a:tcPr>
+                    <a:solidFill>
+                      <a:srgbClr val="F2F5F8"/>
+                    </a:solidFill>
+                  </a:tcPr>
+                </a:tc>
+                <a:tc>
+                  <a:txBody>
+                    <a:bodyPr/>
+                    <a:lstStyle/>
+                    <a:p>
+                      <a:r>
+                        <a:rPr sz="1000">
+                          <a:solidFill>
+                            <a:srgbClr val="1A1A1A"/>
+                          </a:solidFill>
+                          <a:latin typeface="맑은 고딕"/>
+                        </a:rPr>
+                        <a:t>-0.098</a:t>
+                      </a:r>
+                    </a:p>
+                  </a:txBody>
+                  <a:tcPr>
+                    <a:solidFill>
+                      <a:srgbClr val="F2F5F8"/>
+                    </a:solidFill>
+                  </a:tcPr>
+                </a:tc>
+                <a:tc>
+                  <a:txBody>
+                    <a:bodyPr/>
+                    <a:lstStyle/>
+                    <a:p>
+                      <a:r>
+                        <a:rPr sz="1000">
+                          <a:solidFill>
+                            <a:srgbClr val="1A1A1A"/>
+                          </a:solidFill>
+                          <a:latin typeface="맑은 고딕"/>
+                        </a:rPr>
+                        <a:t>31.996</a:t>
+                      </a:r>
+                    </a:p>
+                  </a:txBody>
+                  <a:tcPr>
+                    <a:solidFill>
+                      <a:srgbClr val="F2F5F8"/>
+                    </a:solidFill>
+                  </a:tcPr>
+                </a:tc>
+                <a:tc>
+                  <a:txBody>
+                    <a:bodyPr/>
+                    <a:lstStyle/>
+                    <a:p>
+                      <a:r>
+                        <a:rPr sz="1000">
+                          <a:solidFill>
+                            <a:srgbClr val="1A1A1A"/>
+                          </a:solidFill>
+                          <a:latin typeface="맑은 고딕"/>
+                        </a:rPr>
+                        <a:t>0.057</a:t>
+                      </a:r>
+                    </a:p>
+                  </a:txBody>
+                  <a:tcPr>
+                    <a:solidFill>
+                      <a:srgbClr val="F2F5F8"/>
+                    </a:solidFill>
+                  </a:tcPr>
+                </a:tc>
+                <a:tc>
+                  <a:txBody>
+                    <a:bodyPr/>
+                    <a:lstStyle/>
+                    <a:p>
+                      <a:r>
+                        <a:rPr sz="1000">
+                          <a:solidFill>
+                            <a:srgbClr val="1A1A1A"/>
+                          </a:solidFill>
+                          <a:latin typeface="맑은 고딕"/>
+                        </a:rPr>
+                        <a:t>0.544</a:t>
                       </a:r>
                     </a:p>
                   </a:txBody>
@@ -4857,8 +6635,8 @@
         </p:nvSpPr>
         <p:spPr>
           <a:xfrm>
-            <a:off x="594360" y="3840480"/>
-            <a:ext cx="10972800" cy="2011680"/>
+            <a:off x="6858000" y="1554480"/>
+            <a:ext cx="4846320" cy="4846320"/>
           </a:xfrm>
           <a:prstGeom prst="rect">
             <a:avLst/>
@@ -4877,13 +6655,13 @@
               </a:spcAft>
             </a:pPr>
             <a:r>
-              <a:rPr sz="1400" b="1">
+              <a:rPr sz="1250" b="1">
                 <a:solidFill>
                   <a:srgbClr val="1A1A1A"/>
                 </a:solidFill>
                 <a:latin typeface="맑은 고딕"/>
               </a:rPr>
-              <a:t>■ 알림 설계: 다단계 경보를 성과로 내세우지 않는다. 사건당 1건, 내용은 세 가지뿐</a:t>
+              <a:t>■ 결함이다. 본질적 한계가 아니다</a:t>
             </a:r>
           </a:p>
           <a:p>
@@ -4893,13 +6671,13 @@
               </a:spcAft>
             </a:pPr>
             <a:r>
-              <a:rPr sz="1250" b="0">
+              <a:rPr sz="1100" b="0">
                 <a:solidFill>
                   <a:srgbClr val="555A60"/>
                 </a:solidFill>
                 <a:latin typeface="맑은 고딕"/>
               </a:rPr>
-              <a:t>– ① 고사용량이 처음 시작될 것으로 보이는 시각  ② 지금부터 남은 준비시간(분)  ③ 확신도</a:t>
+              <a:t>– 현재 F1 0.468 vs 무편향 오라클 0.693 — 격차 0.225</a:t>
             </a:r>
           </a:p>
           <a:p>
@@ -4909,47 +6687,93 @@
               </a:spcAft>
             </a:pPr>
             <a:r>
-              <a:rPr sz="1400" b="1">
+              <a:rPr sz="1250" b="1">
                 <a:solidFill>
                   <a:srgbClr val="1A1A1A"/>
                 </a:solidFill>
                 <a:latin typeface="맑은 고딕"/>
               </a:rPr>
-              <a:t>■ 근거는 UI 가 아니라 수치다 — 제때 잡은 사건 수, 헛경고로 생기는 확인 부담(분/일)</a:t>
+              <a:t>■ 원인: 고사용량 구간에서만 +14.75 kw 과소예측</a:t>
             </a:r>
           </a:p>
-        </p:txBody>
-      </p:sp>
-      <p:sp>
-        <p:nvSpPr>
-          <p:cNvPr id="7" name="TextBox 6"/>
-          <p:cNvSpPr txBox="1"/>
-          <p:nvPr/>
-        </p:nvSpPr>
-        <p:spPr>
-          <a:xfrm>
-            <a:off x="594360" y="6263640"/>
-            <a:ext cx="10972800" cy="411480"/>
-          </a:xfrm>
-          <a:prstGeom prst="rect">
-            <a:avLst/>
-          </a:prstGeom>
-          <a:noFill/>
-        </p:spPr>
-        <p:txBody>
-          <a:bodyPr wrap="square">
-            <a:spAutoFit/>
-          </a:bodyPr>
-          <a:lstStyle/>
-          <a:p>
+          <a:p>
+            <a:pPr lvl="1">
+              <a:spcAft>
+                <a:spcPts val="500"/>
+              </a:spcAft>
+            </a:pPr>
             <a:r>
-              <a:rPr sz="1100">
+              <a:rPr sz="1100" b="0">
                 <a:solidFill>
                   <a:srgbClr val="555A60"/>
                 </a:solidFill>
                 <a:latin typeface="맑은 고딕"/>
               </a:rPr>
-              <a:t>설비 단위 조치나 고장 심각도 순위는 제시하지 않는다. 설비 식별자·고장 이력이 데이터에 없다.</a:t>
+              <a:t>– 전체 편향은 −0.96 kw 로 거의 0 인데 피크에서만 치우친다</a:t>
+            </a:r>
+          </a:p>
+          <a:p>
+            <a:pPr lvl="1">
+              <a:spcAft>
+                <a:spcPts val="500"/>
+              </a:spcAft>
+            </a:pPr>
+            <a:r>
+              <a:rPr sz="1100" b="0">
+                <a:solidFill>
+                  <a:srgbClr val="555A60"/>
+                </a:solidFill>
+                <a:latin typeface="맑은 고딕"/>
+              </a:rPr>
+              <a:t>– 고사용량 스텝의 81.6% 는 점예측이 임계선에 도달조차 못 한다</a:t>
+            </a:r>
+          </a:p>
+          <a:p>
+            <a:pPr>
+              <a:spcAft>
+                <a:spcPts val="500"/>
+              </a:spcAft>
+            </a:pPr>
+            <a:r>
+              <a:rPr sz="1250" b="1">
+                <a:solidFill>
+                  <a:srgbClr val="1A1A1A"/>
+                </a:solidFill>
+                <a:latin typeface="맑은 고딕"/>
+              </a:rPr>
+              <a:t>■ MAE 를 최소화하면 조건부 평균으로 수렴 → 분포 오른쪽 꼬리를 구조적으로 깎는다</a:t>
+            </a:r>
+          </a:p>
+          <a:p>
+            <a:pPr lvl="1">
+              <a:spcAft>
+                <a:spcPts val="500"/>
+              </a:spcAft>
+            </a:pPr>
+            <a:r>
+              <a:rPr sz="1100" b="0">
+                <a:solidFill>
+                  <a:srgbClr val="555A60"/>
+                </a:solidFill>
+                <a:latin typeface="맑은 고딕"/>
+              </a:rPr>
+              <a:t>– MAE 가 좋아져도 F1 이 따라오지 않는 이유</a:t>
+            </a:r>
+          </a:p>
+          <a:p>
+            <a:pPr>
+              <a:spcAft>
+                <a:spcPts val="500"/>
+              </a:spcAft>
+            </a:pPr>
+            <a:r>
+              <a:rPr sz="1250" b="1">
+                <a:solidFill>
+                  <a:srgbClr val="1A1A1A"/>
+                </a:solidFill>
+                <a:latin typeface="맑은 고딕"/>
+              </a:rPr>
+              <a:t>■ 라벨의 59.2% 가 임계선 ±MAE 이내 — 경계 밀집. 단, 오라클이 이를 포함하고도 0.69</a:t>
             </a:r>
           </a:p>
         </p:txBody>
@@ -5052,7 +6876,7 @@
                 </a:solidFill>
                 <a:latin typeface="맑은 고딕"/>
               </a:rPr>
-              <a:t>제5장 · 차별성 — 성능·오류분석과 연결되는 것만 주장한다</a:t>
+              <a:t>제3장 · 지금 수준을 솔직하게 적으면</a:t>
             </a:r>
           </a:p>
         </p:txBody>
@@ -5065,8 +6889,8 @@
         </p:nvSpPr>
         <p:spPr>
           <a:xfrm>
-            <a:off x="594360" y="1417320"/>
-            <a:ext cx="10972800" cy="4846320"/>
+            <a:off x="566928" y="960120"/>
+            <a:ext cx="11064240" cy="365760"/>
           </a:xfrm>
           <a:prstGeom prst="rect">
             <a:avLst/>
@@ -5079,35 +6903,624 @@
           </a:bodyPr>
           <a:lstStyle/>
           <a:p>
+            <a:r>
+              <a:rPr sz="1300">
+                <a:solidFill>
+                  <a:srgbClr val="555A60"/>
+                </a:solidFill>
+                <a:latin typeface="맑은 고딕"/>
+              </a:rPr>
+              <a:t>clean_Jul_Sep, h60</a:t>
+            </a:r>
+          </a:p>
+        </p:txBody>
+      </p:sp>
+      <p:graphicFrame>
+        <p:nvGraphicFramePr>
+          <p:cNvPr id="5" name="Table 4"/>
+          <p:cNvGraphicFramePr>
+            <a:graphicFrameLocks noGrp="1"/>
+          </p:cNvGraphicFramePr>
+          <p:nvPr/>
+        </p:nvGraphicFramePr>
+        <p:xfrm>
+          <a:off x="594360" y="1463040"/>
+          <a:ext cx="10607040" cy="2414016"/>
+        </p:xfrm>
+        <a:graphic>
+          <a:graphicData uri="http://schemas.openxmlformats.org/drawingml/2006/table">
+            <a:tbl>
+              <a:tblPr firstRow="1" bandRow="1">
+                <a:tableStyleId>{5C22544A-7EE6-4342-B048-85BDC9FD1C3A}</a:tableStyleId>
+              </a:tblPr>
+              <a:tblGrid>
+                <a:gridCol w="3535680"/>
+                <a:gridCol w="3535680"/>
+                <a:gridCol w="3535680"/>
+              </a:tblGrid>
+              <a:tr h="301752">
+                <a:tc>
+                  <a:txBody>
+                    <a:bodyPr/>
+                    <a:lstStyle/>
+                    <a:p>
+                      <a:r>
+                        <a:rPr sz="1250" b="1">
+                          <a:solidFill>
+                            <a:srgbClr val="FFFFFF"/>
+                          </a:solidFill>
+                          <a:latin typeface="맑은 고딕"/>
+                        </a:rPr>
+                        <a:t>기준</a:t>
+                      </a:r>
+                    </a:p>
+                  </a:txBody>
+                  <a:tcPr>
+                    <a:solidFill>
+                      <a:srgbClr val="1F5C99"/>
+                    </a:solidFill>
+                  </a:tcPr>
+                </a:tc>
+                <a:tc>
+                  <a:txBody>
+                    <a:bodyPr/>
+                    <a:lstStyle/>
+                    <a:p>
+                      <a:r>
+                        <a:rPr sz="1250" b="1">
+                          <a:solidFill>
+                            <a:srgbClr val="FFFFFF"/>
+                          </a:solidFill>
+                          <a:latin typeface="맑은 고딕"/>
+                        </a:rPr>
+                        <a:t>F1</a:t>
+                      </a:r>
+                    </a:p>
+                  </a:txBody>
+                  <a:tcPr>
+                    <a:solidFill>
+                      <a:srgbClr val="1F5C99"/>
+                    </a:solidFill>
+                  </a:tcPr>
+                </a:tc>
+                <a:tc>
+                  <a:txBody>
+                    <a:bodyPr/>
+                    <a:lstStyle/>
+                    <a:p>
+                      <a:r>
+                        <a:rPr sz="1250" b="1">
+                          <a:solidFill>
+                            <a:srgbClr val="FFFFFF"/>
+                          </a:solidFill>
+                          <a:latin typeface="맑은 고딕"/>
+                        </a:rPr>
+                        <a:t>의미</a:t>
+                      </a:r>
+                    </a:p>
+                  </a:txBody>
+                  <a:tcPr>
+                    <a:solidFill>
+                      <a:srgbClr val="1F5C99"/>
+                    </a:solidFill>
+                  </a:tcPr>
+                </a:tc>
+              </a:tr>
+              <a:tr h="301752">
+                <a:tc>
+                  <a:txBody>
+                    <a:bodyPr/>
+                    <a:lstStyle/>
+                    <a:p>
+                      <a:r>
+                        <a:rPr sz="1250">
+                          <a:solidFill>
+                            <a:srgbClr val="1A1A1A"/>
+                          </a:solidFill>
+                          <a:latin typeface="맑은 고딕"/>
+                        </a:rPr>
+                        <a:t>사전확률(모두 경보)</a:t>
+                      </a:r>
+                    </a:p>
+                  </a:txBody>
+                  <a:tcPr>
+                    <a:solidFill>
+                      <a:srgbClr val="FFFFFF"/>
+                    </a:solidFill>
+                  </a:tcPr>
+                </a:tc>
+                <a:tc>
+                  <a:txBody>
+                    <a:bodyPr/>
+                    <a:lstStyle/>
+                    <a:p>
+                      <a:r>
+                        <a:rPr sz="1250">
+                          <a:solidFill>
+                            <a:srgbClr val="1A1A1A"/>
+                          </a:solidFill>
+                          <a:latin typeface="맑은 고딕"/>
+                        </a:rPr>
+                        <a:t>0.111</a:t>
+                      </a:r>
+                    </a:p>
+                  </a:txBody>
+                  <a:tcPr>
+                    <a:solidFill>
+                      <a:srgbClr val="FFFFFF"/>
+                    </a:solidFill>
+                  </a:tcPr>
+                </a:tc>
+                <a:tc>
+                  <a:txBody>
+                    <a:bodyPr/>
+                    <a:lstStyle/>
+                    <a:p>
+                      <a:r>
+                        <a:rPr sz="1250">
+                          <a:solidFill>
+                            <a:srgbClr val="1A1A1A"/>
+                          </a:solidFill>
+                          <a:latin typeface="맑은 고딕"/>
+                        </a:rPr>
+                        <a:t>하한</a:t>
+                      </a:r>
+                    </a:p>
+                  </a:txBody>
+                  <a:tcPr>
+                    <a:solidFill>
+                      <a:srgbClr val="FFFFFF"/>
+                    </a:solidFill>
+                  </a:tcPr>
+                </a:tc>
+              </a:tr>
+              <a:tr h="301752">
+                <a:tc>
+                  <a:txBody>
+                    <a:bodyPr/>
+                    <a:lstStyle/>
+                    <a:p>
+                      <a:r>
+                        <a:rPr sz="1250">
+                          <a:solidFill>
+                            <a:srgbClr val="1A1A1A"/>
+                          </a:solidFill>
+                          <a:latin typeface="맑은 고딕"/>
+                        </a:rPr>
+                        <a:t>persistence 규칙</a:t>
+                      </a:r>
+                    </a:p>
+                  </a:txBody>
+                  <a:tcPr>
+                    <a:solidFill>
+                      <a:srgbClr val="F2F5F8"/>
+                    </a:solidFill>
+                  </a:tcPr>
+                </a:tc>
+                <a:tc>
+                  <a:txBody>
+                    <a:bodyPr/>
+                    <a:lstStyle/>
+                    <a:p>
+                      <a:r>
+                        <a:rPr sz="1250">
+                          <a:solidFill>
+                            <a:srgbClr val="1A1A1A"/>
+                          </a:solidFill>
+                          <a:latin typeface="맑은 고딕"/>
+                        </a:rPr>
+                        <a:t>0.305</a:t>
+                      </a:r>
+                    </a:p>
+                  </a:txBody>
+                  <a:tcPr>
+                    <a:solidFill>
+                      <a:srgbClr val="F2F5F8"/>
+                    </a:solidFill>
+                  </a:tcPr>
+                </a:tc>
+                <a:tc>
+                  <a:txBody>
+                    <a:bodyPr/>
+                    <a:lstStyle/>
+                    <a:p>
+                      <a:r>
+                        <a:rPr sz="1250">
+                          <a:solidFill>
+                            <a:srgbClr val="1A1A1A"/>
+                          </a:solidFill>
+                          <a:latin typeface="맑은 고딕"/>
+                        </a:rPr>
+                        <a:t>단순 규칙</a:t>
+                      </a:r>
+                    </a:p>
+                  </a:txBody>
+                  <a:tcPr>
+                    <a:solidFill>
+                      <a:srgbClr val="F2F5F8"/>
+                    </a:solidFill>
+                  </a:tcPr>
+                </a:tc>
+              </a:tr>
+              <a:tr h="301752">
+                <a:tc>
+                  <a:txBody>
+                    <a:bodyPr/>
+                    <a:lstStyle/>
+                    <a:p>
+                      <a:r>
+                        <a:rPr sz="1250">
+                          <a:solidFill>
+                            <a:srgbClr val="1A1A1A"/>
+                          </a:solidFill>
+                          <a:latin typeface="맑은 고딕"/>
+                        </a:rPr>
+                        <a:t>회귀 마진(현행 점예측)</a:t>
+                      </a:r>
+                    </a:p>
+                  </a:txBody>
+                  <a:tcPr>
+                    <a:solidFill>
+                      <a:srgbClr val="FFFFFF"/>
+                    </a:solidFill>
+                  </a:tcPr>
+                </a:tc>
+                <a:tc>
+                  <a:txBody>
+                    <a:bodyPr/>
+                    <a:lstStyle/>
+                    <a:p>
+                      <a:r>
+                        <a:rPr sz="1250">
+                          <a:solidFill>
+                            <a:srgbClr val="1A1A1A"/>
+                          </a:solidFill>
+                          <a:latin typeface="맑은 고딕"/>
+                        </a:rPr>
+                        <a:t>0.322</a:t>
+                      </a:r>
+                    </a:p>
+                  </a:txBody>
+                  <a:tcPr>
+                    <a:solidFill>
+                      <a:srgbClr val="FFFFFF"/>
+                    </a:solidFill>
+                  </a:tcPr>
+                </a:tc>
+                <a:tc>
+                  <a:txBody>
+                    <a:bodyPr/>
+                    <a:lstStyle/>
+                    <a:p>
+                      <a:r>
+                        <a:rPr sz="1250">
+                          <a:solidFill>
+                            <a:srgbClr val="1A1A1A"/>
+                          </a:solidFill>
+                          <a:latin typeface="맑은 고딕"/>
+                        </a:rPr>
+                        <a:t>점예측을 그대로 경보에 쓸 때</a:t>
+                      </a:r>
+                    </a:p>
+                  </a:txBody>
+                  <a:tcPr>
+                    <a:solidFill>
+                      <a:srgbClr val="FFFFFF"/>
+                    </a:solidFill>
+                  </a:tcPr>
+                </a:tc>
+              </a:tr>
+              <a:tr h="301752">
+                <a:tc>
+                  <a:txBody>
+                    <a:bodyPr/>
+                    <a:lstStyle/>
+                    <a:p>
+                      <a:r>
+                        <a:rPr sz="1250">
+                          <a:solidFill>
+                            <a:srgbClr val="1A1A1A"/>
+                          </a:solidFill>
+                          <a:latin typeface="맑은 고딕"/>
+                        </a:rPr>
+                        <a:t>이전 주 모델 HGB+isotonic</a:t>
+                      </a:r>
+                    </a:p>
+                  </a:txBody>
+                  <a:tcPr>
+                    <a:solidFill>
+                      <a:srgbClr val="F2F5F8"/>
+                    </a:solidFill>
+                  </a:tcPr>
+                </a:tc>
+                <a:tc>
+                  <a:txBody>
+                    <a:bodyPr/>
+                    <a:lstStyle/>
+                    <a:p>
+                      <a:r>
+                        <a:rPr sz="1250">
+                          <a:solidFill>
+                            <a:srgbClr val="1A1A1A"/>
+                          </a:solidFill>
+                          <a:latin typeface="맑은 고딕"/>
+                        </a:rPr>
+                        <a:t>0.434</a:t>
+                      </a:r>
+                    </a:p>
+                  </a:txBody>
+                  <a:tcPr>
+                    <a:solidFill>
+                      <a:srgbClr val="F2F5F8"/>
+                    </a:solidFill>
+                  </a:tcPr>
+                </a:tc>
+                <a:tc>
+                  <a:txBody>
+                    <a:bodyPr/>
+                    <a:lstStyle/>
+                    <a:p>
+                      <a:r>
+                        <a:rPr sz="1250">
+                          <a:solidFill>
+                            <a:srgbClr val="1A1A1A"/>
+                          </a:solidFill>
+                          <a:latin typeface="맑은 고딕"/>
+                        </a:rPr>
+                        <a:t>교체 전</a:t>
+                      </a:r>
+                    </a:p>
+                  </a:txBody>
+                  <a:tcPr>
+                    <a:solidFill>
+                      <a:srgbClr val="F2F5F8"/>
+                    </a:solidFill>
+                  </a:tcPr>
+                </a:tc>
+              </a:tr>
+              <a:tr h="301752">
+                <a:tc>
+                  <a:txBody>
+                    <a:bodyPr/>
+                    <a:lstStyle/>
+                    <a:p>
+                      <a:r>
+                        <a:rPr sz="1250">
+                          <a:solidFill>
+                            <a:srgbClr val="1A1A1A"/>
+                          </a:solidFill>
+                          <a:latin typeface="맑은 고딕"/>
+                        </a:rPr>
+                        <a:t>현재 ET+isotonic</a:t>
+                      </a:r>
+                    </a:p>
+                  </a:txBody>
+                  <a:tcPr>
+                    <a:solidFill>
+                      <a:srgbClr val="FFFFFF"/>
+                    </a:solidFill>
+                  </a:tcPr>
+                </a:tc>
+                <a:tc>
+                  <a:txBody>
+                    <a:bodyPr/>
+                    <a:lstStyle/>
+                    <a:p>
+                      <a:r>
+                        <a:rPr sz="1250">
+                          <a:solidFill>
+                            <a:srgbClr val="1A1A1A"/>
+                          </a:solidFill>
+                          <a:latin typeface="맑은 고딕"/>
+                        </a:rPr>
+                        <a:t>0.468</a:t>
+                      </a:r>
+                    </a:p>
+                  </a:txBody>
+                  <a:tcPr>
+                    <a:solidFill>
+                      <a:srgbClr val="FFFFFF"/>
+                    </a:solidFill>
+                  </a:tcPr>
+                </a:tc>
+                <a:tc>
+                  <a:txBody>
+                    <a:bodyPr/>
+                    <a:lstStyle/>
+                    <a:p>
+                      <a:r>
+                        <a:rPr sz="1250">
+                          <a:solidFill>
+                            <a:srgbClr val="1A1A1A"/>
+                          </a:solidFill>
+                          <a:latin typeface="맑은 고딕"/>
+                        </a:rPr>
+                        <a:t>persistence 대비 +53%, 사전확률 대비 4.2배</a:t>
+                      </a:r>
+                    </a:p>
+                  </a:txBody>
+                  <a:tcPr>
+                    <a:solidFill>
+                      <a:srgbClr val="FFFFFF"/>
+                    </a:solidFill>
+                  </a:tcPr>
+                </a:tc>
+              </a:tr>
+              <a:tr h="301752">
+                <a:tc>
+                  <a:txBody>
+                    <a:bodyPr/>
+                    <a:lstStyle/>
+                    <a:p>
+                      <a:r>
+                        <a:rPr sz="1250">
+                          <a:solidFill>
+                            <a:srgbClr val="1A1A1A"/>
+                          </a:solidFill>
+                          <a:latin typeface="맑은 고딕"/>
+                        </a:rPr>
+                        <a:t>무편향 오라클</a:t>
+                      </a:r>
+                    </a:p>
+                  </a:txBody>
+                  <a:tcPr>
+                    <a:solidFill>
+                      <a:srgbClr val="F2F5F8"/>
+                    </a:solidFill>
+                  </a:tcPr>
+                </a:tc>
+                <a:tc>
+                  <a:txBody>
+                    <a:bodyPr/>
+                    <a:lstStyle/>
+                    <a:p>
+                      <a:r>
+                        <a:rPr sz="1250">
+                          <a:solidFill>
+                            <a:srgbClr val="1A1A1A"/>
+                          </a:solidFill>
+                          <a:latin typeface="맑은 고딕"/>
+                        </a:rPr>
+                        <a:t>0.693</a:t>
+                      </a:r>
+                    </a:p>
+                  </a:txBody>
+                  <a:tcPr>
+                    <a:solidFill>
+                      <a:srgbClr val="F2F5F8"/>
+                    </a:solidFill>
+                  </a:tcPr>
+                </a:tc>
+                <a:tc>
+                  <a:txBody>
+                    <a:bodyPr/>
+                    <a:lstStyle/>
+                    <a:p>
+                      <a:r>
+                        <a:rPr sz="1250">
+                          <a:solidFill>
+                            <a:srgbClr val="1A1A1A"/>
+                          </a:solidFill>
+                          <a:latin typeface="맑은 고딕"/>
+                        </a:rPr>
+                        <a:t>같은 오차 크기, 편향만 제거 — 남은 여지</a:t>
+                      </a:r>
+                    </a:p>
+                  </a:txBody>
+                  <a:tcPr>
+                    <a:solidFill>
+                      <a:srgbClr val="F2F5F8"/>
+                    </a:solidFill>
+                  </a:tcPr>
+                </a:tc>
+              </a:tr>
+              <a:tr h="301752">
+                <a:tc>
+                  <a:txBody>
+                    <a:bodyPr/>
+                    <a:lstStyle/>
+                    <a:p>
+                      <a:r>
+                        <a:rPr sz="1250">
+                          <a:solidFill>
+                            <a:srgbClr val="1A1A1A"/>
+                          </a:solidFill>
+                          <a:latin typeface="맑은 고딕"/>
+                        </a:rPr>
+                        <a:t>완전 예측</a:t>
+                      </a:r>
+                    </a:p>
+                  </a:txBody>
+                  <a:tcPr>
+                    <a:solidFill>
+                      <a:srgbClr val="FFFFFF"/>
+                    </a:solidFill>
+                  </a:tcPr>
+                </a:tc>
+                <a:tc>
+                  <a:txBody>
+                    <a:bodyPr/>
+                    <a:lstStyle/>
+                    <a:p>
+                      <a:r>
+                        <a:rPr sz="1250">
+                          <a:solidFill>
+                            <a:srgbClr val="1A1A1A"/>
+                          </a:solidFill>
+                          <a:latin typeface="맑은 고딕"/>
+                        </a:rPr>
+                        <a:t>1.000</a:t>
+                      </a:r>
+                    </a:p>
+                  </a:txBody>
+                  <a:tcPr>
+                    <a:solidFill>
+                      <a:srgbClr val="FFFFFF"/>
+                    </a:solidFill>
+                  </a:tcPr>
+                </a:tc>
+                <a:tc>
+                  <a:txBody>
+                    <a:bodyPr/>
+                    <a:lstStyle/>
+                    <a:p>
+                      <a:r>
+                        <a:rPr sz="1250">
+                          <a:solidFill>
+                            <a:srgbClr val="1A1A1A"/>
+                          </a:solidFill>
+                          <a:latin typeface="맑은 고딕"/>
+                        </a:rPr>
+                        <a:t>—</a:t>
+                      </a:r>
+                    </a:p>
+                  </a:txBody>
+                  <a:tcPr>
+                    <a:solidFill>
+                      <a:srgbClr val="FFFFFF"/>
+                    </a:solidFill>
+                  </a:tcPr>
+                </a:tc>
+              </a:tr>
+            </a:tbl>
+          </a:graphicData>
+        </a:graphic>
+      </p:graphicFrame>
+      <p:sp>
+        <p:nvSpPr>
+          <p:cNvPr id="6" name="TextBox 5"/>
+          <p:cNvSpPr txBox="1"/>
+          <p:nvPr/>
+        </p:nvSpPr>
+        <p:spPr>
+          <a:xfrm>
+            <a:off x="594360" y="3931920"/>
+            <a:ext cx="10972800" cy="2103120"/>
+          </a:xfrm>
+          <a:prstGeom prst="rect">
+            <a:avLst/>
+          </a:prstGeom>
+          <a:noFill/>
+        </p:spPr>
+        <p:txBody>
+          <a:bodyPr wrap="square">
+            <a:spAutoFit/>
+          </a:bodyPr>
+          <a:lstStyle/>
+          <a:p>
             <a:pPr>
               <a:spcAft>
                 <a:spcPts val="500"/>
               </a:spcAft>
             </a:pPr>
             <a:r>
-              <a:rPr sz="1400" b="1">
+              <a:rPr sz="1300" b="1">
                 <a:solidFill>
                   <a:srgbClr val="1A1A1A"/>
                 </a:solidFill>
                 <a:latin typeface="맑은 고딕"/>
               </a:rPr>
-              <a:t>■ ① 데이터 자체의 결함을 찾아 평가 설계로 연결했다</a:t>
-            </a:r>
-          </a:p>
-          <a:p>
-            <a:pPr lvl="1">
-              <a:spcAft>
-                <a:spcPts val="500"/>
-              </a:spcAft>
-            </a:pPr>
-            <a:r>
-              <a:rPr sz="1250" b="0">
-                <a:solidFill>
-                  <a:srgbClr val="555A60"/>
-                </a:solidFill>
-                <a:latin typeface="맑은 고딕"/>
-              </a:rPr>
-              <a:t>– 합성 중복일 160일(45그룹)이 fold 0·2 의 TRAIN/TEST 에 걸쳐 있음을 확인 → 주 보고 구간을 clean 으로 고정. 부풀려진 성능을 쓰지 않았다</a:t>
+              <a:t>■ '처참' 까지는 아니지만 좋다고 말할 수도 없다 — 상한의 68% 지점</a:t>
             </a:r>
           </a:p>
           <a:p>
@@ -5117,29 +7530,13 @@
               </a:spcAft>
             </a:pPr>
             <a:r>
-              <a:rPr sz="1400" b="1">
+              <a:rPr sz="1300" b="1">
                 <a:solidFill>
                   <a:srgbClr val="1A1A1A"/>
                 </a:solidFill>
                 <a:latin typeface="맑은 고딕"/>
               </a:rPr>
-              <a:t>■ ② 라벨 정의를 과금 제도에 묶었다</a:t>
-            </a:r>
-          </a:p>
-          <a:p>
-            <a:pPr lvl="1">
-              <a:spcAft>
-                <a:spcPts val="500"/>
-              </a:spcAft>
-            </a:pPr>
-            <a:r>
-              <a:rPr sz="1250" b="0">
-                <a:solidFill>
-                  <a:srgbClr val="555A60"/>
-                </a:solidFill>
-                <a:latin typeface="맑은 고딕"/>
-              </a:rPr>
-              <a:t>– 15분 = 요금적용전력 측정 단위, 30일 = 검침월. p95 가 모델링 선택임을 숨기지 않고 민감도표로 공개</a:t>
+              <a:t>■ 사건 단위로 보면 186 사건 중 168 포착(사건 recall 0.903). 스텝 F1 과 다른 질문에 답한다 — 섞지 않는다</a:t>
             </a:r>
           </a:p>
           <a:p>
@@ -5149,29 +7546,13 @@
               </a:spcAft>
             </a:pPr>
             <a:r>
-              <a:rPr sz="1400" b="1">
+              <a:rPr sz="1300" b="1">
                 <a:solidFill>
                   <a:srgbClr val="1A1A1A"/>
                 </a:solidFill>
                 <a:latin typeface="맑은 고딕"/>
               </a:rPr>
-              <a:t>■ ③ 고사용량 구간을 직접 겨냥한 학습으로 그 구간 오차를 네 호라이즌 모두 25% 안팎 줄였다</a:t>
-            </a:r>
-          </a:p>
-          <a:p>
-            <a:pPr lvl="1">
-              <a:spcAft>
-                <a:spcPts val="500"/>
-              </a:spcAft>
-            </a:pPr>
-            <a:r>
-              <a:rPr sz="1250" b="0">
-                <a:solidFill>
-                  <a:srgbClr val="555A60"/>
-                </a:solidFill>
-                <a:latin typeface="맑은 고딕"/>
-              </a:rPr>
-              <a:t>– h60 고사용량 MAE 20.88 → 15.65 kw. 블록 부트스트랩 CI 로 유의성 확인</a:t>
+              <a:t>■ ROC-AUC 0.934 는 발생률 5.96% 에서 과대평가된다. 성능 근거로 쓰지 않는다</a:t>
             </a:r>
           </a:p>
           <a:p>
@@ -5181,29 +7562,13 @@
               </a:spcAft>
             </a:pPr>
             <a:r>
-              <a:rPr sz="1400" b="1">
+              <a:rPr sz="1300" b="1">
                 <a:solidFill>
                   <a:srgbClr val="1A1A1A"/>
                 </a:solidFill>
                 <a:latin typeface="맑은 고딕"/>
               </a:rPr>
-              <a:t>■ ④ 실패한 시도를 지웠다가 아니라 남겼다</a:t>
-            </a:r>
-          </a:p>
-          <a:p>
-            <a:pPr lvl="1">
-              <a:spcAft>
-                <a:spcPts val="500"/>
-              </a:spcAft>
-            </a:pPr>
-            <a:r>
-              <a:rPr sz="1250" b="0">
-                <a:solidFill>
-                  <a:srgbClr val="555A60"/>
-                </a:solidFill>
-                <a:latin typeface="맑은 고딕"/>
-              </a:rPr>
-              <a:t>– 운전상태 3분할 모델(V4) 기각 · 2단계 경보 우위 주장 철회 · OOD 가중(A6) 기각 · 외부 공공데이터 게이트 0/20 선택</a:t>
+              <a:t>■ 다음: 피크 편향 직접 제거(높은 분위 점예측 / 비대칭 손실) · 사건 단위 임계 최적화 — 사전 채택조건 선언 후 검정</a:t>
             </a:r>
           </a:p>
         </p:txBody>
@@ -5306,7 +7671,7 @@
                 </a:solidFill>
                 <a:latin typeface="맑은 고딕"/>
               </a:rPr>
-              <a:t>제6장 · 재현성 · 그리고 아직 주장할 수 없는 것</a:t>
+              <a:t>제3장 · 오류분석 — 어디서 잘 되고 어디서 깨지는가</a:t>
             </a:r>
           </a:p>
         </p:txBody>
@@ -5319,8 +7684,8 @@
         </p:nvSpPr>
         <p:spPr>
           <a:xfrm>
-            <a:off x="594360" y="1417320"/>
-            <a:ext cx="10972800" cy="4846320"/>
+            <a:off x="566928" y="960120"/>
+            <a:ext cx="11064240" cy="365760"/>
           </a:xfrm>
           <a:prstGeom prst="rect">
             <a:avLst/>
@@ -5333,154 +7698,1123 @@
           </a:bodyPr>
           <a:lstStyle/>
           <a:p>
-            <a:pPr>
-              <a:spcAft>
-                <a:spcPts val="500"/>
-              </a:spcAft>
-            </a:pPr>
             <a:r>
-              <a:rPr sz="1450" b="1">
-                <a:solidFill>
-                  <a:srgbClr val="1A1A1A"/>
-                </a:solidFill>
-                <a:latin typeface="맑은 고딕"/>
-              </a:rPr>
-              <a:t>■ 명령 한 줄로 전처리→학습→추론→결과 생성</a:t>
-            </a:r>
-          </a:p>
-          <a:p>
-            <a:pPr lvl="1">
-              <a:spcAft>
-                <a:spcPts val="500"/>
-              </a:spcAft>
-            </a:pPr>
-            <a:r>
-              <a:rPr sz="1300" b="0">
+              <a:rPr sz="1300">
                 <a:solidFill>
                   <a:srgbClr val="555A60"/>
                 </a:solidFill>
                 <a:latin typeface="맑은 고딕"/>
               </a:rPr>
-              <a:t>– python3 analysis/final_baseline/run_baseline.py   (seed 20260926 고정, CPU 전용)</a:t>
-            </a:r>
-          </a:p>
-          <a:p>
-            <a:pPr lvl="1">
-              <a:spcAft>
-                <a:spcPts val="500"/>
-              </a:spcAft>
-            </a:pPr>
-            <a:r>
-              <a:rPr sz="1300" b="0">
-                <a:solidFill>
-                  <a:srgbClr val="555A60"/>
-                </a:solidFill>
-                <a:latin typeface="맑은 고딕"/>
-              </a:rPr>
-              <a:t>– 학습/추론 분리 — joblib 아티팩트 + inference.py 로 학습 코드 없이 예측 생성</a:t>
-            </a:r>
-          </a:p>
-          <a:p>
-            <a:pPr lvl="1">
-              <a:spcAft>
-                <a:spcPts val="500"/>
-              </a:spcAft>
-            </a:pPr>
-            <a:r>
-              <a:rPr sz="1300" b="0">
-                <a:solidFill>
-                  <a:srgbClr val="555A60"/>
-                </a:solidFill>
-                <a:latin typeface="맑은 고딕"/>
-              </a:rPr>
-              <a:t>– requirements.txt · README · 수용테스트 포함</a:t>
-            </a:r>
-          </a:p>
-          <a:p>
-            <a:pPr>
-              <a:spcAft>
-                <a:spcPts val="500"/>
-              </a:spcAft>
-            </a:pPr>
-            <a:r>
-              <a:rPr sz="1450" b="1">
-                <a:solidFill>
-                  <a:srgbClr val="1A1A1A"/>
-                </a:solidFill>
-                <a:latin typeface="맑은 고딕"/>
-              </a:rPr>
-              <a:t>■ 아직 검증되지 않아 주장하지 않는 것</a:t>
-            </a:r>
-          </a:p>
-          <a:p>
-            <a:pPr lvl="1">
-              <a:spcAft>
-                <a:spcPts val="500"/>
-              </a:spcAft>
-            </a:pPr>
-            <a:r>
-              <a:rPr sz="1300" b="0">
-                <a:solidFill>
-                  <a:srgbClr val="555A60"/>
-                </a:solidFill>
-                <a:latin typeface="맑은 고딕"/>
-              </a:rPr>
-              <a:t>– 절감액(원) — 계약전력·요금 조건 미확인</a:t>
-            </a:r>
-          </a:p>
-          <a:p>
-            <a:pPr lvl="1">
-              <a:spcAft>
-                <a:spcPts val="500"/>
-              </a:spcAft>
-            </a:pPr>
-            <a:r>
-              <a:rPr sz="1300" b="0">
-                <a:solidFill>
-                  <a:srgbClr val="555A60"/>
-                </a:solidFill>
-                <a:latin typeface="맑은 고딕"/>
-              </a:rPr>
-              <a:t>– 설비 단위 원인·조치 — 설비 식별자 없음</a:t>
-            </a:r>
-          </a:p>
-          <a:p>
-            <a:pPr lvl="1">
-              <a:spcAft>
-                <a:spcPts val="500"/>
-              </a:spcAft>
-            </a:pPr>
-            <a:r>
-              <a:rPr sz="1300" b="0">
-                <a:solidFill>
-                  <a:srgbClr val="555A60"/>
-                </a:solidFill>
-                <a:latin typeface="맑은 고딕"/>
-              </a:rPr>
-              <a:t>– 고사용량 구간 예측구간 적중률 0.234 — 목표 0.90 에 크게 미달. 공개하고 다음 과제로 둔다</a:t>
-            </a:r>
-          </a:p>
-          <a:p>
-            <a:pPr lvl="1">
-              <a:spcAft>
-                <a:spcPts val="500"/>
-              </a:spcAft>
-            </a:pPr>
-            <a:r>
-              <a:rPr sz="1300" b="0">
-                <a:solidFill>
-                  <a:srgbClr val="555A60"/>
-                </a:solidFill>
-                <a:latin typeface="맑은 고딕"/>
-              </a:rPr>
-              <a:t>– 최초 시작 시각 예측 — 설계만 있고 검증 전</a:t>
+              <a:t>전체 평균이 아니라 조건별로 쪼갠다 (h60)</a:t>
             </a:r>
           </a:p>
         </p:txBody>
       </p:sp>
+      <p:graphicFrame>
+        <p:nvGraphicFramePr>
+          <p:cNvPr id="5" name="Table 4"/>
+          <p:cNvGraphicFramePr>
+            <a:graphicFrameLocks noGrp="1"/>
+          </p:cNvGraphicFramePr>
+          <p:nvPr/>
+        </p:nvGraphicFramePr>
+        <p:xfrm>
+          <a:off x="594360" y="1463040"/>
+          <a:ext cx="10607040" cy="2414016"/>
+        </p:xfrm>
+        <a:graphic>
+          <a:graphicData uri="http://schemas.openxmlformats.org/drawingml/2006/table">
+            <a:tbl>
+              <a:tblPr firstRow="1" bandRow="1">
+                <a:tableStyleId>{5C22544A-7EE6-4342-B048-85BDC9FD1C3A}</a:tableStyleId>
+              </a:tblPr>
+              <a:tblGrid>
+                <a:gridCol w="1767840"/>
+                <a:gridCol w="1767840"/>
+                <a:gridCol w="1767840"/>
+                <a:gridCol w="1767840"/>
+                <a:gridCol w="1767840"/>
+                <a:gridCol w="1767840"/>
+              </a:tblGrid>
+              <a:tr h="301752">
+                <a:tc>
+                  <a:txBody>
+                    <a:bodyPr/>
+                    <a:lstStyle/>
+                    <a:p>
+                      <a:r>
+                        <a:rPr sz="1200" b="1">
+                          <a:solidFill>
+                            <a:srgbClr val="FFFFFF"/>
+                          </a:solidFill>
+                          <a:latin typeface="맑은 고딕"/>
+                        </a:rPr>
+                        <a:t>조건</a:t>
+                      </a:r>
+                    </a:p>
+                  </a:txBody>
+                  <a:tcPr>
+                    <a:solidFill>
+                      <a:srgbClr val="1F5C99"/>
+                    </a:solidFill>
+                  </a:tcPr>
+                </a:tc>
+                <a:tc>
+                  <a:txBody>
+                    <a:bodyPr/>
+                    <a:lstStyle/>
+                    <a:p>
+                      <a:r>
+                        <a:rPr sz="1200" b="1">
+                          <a:solidFill>
+                            <a:srgbClr val="FFFFFF"/>
+                          </a:solidFill>
+                          <a:latin typeface="맑은 고딕"/>
+                        </a:rPr>
+                        <a:t>표본 수</a:t>
+                      </a:r>
+                    </a:p>
+                  </a:txBody>
+                  <a:tcPr>
+                    <a:solidFill>
+                      <a:srgbClr val="1F5C99"/>
+                    </a:solidFill>
+                  </a:tcPr>
+                </a:tc>
+                <a:tc>
+                  <a:txBody>
+                    <a:bodyPr/>
+                    <a:lstStyle/>
+                    <a:p>
+                      <a:r>
+                        <a:rPr sz="1200" b="1">
+                          <a:solidFill>
+                            <a:srgbClr val="FFFFFF"/>
+                          </a:solidFill>
+                          <a:latin typeface="맑은 고딕"/>
+                        </a:rPr>
+                        <a:t>A0 MAE</a:t>
+                      </a:r>
+                    </a:p>
+                  </a:txBody>
+                  <a:tcPr>
+                    <a:solidFill>
+                      <a:srgbClr val="1F5C99"/>
+                    </a:solidFill>
+                  </a:tcPr>
+                </a:tc>
+                <a:tc>
+                  <a:txBody>
+                    <a:bodyPr/>
+                    <a:lstStyle/>
+                    <a:p>
+                      <a:r>
+                        <a:rPr sz="1200" b="1">
+                          <a:solidFill>
+                            <a:srgbClr val="FFFFFF"/>
+                          </a:solidFill>
+                          <a:latin typeface="맑은 고딕"/>
+                        </a:rPr>
+                        <a:t>A5 MAE</a:t>
+                      </a:r>
+                    </a:p>
+                  </a:txBody>
+                  <a:tcPr>
+                    <a:solidFill>
+                      <a:srgbClr val="1F5C99"/>
+                    </a:solidFill>
+                  </a:tcPr>
+                </a:tc>
+                <a:tc>
+                  <a:txBody>
+                    <a:bodyPr/>
+                    <a:lstStyle/>
+                    <a:p>
+                      <a:r>
+                        <a:rPr sz="1200" b="1">
+                          <a:solidFill>
+                            <a:srgbClr val="FFFFFF"/>
+                          </a:solidFill>
+                          <a:latin typeface="맑은 고딕"/>
+                        </a:rPr>
+                        <a:t>A0 전체대비 배율</a:t>
+                      </a:r>
+                    </a:p>
+                  </a:txBody>
+                  <a:tcPr>
+                    <a:solidFill>
+                      <a:srgbClr val="1F5C99"/>
+                    </a:solidFill>
+                  </a:tcPr>
+                </a:tc>
+                <a:tc>
+                  <a:txBody>
+                    <a:bodyPr/>
+                    <a:lstStyle/>
+                    <a:p>
+                      <a:r>
+                        <a:rPr sz="1200" b="1">
+                          <a:solidFill>
+                            <a:srgbClr val="FFFFFF"/>
+                          </a:solidFill>
+                          <a:latin typeface="맑은 고딕"/>
+                        </a:rPr>
+                        <a:t>A5 전체대비 배율</a:t>
+                      </a:r>
+                    </a:p>
+                  </a:txBody>
+                  <a:tcPr>
+                    <a:solidFill>
+                      <a:srgbClr val="1F5C99"/>
+                    </a:solidFill>
+                  </a:tcPr>
+                </a:tc>
+              </a:tr>
+              <a:tr h="301752">
+                <a:tc>
+                  <a:txBody>
+                    <a:bodyPr/>
+                    <a:lstStyle/>
+                    <a:p>
+                      <a:r>
+                        <a:rPr sz="1200">
+                          <a:solidFill>
+                            <a:srgbClr val="1A1A1A"/>
+                          </a:solidFill>
+                          <a:latin typeface="맑은 고딕"/>
+                        </a:rPr>
+                        <a:t>12~18시</a:t>
+                      </a:r>
+                    </a:p>
+                  </a:txBody>
+                  <a:tcPr>
+                    <a:solidFill>
+                      <a:srgbClr val="FFFFFF"/>
+                    </a:solidFill>
+                  </a:tcPr>
+                </a:tc>
+                <a:tc>
+                  <a:txBody>
+                    <a:bodyPr/>
+                    <a:lstStyle/>
+                    <a:p>
+                      <a:r>
+                        <a:rPr sz="1200">
+                          <a:solidFill>
+                            <a:srgbClr val="1A1A1A"/>
+                          </a:solidFill>
+                          <a:latin typeface="맑은 고딕"/>
+                        </a:rPr>
+                        <a:t>4,995.000</a:t>
+                      </a:r>
+                    </a:p>
+                  </a:txBody>
+                  <a:tcPr>
+                    <a:solidFill>
+                      <a:srgbClr val="FFFFFF"/>
+                    </a:solidFill>
+                  </a:tcPr>
+                </a:tc>
+                <a:tc>
+                  <a:txBody>
+                    <a:bodyPr/>
+                    <a:lstStyle/>
+                    <a:p>
+                      <a:r>
+                        <a:rPr sz="1200">
+                          <a:solidFill>
+                            <a:srgbClr val="1A1A1A"/>
+                          </a:solidFill>
+                          <a:latin typeface="맑은 고딕"/>
+                        </a:rPr>
+                        <a:t>10.237</a:t>
+                      </a:r>
+                    </a:p>
+                  </a:txBody>
+                  <a:tcPr>
+                    <a:solidFill>
+                      <a:srgbClr val="FFFFFF"/>
+                    </a:solidFill>
+                  </a:tcPr>
+                </a:tc>
+                <a:tc>
+                  <a:txBody>
+                    <a:bodyPr/>
+                    <a:lstStyle/>
+                    <a:p>
+                      <a:r>
+                        <a:rPr sz="1200">
+                          <a:solidFill>
+                            <a:srgbClr val="1A1A1A"/>
+                          </a:solidFill>
+                          <a:latin typeface="맑은 고딕"/>
+                        </a:rPr>
+                        <a:t>8.242</a:t>
+                      </a:r>
+                    </a:p>
+                  </a:txBody>
+                  <a:tcPr>
+                    <a:solidFill>
+                      <a:srgbClr val="FFFFFF"/>
+                    </a:solidFill>
+                  </a:tcPr>
+                </a:tc>
+                <a:tc>
+                  <a:txBody>
+                    <a:bodyPr/>
+                    <a:lstStyle/>
+                    <a:p>
+                      <a:r>
+                        <a:rPr sz="1200">
+                          <a:solidFill>
+                            <a:srgbClr val="1A1A1A"/>
+                          </a:solidFill>
+                          <a:latin typeface="맑은 고딕"/>
+                        </a:rPr>
+                        <a:t>1.083</a:t>
+                      </a:r>
+                    </a:p>
+                  </a:txBody>
+                  <a:tcPr>
+                    <a:solidFill>
+                      <a:srgbClr val="FFFFFF"/>
+                    </a:solidFill>
+                  </a:tcPr>
+                </a:tc>
+                <a:tc>
+                  <a:txBody>
+                    <a:bodyPr/>
+                    <a:lstStyle/>
+                    <a:p>
+                      <a:r>
+                        <a:rPr sz="1200">
+                          <a:solidFill>
+                            <a:srgbClr val="1A1A1A"/>
+                          </a:solidFill>
+                          <a:latin typeface="맑은 고딕"/>
+                        </a:rPr>
+                        <a:t>1.024</a:t>
+                      </a:r>
+                    </a:p>
+                  </a:txBody>
+                  <a:tcPr>
+                    <a:solidFill>
+                      <a:srgbClr val="FFFFFF"/>
+                    </a:solidFill>
+                  </a:tcPr>
+                </a:tc>
+              </a:tr>
+              <a:tr h="301752">
+                <a:tc>
+                  <a:txBody>
+                    <a:bodyPr/>
+                    <a:lstStyle/>
+                    <a:p>
+                      <a:r>
+                        <a:rPr sz="1200">
+                          <a:solidFill>
+                            <a:srgbClr val="1A1A1A"/>
+                          </a:solidFill>
+                          <a:latin typeface="맑은 고딕"/>
+                        </a:rPr>
+                        <a:t>고사용량 구간만</a:t>
+                      </a:r>
+                    </a:p>
+                  </a:txBody>
+                  <a:tcPr>
+                    <a:solidFill>
+                      <a:srgbClr val="F2F5F8"/>
+                    </a:solidFill>
+                  </a:tcPr>
+                </a:tc>
+                <a:tc>
+                  <a:txBody>
+                    <a:bodyPr/>
+                    <a:lstStyle/>
+                    <a:p>
+                      <a:r>
+                        <a:rPr sz="1200">
+                          <a:solidFill>
+                            <a:srgbClr val="1A1A1A"/>
+                          </a:solidFill>
+                          <a:latin typeface="맑은 고딕"/>
+                        </a:rPr>
+                        <a:t>1,135.000</a:t>
+                      </a:r>
+                    </a:p>
+                  </a:txBody>
+                  <a:tcPr>
+                    <a:solidFill>
+                      <a:srgbClr val="F2F5F8"/>
+                    </a:solidFill>
+                  </a:tcPr>
+                </a:tc>
+                <a:tc>
+                  <a:txBody>
+                    <a:bodyPr/>
+                    <a:lstStyle/>
+                    <a:p>
+                      <a:r>
+                        <a:rPr sz="1200">
+                          <a:solidFill>
+                            <a:srgbClr val="1A1A1A"/>
+                          </a:solidFill>
+                          <a:latin typeface="맑은 고딕"/>
+                        </a:rPr>
+                        <a:t>17.468</a:t>
+                      </a:r>
+                    </a:p>
+                  </a:txBody>
+                  <a:tcPr>
+                    <a:solidFill>
+                      <a:srgbClr val="F2F5F8"/>
+                    </a:solidFill>
+                  </a:tcPr>
+                </a:tc>
+                <a:tc>
+                  <a:txBody>
+                    <a:bodyPr/>
+                    <a:lstStyle/>
+                    <a:p>
+                      <a:r>
+                        <a:rPr sz="1200">
+                          <a:solidFill>
+                            <a:srgbClr val="1A1A1A"/>
+                          </a:solidFill>
+                          <a:latin typeface="맑은 고딕"/>
+                        </a:rPr>
+                        <a:t>12.972</a:t>
+                      </a:r>
+                    </a:p>
+                  </a:txBody>
+                  <a:tcPr>
+                    <a:solidFill>
+                      <a:srgbClr val="F2F5F8"/>
+                    </a:solidFill>
+                  </a:tcPr>
+                </a:tc>
+                <a:tc>
+                  <a:txBody>
+                    <a:bodyPr/>
+                    <a:lstStyle/>
+                    <a:p>
+                      <a:r>
+                        <a:rPr sz="1200">
+                          <a:solidFill>
+                            <a:srgbClr val="1A1A1A"/>
+                          </a:solidFill>
+                          <a:latin typeface="맑은 고딕"/>
+                        </a:rPr>
+                        <a:t>1.848</a:t>
+                      </a:r>
+                    </a:p>
+                  </a:txBody>
+                  <a:tcPr>
+                    <a:solidFill>
+                      <a:srgbClr val="F2F5F8"/>
+                    </a:solidFill>
+                  </a:tcPr>
+                </a:tc>
+                <a:tc>
+                  <a:txBody>
+                    <a:bodyPr/>
+                    <a:lstStyle/>
+                    <a:p>
+                      <a:r>
+                        <a:rPr sz="1200">
+                          <a:solidFill>
+                            <a:srgbClr val="1A1A1A"/>
+                          </a:solidFill>
+                          <a:latin typeface="맑은 고딕"/>
+                        </a:rPr>
+                        <a:t>1.612</a:t>
+                      </a:r>
+                    </a:p>
+                  </a:txBody>
+                  <a:tcPr>
+                    <a:solidFill>
+                      <a:srgbClr val="F2F5F8"/>
+                    </a:solidFill>
+                  </a:tcPr>
+                </a:tc>
+              </a:tr>
+              <a:tr h="301752">
+                <a:tc>
+                  <a:txBody>
+                    <a:bodyPr/>
+                    <a:lstStyle/>
+                    <a:p>
+                      <a:r>
+                        <a:rPr sz="1200">
+                          <a:solidFill>
+                            <a:srgbClr val="1A1A1A"/>
+                          </a:solidFill>
+                          <a:latin typeface="맑은 고딕"/>
+                        </a:rPr>
+                        <a:t>급변동 상위10%</a:t>
+                      </a:r>
+                    </a:p>
+                  </a:txBody>
+                  <a:tcPr>
+                    <a:solidFill>
+                      <a:srgbClr val="FFFFFF"/>
+                    </a:solidFill>
+                  </a:tcPr>
+                </a:tc>
+                <a:tc>
+                  <a:txBody>
+                    <a:bodyPr/>
+                    <a:lstStyle/>
+                    <a:p>
+                      <a:r>
+                        <a:rPr sz="1200">
+                          <a:solidFill>
+                            <a:srgbClr val="1A1A1A"/>
+                          </a:solidFill>
+                          <a:latin typeface="맑은 고딕"/>
+                        </a:rPr>
+                        <a:t>2,000.000</a:t>
+                      </a:r>
+                    </a:p>
+                  </a:txBody>
+                  <a:tcPr>
+                    <a:solidFill>
+                      <a:srgbClr val="FFFFFF"/>
+                    </a:solidFill>
+                  </a:tcPr>
+                </a:tc>
+                <a:tc>
+                  <a:txBody>
+                    <a:bodyPr/>
+                    <a:lstStyle/>
+                    <a:p>
+                      <a:r>
+                        <a:rPr sz="1200">
+                          <a:solidFill>
+                            <a:srgbClr val="1A1A1A"/>
+                          </a:solidFill>
+                          <a:latin typeface="맑은 고딕"/>
+                        </a:rPr>
+                        <a:t>10.495</a:t>
+                      </a:r>
+                    </a:p>
+                  </a:txBody>
+                  <a:tcPr>
+                    <a:solidFill>
+                      <a:srgbClr val="FFFFFF"/>
+                    </a:solidFill>
+                  </a:tcPr>
+                </a:tc>
+                <a:tc>
+                  <a:txBody>
+                    <a:bodyPr/>
+                    <a:lstStyle/>
+                    <a:p>
+                      <a:r>
+                        <a:rPr sz="1200">
+                          <a:solidFill>
+                            <a:srgbClr val="1A1A1A"/>
+                          </a:solidFill>
+                          <a:latin typeface="맑은 고딕"/>
+                        </a:rPr>
+                        <a:t>9.419</a:t>
+                      </a:r>
+                    </a:p>
+                  </a:txBody>
+                  <a:tcPr>
+                    <a:solidFill>
+                      <a:srgbClr val="FFFFFF"/>
+                    </a:solidFill>
+                  </a:tcPr>
+                </a:tc>
+                <a:tc>
+                  <a:txBody>
+                    <a:bodyPr/>
+                    <a:lstStyle/>
+                    <a:p>
+                      <a:r>
+                        <a:rPr sz="1200">
+                          <a:solidFill>
+                            <a:srgbClr val="1A1A1A"/>
+                          </a:solidFill>
+                          <a:latin typeface="맑은 고딕"/>
+                        </a:rPr>
+                        <a:t>1.110</a:t>
+                      </a:r>
+                    </a:p>
+                  </a:txBody>
+                  <a:tcPr>
+                    <a:solidFill>
+                      <a:srgbClr val="FFFFFF"/>
+                    </a:solidFill>
+                  </a:tcPr>
+                </a:tc>
+                <a:tc>
+                  <a:txBody>
+                    <a:bodyPr/>
+                    <a:lstStyle/>
+                    <a:p>
+                      <a:r>
+                        <a:rPr sz="1200">
+                          <a:solidFill>
+                            <a:srgbClr val="1A1A1A"/>
+                          </a:solidFill>
+                          <a:latin typeface="맑은 고딕"/>
+                        </a:rPr>
+                        <a:t>1.171</a:t>
+                      </a:r>
+                    </a:p>
+                  </a:txBody>
+                  <a:tcPr>
+                    <a:solidFill>
+                      <a:srgbClr val="FFFFFF"/>
+                    </a:solidFill>
+                  </a:tcPr>
+                </a:tc>
+              </a:tr>
+              <a:tr h="301752">
+                <a:tc>
+                  <a:txBody>
+                    <a:bodyPr/>
+                    <a:lstStyle/>
+                    <a:p>
+                      <a:r>
+                        <a:rPr sz="1200">
+                          <a:solidFill>
+                            <a:srgbClr val="1A1A1A"/>
+                          </a:solidFill>
+                          <a:latin typeface="맑은 고딕"/>
+                        </a:rPr>
+                        <a:t>비가동</a:t>
+                      </a:r>
+                    </a:p>
+                  </a:txBody>
+                  <a:tcPr>
+                    <a:solidFill>
+                      <a:srgbClr val="F2F5F8"/>
+                    </a:solidFill>
+                  </a:tcPr>
+                </a:tc>
+                <a:tc>
+                  <a:txBody>
+                    <a:bodyPr/>
+                    <a:lstStyle/>
+                    <a:p>
+                      <a:r>
+                        <a:rPr sz="1200">
+                          <a:solidFill>
+                            <a:srgbClr val="1A1A1A"/>
+                          </a:solidFill>
+                          <a:latin typeface="맑은 고딕"/>
+                        </a:rPr>
+                        <a:t>7,988.000</a:t>
+                      </a:r>
+                    </a:p>
+                  </a:txBody>
+                  <a:tcPr>
+                    <a:solidFill>
+                      <a:srgbClr val="F2F5F8"/>
+                    </a:solidFill>
+                  </a:tcPr>
+                </a:tc>
+                <a:tc>
+                  <a:txBody>
+                    <a:bodyPr/>
+                    <a:lstStyle/>
+                    <a:p>
+                      <a:r>
+                        <a:rPr sz="1200">
+                          <a:solidFill>
+                            <a:srgbClr val="1A1A1A"/>
+                          </a:solidFill>
+                          <a:latin typeface="맑은 고딕"/>
+                        </a:rPr>
+                        <a:t>9.198</a:t>
+                      </a:r>
+                    </a:p>
+                  </a:txBody>
+                  <a:tcPr>
+                    <a:solidFill>
+                      <a:srgbClr val="F2F5F8"/>
+                    </a:solidFill>
+                  </a:tcPr>
+                </a:tc>
+                <a:tc>
+                  <a:txBody>
+                    <a:bodyPr/>
+                    <a:lstStyle/>
+                    <a:p>
+                      <a:r>
+                        <a:rPr sz="1200">
+                          <a:solidFill>
+                            <a:srgbClr val="1A1A1A"/>
+                          </a:solidFill>
+                          <a:latin typeface="맑은 고딕"/>
+                        </a:rPr>
+                        <a:t>6.828</a:t>
+                      </a:r>
+                    </a:p>
+                  </a:txBody>
+                  <a:tcPr>
+                    <a:solidFill>
+                      <a:srgbClr val="F2F5F8"/>
+                    </a:solidFill>
+                  </a:tcPr>
+                </a:tc>
+                <a:tc>
+                  <a:txBody>
+                    <a:bodyPr/>
+                    <a:lstStyle/>
+                    <a:p>
+                      <a:r>
+                        <a:rPr sz="1200">
+                          <a:solidFill>
+                            <a:srgbClr val="1A1A1A"/>
+                          </a:solidFill>
+                          <a:latin typeface="맑은 고딕"/>
+                        </a:rPr>
+                        <a:t>0.973</a:t>
+                      </a:r>
+                    </a:p>
+                  </a:txBody>
+                  <a:tcPr>
+                    <a:solidFill>
+                      <a:srgbClr val="F2F5F8"/>
+                    </a:solidFill>
+                  </a:tcPr>
+                </a:tc>
+                <a:tc>
+                  <a:txBody>
+                    <a:bodyPr/>
+                    <a:lstStyle/>
+                    <a:p>
+                      <a:r>
+                        <a:rPr sz="1200">
+                          <a:solidFill>
+                            <a:srgbClr val="1A1A1A"/>
+                          </a:solidFill>
+                          <a:latin typeface="맑은 고딕"/>
+                        </a:rPr>
+                        <a:t>0.849</a:t>
+                      </a:r>
+                    </a:p>
+                  </a:txBody>
+                  <a:tcPr>
+                    <a:solidFill>
+                      <a:srgbClr val="F2F5F8"/>
+                    </a:solidFill>
+                  </a:tcPr>
+                </a:tc>
+              </a:tr>
+              <a:tr h="301752">
+                <a:tc>
+                  <a:txBody>
+                    <a:bodyPr/>
+                    <a:lstStyle/>
+                    <a:p>
+                      <a:r>
+                        <a:rPr sz="1200">
+                          <a:solidFill>
+                            <a:srgbClr val="1A1A1A"/>
+                          </a:solidFill>
+                          <a:latin typeface="맑은 고딕"/>
+                        </a:rPr>
+                        <a:t>재가동 1시간 이내</a:t>
+                      </a:r>
+                    </a:p>
+                  </a:txBody>
+                  <a:tcPr>
+                    <a:solidFill>
+                      <a:srgbClr val="FFFFFF"/>
+                    </a:solidFill>
+                  </a:tcPr>
+                </a:tc>
+                <a:tc>
+                  <a:txBody>
+                    <a:bodyPr/>
+                    <a:lstStyle/>
+                    <a:p>
+                      <a:r>
+                        <a:rPr sz="1200">
+                          <a:solidFill>
+                            <a:srgbClr val="1A1A1A"/>
+                          </a:solidFill>
+                          <a:latin typeface="맑은 고딕"/>
+                        </a:rPr>
+                        <a:t>561.000</a:t>
+                      </a:r>
+                    </a:p>
+                  </a:txBody>
+                  <a:tcPr>
+                    <a:solidFill>
+                      <a:srgbClr val="FFFFFF"/>
+                    </a:solidFill>
+                  </a:tcPr>
+                </a:tc>
+                <a:tc>
+                  <a:txBody>
+                    <a:bodyPr/>
+                    <a:lstStyle/>
+                    <a:p>
+                      <a:r>
+                        <a:rPr sz="1200">
+                          <a:solidFill>
+                            <a:srgbClr val="1A1A1A"/>
+                          </a:solidFill>
+                          <a:latin typeface="맑은 고딕"/>
+                        </a:rPr>
+                        <a:t>10.737</a:t>
+                      </a:r>
+                    </a:p>
+                  </a:txBody>
+                  <a:tcPr>
+                    <a:solidFill>
+                      <a:srgbClr val="FFFFFF"/>
+                    </a:solidFill>
+                  </a:tcPr>
+                </a:tc>
+                <a:tc>
+                  <a:txBody>
+                    <a:bodyPr/>
+                    <a:lstStyle/>
+                    <a:p>
+                      <a:r>
+                        <a:rPr sz="1200">
+                          <a:solidFill>
+                            <a:srgbClr val="1A1A1A"/>
+                          </a:solidFill>
+                          <a:latin typeface="맑은 고딕"/>
+                        </a:rPr>
+                        <a:t>9.514</a:t>
+                      </a:r>
+                    </a:p>
+                  </a:txBody>
+                  <a:tcPr>
+                    <a:solidFill>
+                      <a:srgbClr val="FFFFFF"/>
+                    </a:solidFill>
+                  </a:tcPr>
+                </a:tc>
+                <a:tc>
+                  <a:txBody>
+                    <a:bodyPr/>
+                    <a:lstStyle/>
+                    <a:p>
+                      <a:r>
+                        <a:rPr sz="1200">
+                          <a:solidFill>
+                            <a:srgbClr val="1A1A1A"/>
+                          </a:solidFill>
+                          <a:latin typeface="맑은 고딕"/>
+                        </a:rPr>
+                        <a:t>1.136</a:t>
+                      </a:r>
+                    </a:p>
+                  </a:txBody>
+                  <a:tcPr>
+                    <a:solidFill>
+                      <a:srgbClr val="FFFFFF"/>
+                    </a:solidFill>
+                  </a:tcPr>
+                </a:tc>
+                <a:tc>
+                  <a:txBody>
+                    <a:bodyPr/>
+                    <a:lstStyle/>
+                    <a:p>
+                      <a:r>
+                        <a:rPr sz="1200">
+                          <a:solidFill>
+                            <a:srgbClr val="1A1A1A"/>
+                          </a:solidFill>
+                          <a:latin typeface="맑은 고딕"/>
+                        </a:rPr>
+                        <a:t>1.182</a:t>
+                      </a:r>
+                    </a:p>
+                  </a:txBody>
+                  <a:tcPr>
+                    <a:solidFill>
+                      <a:srgbClr val="FFFFFF"/>
+                    </a:solidFill>
+                  </a:tcPr>
+                </a:tc>
+              </a:tr>
+              <a:tr h="301752">
+                <a:tc>
+                  <a:txBody>
+                    <a:bodyPr/>
+                    <a:lstStyle/>
+                    <a:p>
+                      <a:r>
+                        <a:rPr sz="1200">
+                          <a:solidFill>
+                            <a:srgbClr val="1A1A1A"/>
+                          </a:solidFill>
+                          <a:latin typeface="맑은 고딕"/>
+                        </a:rPr>
+                        <a:t>전체</a:t>
+                      </a:r>
+                    </a:p>
+                  </a:txBody>
+                  <a:tcPr>
+                    <a:solidFill>
+                      <a:srgbClr val="F2F5F8"/>
+                    </a:solidFill>
+                  </a:tcPr>
+                </a:tc>
+                <a:tc>
+                  <a:txBody>
+                    <a:bodyPr/>
+                    <a:lstStyle/>
+                    <a:p>
+                      <a:r>
+                        <a:rPr sz="1200">
+                          <a:solidFill>
+                            <a:srgbClr val="1A1A1A"/>
+                          </a:solidFill>
+                          <a:latin typeface="맑은 고딕"/>
+                        </a:rPr>
+                        <a:t>19,980.000</a:t>
+                      </a:r>
+                    </a:p>
+                  </a:txBody>
+                  <a:tcPr>
+                    <a:solidFill>
+                      <a:srgbClr val="F2F5F8"/>
+                    </a:solidFill>
+                  </a:tcPr>
+                </a:tc>
+                <a:tc>
+                  <a:txBody>
+                    <a:bodyPr/>
+                    <a:lstStyle/>
+                    <a:p>
+                      <a:r>
+                        <a:rPr sz="1200">
+                          <a:solidFill>
+                            <a:srgbClr val="1A1A1A"/>
+                          </a:solidFill>
+                          <a:latin typeface="맑은 고딕"/>
+                        </a:rPr>
+                        <a:t>9.454</a:t>
+                      </a:r>
+                    </a:p>
+                  </a:txBody>
+                  <a:tcPr>
+                    <a:solidFill>
+                      <a:srgbClr val="F2F5F8"/>
+                    </a:solidFill>
+                  </a:tcPr>
+                </a:tc>
+                <a:tc>
+                  <a:txBody>
+                    <a:bodyPr/>
+                    <a:lstStyle/>
+                    <a:p>
+                      <a:r>
+                        <a:rPr sz="1200">
+                          <a:solidFill>
+                            <a:srgbClr val="1A1A1A"/>
+                          </a:solidFill>
+                          <a:latin typeface="맑은 고딕"/>
+                        </a:rPr>
+                        <a:t>8.047</a:t>
+                      </a:r>
+                    </a:p>
+                  </a:txBody>
+                  <a:tcPr>
+                    <a:solidFill>
+                      <a:srgbClr val="F2F5F8"/>
+                    </a:solidFill>
+                  </a:tcPr>
+                </a:tc>
+                <a:tc>
+                  <a:txBody>
+                    <a:bodyPr/>
+                    <a:lstStyle/>
+                    <a:p>
+                      <a:r>
+                        <a:rPr sz="1200">
+                          <a:solidFill>
+                            <a:srgbClr val="1A1A1A"/>
+                          </a:solidFill>
+                          <a:latin typeface="맑은 고딕"/>
+                        </a:rPr>
+                        <a:t>1.000</a:t>
+                      </a:r>
+                    </a:p>
+                  </a:txBody>
+                  <a:tcPr>
+                    <a:solidFill>
+                      <a:srgbClr val="F2F5F8"/>
+                    </a:solidFill>
+                  </a:tcPr>
+                </a:tc>
+                <a:tc>
+                  <a:txBody>
+                    <a:bodyPr/>
+                    <a:lstStyle/>
+                    <a:p>
+                      <a:r>
+                        <a:rPr sz="1200">
+                          <a:solidFill>
+                            <a:srgbClr val="1A1A1A"/>
+                          </a:solidFill>
+                          <a:latin typeface="맑은 고딕"/>
+                        </a:rPr>
+                        <a:t>1.000</a:t>
+                      </a:r>
+                    </a:p>
+                  </a:txBody>
+                  <a:tcPr>
+                    <a:solidFill>
+                      <a:srgbClr val="F2F5F8"/>
+                    </a:solidFill>
+                  </a:tcPr>
+                </a:tc>
+              </a:tr>
+              <a:tr h="301752">
+                <a:tc>
+                  <a:txBody>
+                    <a:bodyPr/>
+                    <a:lstStyle/>
+                    <a:p>
+                      <a:r>
+                        <a:rPr sz="1200">
+                          <a:solidFill>
+                            <a:srgbClr val="1A1A1A"/>
+                          </a:solidFill>
+                          <a:latin typeface="맑은 고딕"/>
+                        </a:rPr>
+                        <a:t>주말</a:t>
+                      </a:r>
+                    </a:p>
+                  </a:txBody>
+                  <a:tcPr>
+                    <a:solidFill>
+                      <a:srgbClr val="FFFFFF"/>
+                    </a:solidFill>
+                  </a:tcPr>
+                </a:tc>
+                <a:tc>
+                  <a:txBody>
+                    <a:bodyPr/>
+                    <a:lstStyle/>
+                    <a:p>
+                      <a:r>
+                        <a:rPr sz="1200">
+                          <a:solidFill>
+                            <a:srgbClr val="1A1A1A"/>
+                          </a:solidFill>
+                          <a:latin typeface="맑은 고딕"/>
+                        </a:rPr>
+                        <a:t>5,756.000</a:t>
+                      </a:r>
+                    </a:p>
+                  </a:txBody>
+                  <a:tcPr>
+                    <a:solidFill>
+                      <a:srgbClr val="FFFFFF"/>
+                    </a:solidFill>
+                  </a:tcPr>
+                </a:tc>
+                <a:tc>
+                  <a:txBody>
+                    <a:bodyPr/>
+                    <a:lstStyle/>
+                    <a:p>
+                      <a:r>
+                        <a:rPr sz="1200">
+                          <a:solidFill>
+                            <a:srgbClr val="1A1A1A"/>
+                          </a:solidFill>
+                          <a:latin typeface="맑은 고딕"/>
+                        </a:rPr>
+                        <a:t>10.127</a:t>
+                      </a:r>
+                    </a:p>
+                  </a:txBody>
+                  <a:tcPr>
+                    <a:solidFill>
+                      <a:srgbClr val="FFFFFF"/>
+                    </a:solidFill>
+                  </a:tcPr>
+                </a:tc>
+                <a:tc>
+                  <a:txBody>
+                    <a:bodyPr/>
+                    <a:lstStyle/>
+                    <a:p>
+                      <a:r>
+                        <a:rPr sz="1200">
+                          <a:solidFill>
+                            <a:srgbClr val="1A1A1A"/>
+                          </a:solidFill>
+                          <a:latin typeface="맑은 고딕"/>
+                        </a:rPr>
+                        <a:t>6.940</a:t>
+                      </a:r>
+                    </a:p>
+                  </a:txBody>
+                  <a:tcPr>
+                    <a:solidFill>
+                      <a:srgbClr val="FFFFFF"/>
+                    </a:solidFill>
+                  </a:tcPr>
+                </a:tc>
+                <a:tc>
+                  <a:txBody>
+                    <a:bodyPr/>
+                    <a:lstStyle/>
+                    <a:p>
+                      <a:r>
+                        <a:rPr sz="1200">
+                          <a:solidFill>
+                            <a:srgbClr val="1A1A1A"/>
+                          </a:solidFill>
+                          <a:latin typeface="맑은 고딕"/>
+                        </a:rPr>
+                        <a:t>1.071</a:t>
+                      </a:r>
+                    </a:p>
+                  </a:txBody>
+                  <a:tcPr>
+                    <a:solidFill>
+                      <a:srgbClr val="FFFFFF"/>
+                    </a:solidFill>
+                  </a:tcPr>
+                </a:tc>
+                <a:tc>
+                  <a:txBody>
+                    <a:bodyPr/>
+                    <a:lstStyle/>
+                    <a:p>
+                      <a:r>
+                        <a:rPr sz="1200">
+                          <a:solidFill>
+                            <a:srgbClr val="1A1A1A"/>
+                          </a:solidFill>
+                          <a:latin typeface="맑은 고딕"/>
+                        </a:rPr>
+                        <a:t>0.862</a:t>
+                      </a:r>
+                    </a:p>
+                  </a:txBody>
+                  <a:tcPr>
+                    <a:solidFill>
+                      <a:srgbClr val="FFFFFF"/>
+                    </a:solidFill>
+                  </a:tcPr>
+                </a:tc>
+              </a:tr>
+            </a:tbl>
+          </a:graphicData>
+        </a:graphic>
+      </p:graphicFrame>
       <p:sp>
         <p:nvSpPr>
-          <p:cNvPr id="5" name="TextBox 4"/>
+          <p:cNvPr id="6" name="TextBox 5"/>
           <p:cNvSpPr txBox="1"/>
           <p:nvPr/>
         </p:nvSpPr>
@@ -5503,11 +8837,11 @@
             <a:r>
               <a:rPr sz="1100">
                 <a:solidFill>
-                  <a:srgbClr val="1F5C99"/>
+                  <a:srgbClr val="555A60"/>
                 </a:solidFill>
                 <a:latin typeface="맑은 고딕"/>
               </a:rPr>
-              <a:t>모든 수치는 analysis/tables/*.csv 에서 직접 읽어 이 장표를 생성했다. 손으로 옮겨 적지 않았다.</a:t>
+              <a:t>가장 취약한 조건은 고사용량 구간 자체(전체의 1.85배 → 1.61배). A5 는 모든 조건에서 오차를 낮췄고, 비가동·주말에서 특히 크게 줄였다(휴무·재가동 특성 효과).</a:t>
             </a:r>
           </a:p>
         </p:txBody>
@@ -5610,7 +8944,7 @@
                 </a:solidFill>
                 <a:latin typeface="맑은 고딕"/>
               </a:rPr>
-              <a:t>부록 · 예측값과 보정된 예측구간</a:t>
+              <a:t>제3장 · OOD — '포기 신호' 가 아니라 '취약조건 지도'</a:t>
             </a:r>
           </a:p>
         </p:txBody>
@@ -5644,35 +8978,939 @@
                 </a:solidFill>
                 <a:latin typeface="맑은 고딕"/>
               </a:rPr>
-              <a:t>analysis/figures/23_baseline_fig2_forecast_interval.png</a:t>
+              <a:t>처음 보는 입력 조합(마할라노비스 거리, TRAIN p99 컷)을 어떻게 쓸 것인가</a:t>
             </a:r>
           </a:p>
         </p:txBody>
       </p:sp>
-      <p:pic>
-        <p:nvPicPr>
-          <p:cNvPr id="5" name="Picture 4" descr="23_baseline_fig2_forecast_interval.png"/>
-          <p:cNvPicPr>
-            <a:picLocks noChangeAspect="1"/>
-          </p:cNvPicPr>
+      <p:graphicFrame>
+        <p:nvGraphicFramePr>
+          <p:cNvPr id="5" name="Table 4"/>
+          <p:cNvGraphicFramePr>
+            <a:graphicFrameLocks noGrp="1"/>
+          </p:cNvGraphicFramePr>
           <p:nvPr/>
-        </p:nvPicPr>
-        <p:blipFill>
-          <a:blip r:embed="rId2"/>
-          <a:stretch>
-            <a:fillRect/>
-          </a:stretch>
-        </p:blipFill>
+        </p:nvGraphicFramePr>
+        <p:xfrm>
+          <a:off x="594360" y="1463040"/>
+          <a:ext cx="4206240" cy="3319272"/>
+        </p:xfrm>
+        <a:graphic>
+          <a:graphicData uri="http://schemas.openxmlformats.org/drawingml/2006/table">
+            <a:tbl>
+              <a:tblPr firstRow="1" bandRow="1">
+                <a:tableStyleId>{5C22544A-7EE6-4342-B048-85BDC9FD1C3A}</a:tableStyleId>
+              </a:tblPr>
+              <a:tblGrid>
+                <a:gridCol w="1402080"/>
+                <a:gridCol w="1402080"/>
+                <a:gridCol w="1402080"/>
+              </a:tblGrid>
+              <a:tr h="301752">
+                <a:tc>
+                  <a:txBody>
+                    <a:bodyPr/>
+                    <a:lstStyle/>
+                    <a:p>
+                      <a:r>
+                        <a:rPr sz="1100" b="1">
+                          <a:solidFill>
+                            <a:srgbClr val="FFFFFF"/>
+                          </a:solidFill>
+                          <a:latin typeface="맑은 고딕"/>
+                        </a:rPr>
+                        <a:t>거리 십분위</a:t>
+                      </a:r>
+                    </a:p>
+                  </a:txBody>
+                  <a:tcPr>
+                    <a:solidFill>
+                      <a:srgbClr val="1F5C99"/>
+                    </a:solidFill>
+                  </a:tcPr>
+                </a:tc>
+                <a:tc>
+                  <a:txBody>
+                    <a:bodyPr/>
+                    <a:lstStyle/>
+                    <a:p>
+                      <a:r>
+                        <a:rPr sz="1100" b="1">
+                          <a:solidFill>
+                            <a:srgbClr val="FFFFFF"/>
+                          </a:solidFill>
+                          <a:latin typeface="맑은 고딕"/>
+                        </a:rPr>
+                        <a:t>평균 거리</a:t>
+                      </a:r>
+                    </a:p>
+                  </a:txBody>
+                  <a:tcPr>
+                    <a:solidFill>
+                      <a:srgbClr val="1F5C99"/>
+                    </a:solidFill>
+                  </a:tcPr>
+                </a:tc>
+                <a:tc>
+                  <a:txBody>
+                    <a:bodyPr/>
+                    <a:lstStyle/>
+                    <a:p>
+                      <a:r>
+                        <a:rPr sz="1100" b="1">
+                          <a:solidFill>
+                            <a:srgbClr val="FFFFFF"/>
+                          </a:solidFill>
+                          <a:latin typeface="맑은 고딕"/>
+                        </a:rPr>
+                        <a:t>MAE</a:t>
+                      </a:r>
+                    </a:p>
+                  </a:txBody>
+                  <a:tcPr>
+                    <a:solidFill>
+                      <a:srgbClr val="1F5C99"/>
+                    </a:solidFill>
+                  </a:tcPr>
+                </a:tc>
+              </a:tr>
+              <a:tr h="301752">
+                <a:tc>
+                  <a:txBody>
+                    <a:bodyPr/>
+                    <a:lstStyle/>
+                    <a:p>
+                      <a:r>
+                        <a:rPr sz="1100">
+                          <a:solidFill>
+                            <a:srgbClr val="1A1A1A"/>
+                          </a:solidFill>
+                          <a:latin typeface="맑은 고딕"/>
+                        </a:rPr>
+                        <a:t>0</a:t>
+                      </a:r>
+                    </a:p>
+                  </a:txBody>
+                  <a:tcPr>
+                    <a:solidFill>
+                      <a:srgbClr val="FFFFFF"/>
+                    </a:solidFill>
+                  </a:tcPr>
+                </a:tc>
+                <a:tc>
+                  <a:txBody>
+                    <a:bodyPr/>
+                    <a:lstStyle/>
+                    <a:p>
+                      <a:r>
+                        <a:rPr sz="1100">
+                          <a:solidFill>
+                            <a:srgbClr val="1A1A1A"/>
+                          </a:solidFill>
+                          <a:latin typeface="맑은 고딕"/>
+                        </a:rPr>
+                        <a:t>2.920</a:t>
+                      </a:r>
+                    </a:p>
+                  </a:txBody>
+                  <a:tcPr>
+                    <a:solidFill>
+                      <a:srgbClr val="FFFFFF"/>
+                    </a:solidFill>
+                  </a:tcPr>
+                </a:tc>
+                <a:tc>
+                  <a:txBody>
+                    <a:bodyPr/>
+                    <a:lstStyle/>
+                    <a:p>
+                      <a:r>
+                        <a:rPr sz="1100">
+                          <a:solidFill>
+                            <a:srgbClr val="1A1A1A"/>
+                          </a:solidFill>
+                          <a:latin typeface="맑은 고딕"/>
+                        </a:rPr>
+                        <a:t>6.440</a:t>
+                      </a:r>
+                    </a:p>
+                  </a:txBody>
+                  <a:tcPr>
+                    <a:solidFill>
+                      <a:srgbClr val="FFFFFF"/>
+                    </a:solidFill>
+                  </a:tcPr>
+                </a:tc>
+              </a:tr>
+              <a:tr h="301752">
+                <a:tc>
+                  <a:txBody>
+                    <a:bodyPr/>
+                    <a:lstStyle/>
+                    <a:p>
+                      <a:r>
+                        <a:rPr sz="1100">
+                          <a:solidFill>
+                            <a:srgbClr val="1A1A1A"/>
+                          </a:solidFill>
+                          <a:latin typeface="맑은 고딕"/>
+                        </a:rPr>
+                        <a:t>1</a:t>
+                      </a:r>
+                    </a:p>
+                  </a:txBody>
+                  <a:tcPr>
+                    <a:solidFill>
+                      <a:srgbClr val="F2F5F8"/>
+                    </a:solidFill>
+                  </a:tcPr>
+                </a:tc>
+                <a:tc>
+                  <a:txBody>
+                    <a:bodyPr/>
+                    <a:lstStyle/>
+                    <a:p>
+                      <a:r>
+                        <a:rPr sz="1100">
+                          <a:solidFill>
+                            <a:srgbClr val="1A1A1A"/>
+                          </a:solidFill>
+                          <a:latin typeface="맑은 고딕"/>
+                        </a:rPr>
+                        <a:t>4.010</a:t>
+                      </a:r>
+                    </a:p>
+                  </a:txBody>
+                  <a:tcPr>
+                    <a:solidFill>
+                      <a:srgbClr val="F2F5F8"/>
+                    </a:solidFill>
+                  </a:tcPr>
+                </a:tc>
+                <a:tc>
+                  <a:txBody>
+                    <a:bodyPr/>
+                    <a:lstStyle/>
+                    <a:p>
+                      <a:r>
+                        <a:rPr sz="1100">
+                          <a:solidFill>
+                            <a:srgbClr val="1A1A1A"/>
+                          </a:solidFill>
+                          <a:latin typeface="맑은 고딕"/>
+                        </a:rPr>
+                        <a:t>7.940</a:t>
+                      </a:r>
+                    </a:p>
+                  </a:txBody>
+                  <a:tcPr>
+                    <a:solidFill>
+                      <a:srgbClr val="F2F5F8"/>
+                    </a:solidFill>
+                  </a:tcPr>
+                </a:tc>
+              </a:tr>
+              <a:tr h="301752">
+                <a:tc>
+                  <a:txBody>
+                    <a:bodyPr/>
+                    <a:lstStyle/>
+                    <a:p>
+                      <a:r>
+                        <a:rPr sz="1100">
+                          <a:solidFill>
+                            <a:srgbClr val="1A1A1A"/>
+                          </a:solidFill>
+                          <a:latin typeface="맑은 고딕"/>
+                        </a:rPr>
+                        <a:t>2</a:t>
+                      </a:r>
+                    </a:p>
+                  </a:txBody>
+                  <a:tcPr>
+                    <a:solidFill>
+                      <a:srgbClr val="FFFFFF"/>
+                    </a:solidFill>
+                  </a:tcPr>
+                </a:tc>
+                <a:tc>
+                  <a:txBody>
+                    <a:bodyPr/>
+                    <a:lstStyle/>
+                    <a:p>
+                      <a:r>
+                        <a:rPr sz="1100">
+                          <a:solidFill>
+                            <a:srgbClr val="1A1A1A"/>
+                          </a:solidFill>
+                          <a:latin typeface="맑은 고딕"/>
+                        </a:rPr>
+                        <a:t>4.720</a:t>
+                      </a:r>
+                    </a:p>
+                  </a:txBody>
+                  <a:tcPr>
+                    <a:solidFill>
+                      <a:srgbClr val="FFFFFF"/>
+                    </a:solidFill>
+                  </a:tcPr>
+                </a:tc>
+                <a:tc>
+                  <a:txBody>
+                    <a:bodyPr/>
+                    <a:lstStyle/>
+                    <a:p>
+                      <a:r>
+                        <a:rPr sz="1100">
+                          <a:solidFill>
+                            <a:srgbClr val="1A1A1A"/>
+                          </a:solidFill>
+                          <a:latin typeface="맑은 고딕"/>
+                        </a:rPr>
+                        <a:t>7.610</a:t>
+                      </a:r>
+                    </a:p>
+                  </a:txBody>
+                  <a:tcPr>
+                    <a:solidFill>
+                      <a:srgbClr val="FFFFFF"/>
+                    </a:solidFill>
+                  </a:tcPr>
+                </a:tc>
+              </a:tr>
+              <a:tr h="301752">
+                <a:tc>
+                  <a:txBody>
+                    <a:bodyPr/>
+                    <a:lstStyle/>
+                    <a:p>
+                      <a:r>
+                        <a:rPr sz="1100">
+                          <a:solidFill>
+                            <a:srgbClr val="1A1A1A"/>
+                          </a:solidFill>
+                          <a:latin typeface="맑은 고딕"/>
+                        </a:rPr>
+                        <a:t>3</a:t>
+                      </a:r>
+                    </a:p>
+                  </a:txBody>
+                  <a:tcPr>
+                    <a:solidFill>
+                      <a:srgbClr val="F2F5F8"/>
+                    </a:solidFill>
+                  </a:tcPr>
+                </a:tc>
+                <a:tc>
+                  <a:txBody>
+                    <a:bodyPr/>
+                    <a:lstStyle/>
+                    <a:p>
+                      <a:r>
+                        <a:rPr sz="1100">
+                          <a:solidFill>
+                            <a:srgbClr val="1A1A1A"/>
+                          </a:solidFill>
+                          <a:latin typeface="맑은 고딕"/>
+                        </a:rPr>
+                        <a:t>5.410</a:t>
+                      </a:r>
+                    </a:p>
+                  </a:txBody>
+                  <a:tcPr>
+                    <a:solidFill>
+                      <a:srgbClr val="F2F5F8"/>
+                    </a:solidFill>
+                  </a:tcPr>
+                </a:tc>
+                <a:tc>
+                  <a:txBody>
+                    <a:bodyPr/>
+                    <a:lstStyle/>
+                    <a:p>
+                      <a:r>
+                        <a:rPr sz="1100">
+                          <a:solidFill>
+                            <a:srgbClr val="1A1A1A"/>
+                          </a:solidFill>
+                          <a:latin typeface="맑은 고딕"/>
+                        </a:rPr>
+                        <a:t>8.130</a:t>
+                      </a:r>
+                    </a:p>
+                  </a:txBody>
+                  <a:tcPr>
+                    <a:solidFill>
+                      <a:srgbClr val="F2F5F8"/>
+                    </a:solidFill>
+                  </a:tcPr>
+                </a:tc>
+              </a:tr>
+              <a:tr h="301752">
+                <a:tc>
+                  <a:txBody>
+                    <a:bodyPr/>
+                    <a:lstStyle/>
+                    <a:p>
+                      <a:r>
+                        <a:rPr sz="1100">
+                          <a:solidFill>
+                            <a:srgbClr val="1A1A1A"/>
+                          </a:solidFill>
+                          <a:latin typeface="맑은 고딕"/>
+                        </a:rPr>
+                        <a:t>4</a:t>
+                      </a:r>
+                    </a:p>
+                  </a:txBody>
+                  <a:tcPr>
+                    <a:solidFill>
+                      <a:srgbClr val="FFFFFF"/>
+                    </a:solidFill>
+                  </a:tcPr>
+                </a:tc>
+                <a:tc>
+                  <a:txBody>
+                    <a:bodyPr/>
+                    <a:lstStyle/>
+                    <a:p>
+                      <a:r>
+                        <a:rPr sz="1100">
+                          <a:solidFill>
+                            <a:srgbClr val="1A1A1A"/>
+                          </a:solidFill>
+                          <a:latin typeface="맑은 고딕"/>
+                        </a:rPr>
+                        <a:t>6.110</a:t>
+                      </a:r>
+                    </a:p>
+                  </a:txBody>
+                  <a:tcPr>
+                    <a:solidFill>
+                      <a:srgbClr val="FFFFFF"/>
+                    </a:solidFill>
+                  </a:tcPr>
+                </a:tc>
+                <a:tc>
+                  <a:txBody>
+                    <a:bodyPr/>
+                    <a:lstStyle/>
+                    <a:p>
+                      <a:r>
+                        <a:rPr sz="1100">
+                          <a:solidFill>
+                            <a:srgbClr val="1A1A1A"/>
+                          </a:solidFill>
+                          <a:latin typeface="맑은 고딕"/>
+                        </a:rPr>
+                        <a:t>7.820</a:t>
+                      </a:r>
+                    </a:p>
+                  </a:txBody>
+                  <a:tcPr>
+                    <a:solidFill>
+                      <a:srgbClr val="FFFFFF"/>
+                    </a:solidFill>
+                  </a:tcPr>
+                </a:tc>
+              </a:tr>
+              <a:tr h="301752">
+                <a:tc>
+                  <a:txBody>
+                    <a:bodyPr/>
+                    <a:lstStyle/>
+                    <a:p>
+                      <a:r>
+                        <a:rPr sz="1100">
+                          <a:solidFill>
+                            <a:srgbClr val="1A1A1A"/>
+                          </a:solidFill>
+                          <a:latin typeface="맑은 고딕"/>
+                        </a:rPr>
+                        <a:t>5</a:t>
+                      </a:r>
+                    </a:p>
+                  </a:txBody>
+                  <a:tcPr>
+                    <a:solidFill>
+                      <a:srgbClr val="F2F5F8"/>
+                    </a:solidFill>
+                  </a:tcPr>
+                </a:tc>
+                <a:tc>
+                  <a:txBody>
+                    <a:bodyPr/>
+                    <a:lstStyle/>
+                    <a:p>
+                      <a:r>
+                        <a:rPr sz="1100">
+                          <a:solidFill>
+                            <a:srgbClr val="1A1A1A"/>
+                          </a:solidFill>
+                          <a:latin typeface="맑은 고딕"/>
+                        </a:rPr>
+                        <a:t>6.920</a:t>
+                      </a:r>
+                    </a:p>
+                  </a:txBody>
+                  <a:tcPr>
+                    <a:solidFill>
+                      <a:srgbClr val="F2F5F8"/>
+                    </a:solidFill>
+                  </a:tcPr>
+                </a:tc>
+                <a:tc>
+                  <a:txBody>
+                    <a:bodyPr/>
+                    <a:lstStyle/>
+                    <a:p>
+                      <a:r>
+                        <a:rPr sz="1100">
+                          <a:solidFill>
+                            <a:srgbClr val="1A1A1A"/>
+                          </a:solidFill>
+                          <a:latin typeface="맑은 고딕"/>
+                        </a:rPr>
+                        <a:t>7.760</a:t>
+                      </a:r>
+                    </a:p>
+                  </a:txBody>
+                  <a:tcPr>
+                    <a:solidFill>
+                      <a:srgbClr val="F2F5F8"/>
+                    </a:solidFill>
+                  </a:tcPr>
+                </a:tc>
+              </a:tr>
+              <a:tr h="301752">
+                <a:tc>
+                  <a:txBody>
+                    <a:bodyPr/>
+                    <a:lstStyle/>
+                    <a:p>
+                      <a:r>
+                        <a:rPr sz="1100">
+                          <a:solidFill>
+                            <a:srgbClr val="1A1A1A"/>
+                          </a:solidFill>
+                          <a:latin typeface="맑은 고딕"/>
+                        </a:rPr>
+                        <a:t>6</a:t>
+                      </a:r>
+                    </a:p>
+                  </a:txBody>
+                  <a:tcPr>
+                    <a:solidFill>
+                      <a:srgbClr val="FFFFFF"/>
+                    </a:solidFill>
+                  </a:tcPr>
+                </a:tc>
+                <a:tc>
+                  <a:txBody>
+                    <a:bodyPr/>
+                    <a:lstStyle/>
+                    <a:p>
+                      <a:r>
+                        <a:rPr sz="1100">
+                          <a:solidFill>
+                            <a:srgbClr val="1A1A1A"/>
+                          </a:solidFill>
+                          <a:latin typeface="맑은 고딕"/>
+                        </a:rPr>
+                        <a:t>7.910</a:t>
+                      </a:r>
+                    </a:p>
+                  </a:txBody>
+                  <a:tcPr>
+                    <a:solidFill>
+                      <a:srgbClr val="FFFFFF"/>
+                    </a:solidFill>
+                  </a:tcPr>
+                </a:tc>
+                <a:tc>
+                  <a:txBody>
+                    <a:bodyPr/>
+                    <a:lstStyle/>
+                    <a:p>
+                      <a:r>
+                        <a:rPr sz="1100">
+                          <a:solidFill>
+                            <a:srgbClr val="1A1A1A"/>
+                          </a:solidFill>
+                          <a:latin typeface="맑은 고딕"/>
+                        </a:rPr>
+                        <a:t>7.900</a:t>
+                      </a:r>
+                    </a:p>
+                  </a:txBody>
+                  <a:tcPr>
+                    <a:solidFill>
+                      <a:srgbClr val="FFFFFF"/>
+                    </a:solidFill>
+                  </a:tcPr>
+                </a:tc>
+              </a:tr>
+              <a:tr h="301752">
+                <a:tc>
+                  <a:txBody>
+                    <a:bodyPr/>
+                    <a:lstStyle/>
+                    <a:p>
+                      <a:r>
+                        <a:rPr sz="1100">
+                          <a:solidFill>
+                            <a:srgbClr val="1A1A1A"/>
+                          </a:solidFill>
+                          <a:latin typeface="맑은 고딕"/>
+                        </a:rPr>
+                        <a:t>7</a:t>
+                      </a:r>
+                    </a:p>
+                  </a:txBody>
+                  <a:tcPr>
+                    <a:solidFill>
+                      <a:srgbClr val="F2F5F8"/>
+                    </a:solidFill>
+                  </a:tcPr>
+                </a:tc>
+                <a:tc>
+                  <a:txBody>
+                    <a:bodyPr/>
+                    <a:lstStyle/>
+                    <a:p>
+                      <a:r>
+                        <a:rPr sz="1100">
+                          <a:solidFill>
+                            <a:srgbClr val="1A1A1A"/>
+                          </a:solidFill>
+                          <a:latin typeface="맑은 고딕"/>
+                        </a:rPr>
+                        <a:t>9.370</a:t>
+                      </a:r>
+                    </a:p>
+                  </a:txBody>
+                  <a:tcPr>
+                    <a:solidFill>
+                      <a:srgbClr val="F2F5F8"/>
+                    </a:solidFill>
+                  </a:tcPr>
+                </a:tc>
+                <a:tc>
+                  <a:txBody>
+                    <a:bodyPr/>
+                    <a:lstStyle/>
+                    <a:p>
+                      <a:r>
+                        <a:rPr sz="1100">
+                          <a:solidFill>
+                            <a:srgbClr val="1A1A1A"/>
+                          </a:solidFill>
+                          <a:latin typeface="맑은 고딕"/>
+                        </a:rPr>
+                        <a:t>7.910</a:t>
+                      </a:r>
+                    </a:p>
+                  </a:txBody>
+                  <a:tcPr>
+                    <a:solidFill>
+                      <a:srgbClr val="F2F5F8"/>
+                    </a:solidFill>
+                  </a:tcPr>
+                </a:tc>
+              </a:tr>
+              <a:tr h="301752">
+                <a:tc>
+                  <a:txBody>
+                    <a:bodyPr/>
+                    <a:lstStyle/>
+                    <a:p>
+                      <a:r>
+                        <a:rPr sz="1100">
+                          <a:solidFill>
+                            <a:srgbClr val="1A1A1A"/>
+                          </a:solidFill>
+                          <a:latin typeface="맑은 고딕"/>
+                        </a:rPr>
+                        <a:t>8</a:t>
+                      </a:r>
+                    </a:p>
+                  </a:txBody>
+                  <a:tcPr>
+                    <a:solidFill>
+                      <a:srgbClr val="FFFFFF"/>
+                    </a:solidFill>
+                  </a:tcPr>
+                </a:tc>
+                <a:tc>
+                  <a:txBody>
+                    <a:bodyPr/>
+                    <a:lstStyle/>
+                    <a:p>
+                      <a:r>
+                        <a:rPr sz="1100">
+                          <a:solidFill>
+                            <a:srgbClr val="1A1A1A"/>
+                          </a:solidFill>
+                          <a:latin typeface="맑은 고딕"/>
+                        </a:rPr>
+                        <a:t>11.670</a:t>
+                      </a:r>
+                    </a:p>
+                  </a:txBody>
+                  <a:tcPr>
+                    <a:solidFill>
+                      <a:srgbClr val="FFFFFF"/>
+                    </a:solidFill>
+                  </a:tcPr>
+                </a:tc>
+                <a:tc>
+                  <a:txBody>
+                    <a:bodyPr/>
+                    <a:lstStyle/>
+                    <a:p>
+                      <a:r>
+                        <a:rPr sz="1100">
+                          <a:solidFill>
+                            <a:srgbClr val="1A1A1A"/>
+                          </a:solidFill>
+                          <a:latin typeface="맑은 고딕"/>
+                        </a:rPr>
+                        <a:t>8.860</a:t>
+                      </a:r>
+                    </a:p>
+                  </a:txBody>
+                  <a:tcPr>
+                    <a:solidFill>
+                      <a:srgbClr val="FFFFFF"/>
+                    </a:solidFill>
+                  </a:tcPr>
+                </a:tc>
+              </a:tr>
+              <a:tr h="301752">
+                <a:tc>
+                  <a:txBody>
+                    <a:bodyPr/>
+                    <a:lstStyle/>
+                    <a:p>
+                      <a:r>
+                        <a:rPr sz="1100">
+                          <a:solidFill>
+                            <a:srgbClr val="1A1A1A"/>
+                          </a:solidFill>
+                          <a:latin typeface="맑은 고딕"/>
+                        </a:rPr>
+                        <a:t>9</a:t>
+                      </a:r>
+                    </a:p>
+                  </a:txBody>
+                  <a:tcPr>
+                    <a:solidFill>
+                      <a:srgbClr val="F2F5F8"/>
+                    </a:solidFill>
+                  </a:tcPr>
+                </a:tc>
+                <a:tc>
+                  <a:txBody>
+                    <a:bodyPr/>
+                    <a:lstStyle/>
+                    <a:p>
+                      <a:r>
+                        <a:rPr sz="1100">
+                          <a:solidFill>
+                            <a:srgbClr val="1A1A1A"/>
+                          </a:solidFill>
+                          <a:latin typeface="맑은 고딕"/>
+                        </a:rPr>
+                        <a:t>23.240</a:t>
+                      </a:r>
+                    </a:p>
+                  </a:txBody>
+                  <a:tcPr>
+                    <a:solidFill>
+                      <a:srgbClr val="F2F5F8"/>
+                    </a:solidFill>
+                  </a:tcPr>
+                </a:tc>
+                <a:tc>
+                  <a:txBody>
+                    <a:bodyPr/>
+                    <a:lstStyle/>
+                    <a:p>
+                      <a:r>
+                        <a:rPr sz="1100">
+                          <a:solidFill>
+                            <a:srgbClr val="1A1A1A"/>
+                          </a:solidFill>
+                          <a:latin typeface="맑은 고딕"/>
+                        </a:rPr>
+                        <a:t>10.100</a:t>
+                      </a:r>
+                    </a:p>
+                  </a:txBody>
+                  <a:tcPr>
+                    <a:solidFill>
+                      <a:srgbClr val="F2F5F8"/>
+                    </a:solidFill>
+                  </a:tcPr>
+                </a:tc>
+              </a:tr>
+            </a:tbl>
+          </a:graphicData>
+        </a:graphic>
+      </p:graphicFrame>
+      <p:sp>
+        <p:nvSpPr>
+          <p:cNvPr id="6" name="TextBox 5"/>
+          <p:cNvSpPr txBox="1"/>
+          <p:nvPr/>
+        </p:nvSpPr>
         <p:spPr>
           <a:xfrm>
-            <a:off x="822960" y="1463040"/>
-            <a:ext cx="10515600" cy="3200400"/>
+            <a:off x="5120640" y="1554480"/>
+            <a:ext cx="6583680" cy="4846320"/>
           </a:xfrm>
           <a:prstGeom prst="rect">
             <a:avLst/>
           </a:prstGeom>
+          <a:noFill/>
         </p:spPr>
-      </p:pic>
+        <p:txBody>
+          <a:bodyPr wrap="square">
+            <a:spAutoFit/>
+          </a:bodyPr>
+          <a:lstStyle/>
+          <a:p>
+            <a:pPr>
+              <a:spcAft>
+                <a:spcPts val="500"/>
+              </a:spcAft>
+            </a:pPr>
+            <a:r>
+              <a:rPr sz="1400" b="1">
+                <a:solidFill>
+                  <a:srgbClr val="1A1A1A"/>
+                </a:solidFill>
+                <a:latin typeface="맑은 고딕"/>
+              </a:rPr>
+              <a:t>■ ① 지시력은 있다 — 거리 최하위 십분위 MAE 6.44 → 최상위 10.10 kw</a:t>
+            </a:r>
+          </a:p>
+          <a:p>
+            <a:pPr>
+              <a:spcAft>
+                <a:spcPts val="500"/>
+              </a:spcAft>
+            </a:pPr>
+            <a:r>
+              <a:rPr sz="1400" b="1">
+                <a:solidFill>
+                  <a:srgbClr val="1A1A1A"/>
+                </a:solidFill>
+                <a:latin typeface="맑은 고딕"/>
+              </a:rPr>
+              <a:t>■ ② 그러나 포기 기준으로 쓰기엔 약하다 — OOD 판정은 전체의 0.8%뿐</a:t>
+            </a:r>
+          </a:p>
+          <a:p>
+            <a:pPr>
+              <a:spcAft>
+                <a:spcPts val="500"/>
+              </a:spcAft>
+            </a:pPr>
+            <a:r>
+              <a:rPr sz="1400" b="1">
+                <a:solidFill>
+                  <a:srgbClr val="1A1A1A"/>
+                </a:solidFill>
+                <a:latin typeface="맑은 고딕"/>
+              </a:rPr>
+              <a:t>■ ③ 답은 '모델을 좋게 만드는 것' 이었다</a:t>
+            </a:r>
+          </a:p>
+          <a:p>
+            <a:pPr lvl="1">
+              <a:spcAft>
+                <a:spcPts val="500"/>
+              </a:spcAft>
+            </a:pPr>
+            <a:r>
+              <a:rPr sz="1250" b="0">
+                <a:solidFill>
+                  <a:srgbClr val="555A60"/>
+                </a:solidFill>
+                <a:latin typeface="맑은 고딕"/>
+              </a:rPr>
+              <a:t>– OOD 구간 MAE / 정상 구간 MAE = 1.69(A0) → 1.55(A5)</a:t>
+            </a:r>
+          </a:p>
+          <a:p>
+            <a:pPr>
+              <a:spcAft>
+                <a:spcPts val="500"/>
+              </a:spcAft>
+            </a:pPr>
+            <a:r>
+              <a:rPr sz="1400" b="1">
+                <a:solidFill>
+                  <a:srgbClr val="1A1A1A"/>
+                </a:solidFill>
+                <a:latin typeface="맑은 고딕"/>
+              </a:rPr>
+              <a:t>■ ④ OOD 구간을 일부러 더 보게 가중(A6)하면 오히려 악화 — 기각</a:t>
+            </a:r>
+          </a:p>
+          <a:p>
+            <a:pPr lvl="1">
+              <a:spcAft>
+                <a:spcPts val="500"/>
+              </a:spcAft>
+            </a:pPr>
+            <a:r>
+              <a:rPr sz="1250" b="0">
+                <a:solidFill>
+                  <a:srgbClr val="555A60"/>
+                </a:solidFill>
+                <a:latin typeface="맑은 고딕"/>
+              </a:rPr>
+              <a:t>– OOD 구간 MAE 차 +1.099 kw, 95% CI [0.017, 2.541] (0 미포함, 악화 방향)</a:t>
+            </a:r>
+          </a:p>
+        </p:txBody>
+      </p:sp>
+      <p:sp>
+        <p:nvSpPr>
+          <p:cNvPr id="7" name="TextBox 6"/>
+          <p:cNvSpPr txBox="1"/>
+          <p:nvPr/>
+        </p:nvSpPr>
+        <p:spPr>
+          <a:xfrm>
+            <a:off x="594360" y="6263640"/>
+            <a:ext cx="10972800" cy="411480"/>
+          </a:xfrm>
+          <a:prstGeom prst="rect">
+            <a:avLst/>
+          </a:prstGeom>
+          <a:noFill/>
+        </p:spPr>
+        <p:txBody>
+          <a:bodyPr wrap="square">
+            <a:spAutoFit/>
+          </a:bodyPr>
+          <a:lstStyle/>
+          <a:p>
+            <a:r>
+              <a:rPr sz="1100">
+                <a:solidFill>
+                  <a:srgbClr val="C0392B"/>
+                </a:solidFill>
+                <a:latin typeface="맑은 고딕"/>
+              </a:rPr>
+              <a:t>결론: OOD 는 '어디가 약한지' 를 보여주는 진단 도구다. 그 구간을 피하거나 억지로 가중하는 것은 검증 결과 효과가 없었다. 공개한다.</a:t>
+            </a:r>
+          </a:p>
+        </p:txBody>
+      </p:sp>
     </p:spTree>
   </p:cSld>
   <p:clrMapOvr>
@@ -5771,7 +10009,7 @@
                 </a:solidFill>
                 <a:latin typeface="맑은 고딕"/>
               </a:rPr>
-              <a:t>부록 · 신뢰도 밴드별 오차 분포</a:t>
+              <a:t>제4장 · 현장 활용 — 사건당 한 번, 남은 준비시간과 함께</a:t>
             </a:r>
           </a:p>
         </p:txBody>
@@ -5805,35 +10043,483 @@
                 </a:solidFill>
                 <a:latin typeface="맑은 고딕"/>
               </a:rPr>
-              <a:t>analysis/figures/23_baseline_fig3_reliability_bands.png</a:t>
+              <a:t>선행시간이 제도적으로 의미 있는 길이여야 한다</a:t>
             </a:r>
           </a:p>
         </p:txBody>
       </p:sp>
-      <p:pic>
-        <p:nvPicPr>
-          <p:cNvPr id="5" name="Picture 4" descr="23_baseline_fig3_reliability_bands.png"/>
-          <p:cNvPicPr>
-            <a:picLocks noChangeAspect="1"/>
-          </p:cNvPicPr>
+      <p:graphicFrame>
+        <p:nvGraphicFramePr>
+          <p:cNvPr id="5" name="Table 4"/>
+          <p:cNvGraphicFramePr>
+            <a:graphicFrameLocks noGrp="1"/>
+          </p:cNvGraphicFramePr>
           <p:nvPr/>
-        </p:nvPicPr>
-        <p:blipFill>
-          <a:blip r:embed="rId2"/>
-          <a:stretch>
-            <a:fillRect/>
-          </a:stretch>
-        </p:blipFill>
+        </p:nvGraphicFramePr>
+        <p:xfrm>
+          <a:off x="594360" y="1463040"/>
+          <a:ext cx="10972800" cy="1508760"/>
+        </p:xfrm>
+        <a:graphic>
+          <a:graphicData uri="http://schemas.openxmlformats.org/drawingml/2006/table">
+            <a:tbl>
+              <a:tblPr firstRow="1" bandRow="1">
+                <a:tableStyleId>{5C22544A-7EE6-4342-B048-85BDC9FD1C3A}</a:tableStyleId>
+              </a:tblPr>
+              <a:tblGrid>
+                <a:gridCol w="3657600"/>
+                <a:gridCol w="3657600"/>
+                <a:gridCol w="3657600"/>
+              </a:tblGrid>
+              <a:tr h="301752">
+                <a:tc>
+                  <a:txBody>
+                    <a:bodyPr/>
+                    <a:lstStyle/>
+                    <a:p>
+                      <a:r>
+                        <a:rPr sz="1100" b="1">
+                          <a:solidFill>
+                            <a:srgbClr val="FFFFFF"/>
+                          </a:solidFill>
+                          <a:latin typeface="맑은 고딕"/>
+                        </a:rPr>
+                        <a:t>선행(분)</a:t>
+                      </a:r>
+                    </a:p>
+                  </a:txBody>
+                  <a:tcPr>
+                    <a:solidFill>
+                      <a:srgbClr val="1F5C99"/>
+                    </a:solidFill>
+                  </a:tcPr>
+                </a:tc>
+                <a:tc>
+                  <a:txBody>
+                    <a:bodyPr/>
+                    <a:lstStyle/>
+                    <a:p>
+                      <a:r>
+                        <a:rPr sz="1100" b="1">
+                          <a:solidFill>
+                            <a:srgbClr val="FFFFFF"/>
+                          </a:solidFill>
+                          <a:latin typeface="맑은 고딕"/>
+                        </a:rPr>
+                        <a:t>제도·문헌 근거</a:t>
+                      </a:r>
+                    </a:p>
+                  </a:txBody>
+                  <a:tcPr>
+                    <a:solidFill>
+                      <a:srgbClr val="1F5C99"/>
+                    </a:solidFill>
+                  </a:tcPr>
+                </a:tc>
+                <a:tc>
+                  <a:txBody>
+                    <a:bodyPr/>
+                    <a:lstStyle/>
+                    <a:p>
+                      <a:r>
+                        <a:rPr sz="1100" b="1">
+                          <a:solidFill>
+                            <a:srgbClr val="FFFFFF"/>
+                          </a:solidFill>
+                          <a:latin typeface="맑은 고딕"/>
+                        </a:rPr>
+                        <a:t>본 시스템에서의 역할</a:t>
+                      </a:r>
+                    </a:p>
+                  </a:txBody>
+                  <a:tcPr>
+                    <a:solidFill>
+                      <a:srgbClr val="1F5C99"/>
+                    </a:solidFill>
+                  </a:tcPr>
+                </a:tc>
+              </a:tr>
+              <a:tr h="301752">
+                <a:tc>
+                  <a:txBody>
+                    <a:bodyPr/>
+                    <a:lstStyle/>
+                    <a:p>
+                      <a:r>
+                        <a:rPr sz="1100">
+                          <a:solidFill>
+                            <a:srgbClr val="1A1A1A"/>
+                          </a:solidFill>
+                          <a:latin typeface="맑은 고딕"/>
+                        </a:rPr>
+                        <a:t>15</a:t>
+                      </a:r>
+                    </a:p>
+                  </a:txBody>
+                  <a:tcPr>
+                    <a:solidFill>
+                      <a:srgbClr val="FFFFFF"/>
+                    </a:solidFill>
+                  </a:tcPr>
+                </a:tc>
+                <a:tc>
+                  <a:txBody>
+                    <a:bodyPr/>
+                    <a:lstStyle/>
+                    <a:p>
+                      <a:r>
+                        <a:rPr sz="1100">
+                          <a:solidFill>
+                            <a:srgbClr val="1A1A1A"/>
+                          </a:solidFill>
+                          <a:latin typeface="맑은 고딕"/>
+                        </a:rPr>
+                        <a:t>한전 수요시한(디멘드 타임) 15분</a:t>
+                      </a:r>
+                    </a:p>
+                  </a:txBody>
+                  <a:tcPr>
+                    <a:solidFill>
+                      <a:srgbClr val="FFFFFF"/>
+                    </a:solidFill>
+                  </a:tcPr>
+                </a:tc>
+                <a:tc>
+                  <a:txBody>
+                    <a:bodyPr/>
+                    <a:lstStyle/>
+                    <a:p>
+                      <a:r>
+                        <a:rPr sz="1100">
+                          <a:solidFill>
+                            <a:srgbClr val="1A1A1A"/>
+                          </a:solidFill>
+                          <a:latin typeface="맑은 고딕"/>
+                        </a:rPr>
+                        <a:t>기존 제어기가 이미 커버하는 구간. h15 는 '기존 수준 재현' 비교군</a:t>
+                      </a:r>
+                    </a:p>
+                  </a:txBody>
+                  <a:tcPr>
+                    <a:solidFill>
+                      <a:srgbClr val="FFFFFF"/>
+                    </a:solidFill>
+                  </a:tcPr>
+                </a:tc>
+              </a:tr>
+              <a:tr h="301752">
+                <a:tc>
+                  <a:txBody>
+                    <a:bodyPr/>
+                    <a:lstStyle/>
+                    <a:p>
+                      <a:r>
+                        <a:rPr sz="1100">
+                          <a:solidFill>
+                            <a:srgbClr val="1A1A1A"/>
+                          </a:solidFill>
+                          <a:latin typeface="맑은 고딕"/>
+                        </a:rPr>
+                        <a:t>60</a:t>
+                      </a:r>
+                    </a:p>
+                  </a:txBody>
+                  <a:tcPr>
+                    <a:solidFill>
+                      <a:srgbClr val="F2F5F8"/>
+                    </a:solidFill>
+                  </a:tcPr>
+                </a:tc>
+                <a:tc>
+                  <a:txBody>
+                    <a:bodyPr/>
+                    <a:lstStyle/>
+                    <a:p>
+                      <a:r>
+                        <a:rPr sz="1100">
+                          <a:solidFill>
+                            <a:srgbClr val="1A1A1A"/>
+                          </a:solidFill>
+                          <a:latin typeface="맑은 고딕"/>
+                        </a:rPr>
+                        <a:t>KPX 수요자원 거래시장 감축요청 통보 리드타임</a:t>
+                      </a:r>
+                    </a:p>
+                  </a:txBody>
+                  <a:tcPr>
+                    <a:solidFill>
+                      <a:srgbClr val="F2F5F8"/>
+                    </a:solidFill>
+                  </a:tcPr>
+                </a:tc>
+                <a:tc>
+                  <a:txBody>
+                    <a:bodyPr/>
+                    <a:lstStyle/>
+                    <a:p>
+                      <a:r>
+                        <a:rPr sz="1100">
+                          <a:solidFill>
+                            <a:srgbClr val="1A1A1A"/>
+                          </a:solidFill>
+                          <a:latin typeface="맑은 고딕"/>
+                        </a:rPr>
+                        <a:t>h60 = 제도상 표준 통보 리드타임과 일치. 본 시스템의 주 호라이즌</a:t>
+                      </a:r>
+                    </a:p>
+                  </a:txBody>
+                  <a:tcPr>
+                    <a:solidFill>
+                      <a:srgbClr val="F2F5F8"/>
+                    </a:solidFill>
+                  </a:tcPr>
+                </a:tc>
+              </a:tr>
+              <a:tr h="301752">
+                <a:tc>
+                  <a:txBody>
+                    <a:bodyPr/>
+                    <a:lstStyle/>
+                    <a:p>
+                      <a:r>
+                        <a:rPr sz="1100">
+                          <a:solidFill>
+                            <a:srgbClr val="1A1A1A"/>
+                          </a:solidFill>
+                          <a:latin typeface="맑은 고딕"/>
+                        </a:rPr>
+                        <a:t>30</a:t>
+                      </a:r>
+                    </a:p>
+                  </a:txBody>
+                  <a:tcPr>
+                    <a:solidFill>
+                      <a:srgbClr val="FFFFFF"/>
+                    </a:solidFill>
+                  </a:tcPr>
+                </a:tc>
+                <a:tc>
+                  <a:txBody>
+                    <a:bodyPr/>
+                    <a:lstStyle/>
+                    <a:p>
+                      <a:r>
+                        <a:rPr sz="1100">
+                          <a:solidFill>
+                            <a:srgbClr val="1A1A1A"/>
+                          </a:solidFill>
+                          <a:latin typeface="맑은 고딕"/>
+                        </a:rPr>
+                        <a:t>KPX 추가 감축요청 여유(30분)</a:t>
+                      </a:r>
+                    </a:p>
+                  </a:txBody>
+                  <a:tcPr>
+                    <a:solidFill>
+                      <a:srgbClr val="FFFFFF"/>
+                    </a:solidFill>
+                  </a:tcPr>
+                </a:tc>
+                <a:tc>
+                  <a:txBody>
+                    <a:bodyPr/>
+                    <a:lstStyle/>
+                    <a:p>
+                      <a:r>
+                        <a:rPr sz="1100">
+                          <a:solidFill>
+                            <a:srgbClr val="1A1A1A"/>
+                          </a:solidFill>
+                          <a:latin typeface="맑은 고딕"/>
+                        </a:rPr>
+                        <a:t>minimum_lead_minutes=30 의 근거. 이보다 짧으면 제도적 조치 창이 없음</a:t>
+                      </a:r>
+                    </a:p>
+                  </a:txBody>
+                  <a:tcPr>
+                    <a:solidFill>
+                      <a:srgbClr val="FFFFFF"/>
+                    </a:solidFill>
+                  </a:tcPr>
+                </a:tc>
+              </a:tr>
+              <a:tr h="301752">
+                <a:tc>
+                  <a:txBody>
+                    <a:bodyPr/>
+                    <a:lstStyle/>
+                    <a:p>
+                      <a:r>
+                        <a:rPr sz="1100">
+                          <a:solidFill>
+                            <a:srgbClr val="1A1A1A"/>
+                          </a:solidFill>
+                          <a:latin typeface="맑은 고딕"/>
+                        </a:rPr>
+                        <a:t>30</a:t>
+                      </a:r>
+                    </a:p>
+                  </a:txBody>
+                  <a:tcPr>
+                    <a:solidFill>
+                      <a:srgbClr val="F2F5F8"/>
+                    </a:solidFill>
+                  </a:tcPr>
+                </a:tc>
+                <a:tc>
+                  <a:txBody>
+                    <a:bodyPr/>
+                    <a:lstStyle/>
+                    <a:p>
+                      <a:r>
+                        <a:rPr sz="1100">
+                          <a:solidFill>
+                            <a:srgbClr val="1A1A1A"/>
+                          </a:solidFill>
+                          <a:latin typeface="맑은 고딕"/>
+                        </a:rPr>
+                        <a:t>산업 수요관리 스케줄링의 표준 시간슬롯</a:t>
+                      </a:r>
+                    </a:p>
+                  </a:txBody>
+                  <a:tcPr>
+                    <a:solidFill>
+                      <a:srgbClr val="F2F5F8"/>
+                    </a:solidFill>
+                  </a:tcPr>
+                </a:tc>
+                <a:tc>
+                  <a:txBody>
+                    <a:bodyPr/>
+                    <a:lstStyle/>
+                    <a:p>
+                      <a:r>
+                        <a:rPr sz="1100">
+                          <a:solidFill>
+                            <a:srgbClr val="1A1A1A"/>
+                          </a:solidFill>
+                          <a:latin typeface="맑은 고딕"/>
+                        </a:rPr>
+                        <a:t>30분 하한의 문헌적 보강</a:t>
+                      </a:r>
+                    </a:p>
+                  </a:txBody>
+                  <a:tcPr>
+                    <a:solidFill>
+                      <a:srgbClr val="F2F5F8"/>
+                    </a:solidFill>
+                  </a:tcPr>
+                </a:tc>
+              </a:tr>
+            </a:tbl>
+          </a:graphicData>
+        </a:graphic>
+      </p:graphicFrame>
+      <p:sp>
+        <p:nvSpPr>
+          <p:cNvPr id="6" name="TextBox 5"/>
+          <p:cNvSpPr txBox="1"/>
+          <p:nvPr/>
+        </p:nvSpPr>
         <p:spPr>
           <a:xfrm>
-            <a:off x="822960" y="1463040"/>
-            <a:ext cx="10515600" cy="5441925"/>
+            <a:off x="594360" y="3840480"/>
+            <a:ext cx="10972800" cy="2011680"/>
           </a:xfrm>
           <a:prstGeom prst="rect">
             <a:avLst/>
           </a:prstGeom>
+          <a:noFill/>
         </p:spPr>
-      </p:pic>
+        <p:txBody>
+          <a:bodyPr wrap="square">
+            <a:spAutoFit/>
+          </a:bodyPr>
+          <a:lstStyle/>
+          <a:p>
+            <a:pPr>
+              <a:spcAft>
+                <a:spcPts val="500"/>
+              </a:spcAft>
+            </a:pPr>
+            <a:r>
+              <a:rPr sz="1400" b="1">
+                <a:solidFill>
+                  <a:srgbClr val="1A1A1A"/>
+                </a:solidFill>
+                <a:latin typeface="맑은 고딕"/>
+              </a:rPr>
+              <a:t>■ 알림 설계: 다단계 경보를 성과로 내세우지 않는다. 사건당 1건, 내용은 세 가지뿐</a:t>
+            </a:r>
+          </a:p>
+          <a:p>
+            <a:pPr lvl="1">
+              <a:spcAft>
+                <a:spcPts val="500"/>
+              </a:spcAft>
+            </a:pPr>
+            <a:r>
+              <a:rPr sz="1250" b="0">
+                <a:solidFill>
+                  <a:srgbClr val="555A60"/>
+                </a:solidFill>
+                <a:latin typeface="맑은 고딕"/>
+              </a:rPr>
+              <a:t>– ① 고사용량이 처음 시작될 것으로 보이는 시각  ② 지금부터 남은 준비시간(분)  ③ 확신도</a:t>
+            </a:r>
+          </a:p>
+          <a:p>
+            <a:pPr>
+              <a:spcAft>
+                <a:spcPts val="500"/>
+              </a:spcAft>
+            </a:pPr>
+            <a:r>
+              <a:rPr sz="1400" b="1">
+                <a:solidFill>
+                  <a:srgbClr val="1A1A1A"/>
+                </a:solidFill>
+                <a:latin typeface="맑은 고딕"/>
+              </a:rPr>
+              <a:t>■ 근거는 UI 가 아니라 수치다 — 제때 잡은 사건 수, 헛경고로 생기는 확인 부담(분/일)</a:t>
+            </a:r>
+          </a:p>
+        </p:txBody>
+      </p:sp>
+      <p:sp>
+        <p:nvSpPr>
+          <p:cNvPr id="7" name="TextBox 6"/>
+          <p:cNvSpPr txBox="1"/>
+          <p:nvPr/>
+        </p:nvSpPr>
+        <p:spPr>
+          <a:xfrm>
+            <a:off x="594360" y="6263640"/>
+            <a:ext cx="10972800" cy="411480"/>
+          </a:xfrm>
+          <a:prstGeom prst="rect">
+            <a:avLst/>
+          </a:prstGeom>
+          <a:noFill/>
+        </p:spPr>
+        <p:txBody>
+          <a:bodyPr wrap="square">
+            <a:spAutoFit/>
+          </a:bodyPr>
+          <a:lstStyle/>
+          <a:p>
+            <a:r>
+              <a:rPr sz="1100">
+                <a:solidFill>
+                  <a:srgbClr val="555A60"/>
+                </a:solidFill>
+                <a:latin typeface="맑은 고딕"/>
+              </a:rPr>
+              <a:t>설비 단위 조치나 고장 심각도 순위는 제시하지 않는다. 설비 식별자·고장 이력이 데이터에 없다.</a:t>
+            </a:r>
+          </a:p>
+        </p:txBody>
+      </p:sp>
     </p:spTree>
   </p:cSld>
   <p:clrMapOvr>
@@ -5932,7 +10618,7 @@
                 </a:solidFill>
                 <a:latin typeface="맑은 고딕"/>
               </a:rPr>
-              <a:t>부록 · 평가 전용 30일 실측·예측·미탐·오경보</a:t>
+              <a:t>제5장 · 차별성 — 성능·오류분석과 연결되는 것만 주장한다</a:t>
             </a:r>
           </a:p>
         </p:txBody>
@@ -5945,8 +10631,8 @@
         </p:nvSpPr>
         <p:spPr>
           <a:xfrm>
-            <a:off x="566928" y="960120"/>
-            <a:ext cx="11064240" cy="365760"/>
+            <a:off x="594360" y="1417320"/>
+            <a:ext cx="10972800" cy="4846320"/>
           </a:xfrm>
           <a:prstGeom prst="rect">
             <a:avLst/>
@@ -5959,42 +10645,135 @@
           </a:bodyPr>
           <a:lstStyle/>
           <a:p>
+            <a:pPr>
+              <a:spcAft>
+                <a:spcPts val="500"/>
+              </a:spcAft>
+            </a:pPr>
             <a:r>
-              <a:rPr sz="1300">
+              <a:rPr sz="1400" b="1">
+                <a:solidFill>
+                  <a:srgbClr val="1A1A1A"/>
+                </a:solidFill>
+                <a:latin typeface="맑은 고딕"/>
+              </a:rPr>
+              <a:t>■ ① 데이터 자체의 결함을 찾아 평가 설계로 연결했다</a:t>
+            </a:r>
+          </a:p>
+          <a:p>
+            <a:pPr lvl="1">
+              <a:spcAft>
+                <a:spcPts val="500"/>
+              </a:spcAft>
+            </a:pPr>
+            <a:r>
+              <a:rPr sz="1250" b="0">
                 <a:solidFill>
                   <a:srgbClr val="555A60"/>
                 </a:solidFill>
                 <a:latin typeface="맑은 고딕"/>
               </a:rPr>
-              <a:t>analysis/figures/30_timeseries_fn_fp.png</a:t>
+              <a:t>– 합성 중복일 160일(45그룹)이 fold 0·2 의 TRAIN/TEST 에 걸쳐 있음을 확인 → 주 보고 구간을 clean 으로 고정. 부풀려진 성능을 쓰지 않았다</a:t>
+            </a:r>
+          </a:p>
+          <a:p>
+            <a:pPr>
+              <a:spcAft>
+                <a:spcPts val="500"/>
+              </a:spcAft>
+            </a:pPr>
+            <a:r>
+              <a:rPr sz="1400" b="1">
+                <a:solidFill>
+                  <a:srgbClr val="1A1A1A"/>
+                </a:solidFill>
+                <a:latin typeface="맑은 고딕"/>
+              </a:rPr>
+              <a:t>■ ② 라벨 정의를 과금 제도에 묶었다</a:t>
+            </a:r>
+          </a:p>
+          <a:p>
+            <a:pPr lvl="1">
+              <a:spcAft>
+                <a:spcPts val="500"/>
+              </a:spcAft>
+            </a:pPr>
+            <a:r>
+              <a:rPr sz="1250" b="0">
+                <a:solidFill>
+                  <a:srgbClr val="555A60"/>
+                </a:solidFill>
+                <a:latin typeface="맑은 고딕"/>
+              </a:rPr>
+              <a:t>– 15분 = 요금적용전력 측정 단위, 30일 = 검침월. p95 가 모델링 선택임을 숨기지 않고 민감도표로 공개</a:t>
+            </a:r>
+          </a:p>
+          <a:p>
+            <a:pPr>
+              <a:spcAft>
+                <a:spcPts val="500"/>
+              </a:spcAft>
+            </a:pPr>
+            <a:r>
+              <a:rPr sz="1400" b="1">
+                <a:solidFill>
+                  <a:srgbClr val="1A1A1A"/>
+                </a:solidFill>
+                <a:latin typeface="맑은 고딕"/>
+              </a:rPr>
+              <a:t>■ ③ 고사용량 구간을 직접 겨냥한 학습으로 그 구간 오차를 네 호라이즌 모두 25% 안팎 줄였다</a:t>
+            </a:r>
+          </a:p>
+          <a:p>
+            <a:pPr lvl="1">
+              <a:spcAft>
+                <a:spcPts val="500"/>
+              </a:spcAft>
+            </a:pPr>
+            <a:r>
+              <a:rPr sz="1250" b="0">
+                <a:solidFill>
+                  <a:srgbClr val="555A60"/>
+                </a:solidFill>
+                <a:latin typeface="맑은 고딕"/>
+              </a:rPr>
+              <a:t>– h60 고사용량 MAE 20.88 → 15.65 kw. 블록 부트스트랩 CI 로 유의성 확인</a:t>
+            </a:r>
+          </a:p>
+          <a:p>
+            <a:pPr>
+              <a:spcAft>
+                <a:spcPts val="500"/>
+              </a:spcAft>
+            </a:pPr>
+            <a:r>
+              <a:rPr sz="1400" b="1">
+                <a:solidFill>
+                  <a:srgbClr val="1A1A1A"/>
+                </a:solidFill>
+                <a:latin typeface="맑은 고딕"/>
+              </a:rPr>
+              <a:t>■ ④ 실패한 시도를 지웠다가 아니라 남겼다</a:t>
+            </a:r>
+          </a:p>
+          <a:p>
+            <a:pPr lvl="1">
+              <a:spcAft>
+                <a:spcPts val="500"/>
+              </a:spcAft>
+            </a:pPr>
+            <a:r>
+              <a:rPr sz="1250" b="0">
+                <a:solidFill>
+                  <a:srgbClr val="555A60"/>
+                </a:solidFill>
+                <a:latin typeface="맑은 고딕"/>
+              </a:rPr>
+              <a:t>– 운전상태 3분할 모델(V4) 기각 · 2단계 경보 우위 주장 철회 · OOD 가중(A6) 기각 · 외부 공공데이터 게이트 0/20 선택</a:t>
             </a:r>
           </a:p>
         </p:txBody>
       </p:sp>
-      <p:pic>
-        <p:nvPicPr>
-          <p:cNvPr id="5" name="Picture 4" descr="30_timeseries_fn_fp.png"/>
-          <p:cNvPicPr>
-            <a:picLocks noChangeAspect="1"/>
-          </p:cNvPicPr>
-          <p:nvPr/>
-        </p:nvPicPr>
-        <p:blipFill>
-          <a:blip r:embed="rId2"/>
-          <a:stretch>
-            <a:fillRect/>
-          </a:stretch>
-        </p:blipFill>
-        <p:spPr>
-          <a:xfrm>
-            <a:off x="822960" y="1463040"/>
-            <a:ext cx="10515600" cy="5588710"/>
-          </a:xfrm>
-          <a:prstGeom prst="rect">
-            <a:avLst/>
-          </a:prstGeom>
-        </p:spPr>
-      </p:pic>
     </p:spTree>
   </p:cSld>
   <p:clrMapOvr>
@@ -6093,7 +10872,7 @@
                 </a:solidFill>
                 <a:latin typeface="맑은 고딕"/>
               </a:rPr>
-              <a:t>부록 · 운전상태별 경고 성능(분모 병기)</a:t>
+              <a:t>제6장 · 재현성 · 그리고 아직 주장할 수 없는 것</a:t>
             </a:r>
           </a:p>
         </p:txBody>
@@ -6106,8 +10885,8 @@
         </p:nvSpPr>
         <p:spPr>
           <a:xfrm>
-            <a:off x="566928" y="960120"/>
-            <a:ext cx="11064240" cy="365760"/>
+            <a:off x="594360" y="1417320"/>
+            <a:ext cx="10972800" cy="4846320"/>
           </a:xfrm>
           <a:prstGeom prst="rect">
             <a:avLst/>
@@ -6120,42 +10899,185 @@
           </a:bodyPr>
           <a:lstStyle/>
           <a:p>
+            <a:pPr>
+              <a:spcAft>
+                <a:spcPts val="500"/>
+              </a:spcAft>
+            </a:pPr>
             <a:r>
-              <a:rPr sz="1300">
+              <a:rPr sz="1450" b="1">
+                <a:solidFill>
+                  <a:srgbClr val="1A1A1A"/>
+                </a:solidFill>
+                <a:latin typeface="맑은 고딕"/>
+              </a:rPr>
+              <a:t>■ 명령 한 줄로 전처리→학습→추론→결과 생성</a:t>
+            </a:r>
+          </a:p>
+          <a:p>
+            <a:pPr lvl="1">
+              <a:spcAft>
+                <a:spcPts val="500"/>
+              </a:spcAft>
+            </a:pPr>
+            <a:r>
+              <a:rPr sz="1300" b="0">
                 <a:solidFill>
                   <a:srgbClr val="555A60"/>
                 </a:solidFill>
                 <a:latin typeface="맑은 고딕"/>
               </a:rPr>
-              <a:t>analysis/figures/30_fnfp_by_state.png</a:t>
+              <a:t>– python3 analysis/final_baseline/run_baseline.py   (seed 20260926 고정, CPU 전용)</a:t>
+            </a:r>
+          </a:p>
+          <a:p>
+            <a:pPr lvl="1">
+              <a:spcAft>
+                <a:spcPts val="500"/>
+              </a:spcAft>
+            </a:pPr>
+            <a:r>
+              <a:rPr sz="1300" b="0">
+                <a:solidFill>
+                  <a:srgbClr val="555A60"/>
+                </a:solidFill>
+                <a:latin typeface="맑은 고딕"/>
+              </a:rPr>
+              <a:t>– 학습/추론 분리 — joblib 아티팩트 + inference.py 로 학습 코드 없이 예측 생성</a:t>
+            </a:r>
+          </a:p>
+          <a:p>
+            <a:pPr lvl="1">
+              <a:spcAft>
+                <a:spcPts val="500"/>
+              </a:spcAft>
+            </a:pPr>
+            <a:r>
+              <a:rPr sz="1300" b="0">
+                <a:solidFill>
+                  <a:srgbClr val="555A60"/>
+                </a:solidFill>
+                <a:latin typeface="맑은 고딕"/>
+              </a:rPr>
+              <a:t>– requirements.txt · README · 수용테스트 포함</a:t>
+            </a:r>
+          </a:p>
+          <a:p>
+            <a:pPr>
+              <a:spcAft>
+                <a:spcPts val="500"/>
+              </a:spcAft>
+            </a:pPr>
+            <a:r>
+              <a:rPr sz="1450" b="1">
+                <a:solidFill>
+                  <a:srgbClr val="1A1A1A"/>
+                </a:solidFill>
+                <a:latin typeface="맑은 고딕"/>
+              </a:rPr>
+              <a:t>■ 아직 검증되지 않아 주장하지 않는 것</a:t>
+            </a:r>
+          </a:p>
+          <a:p>
+            <a:pPr lvl="1">
+              <a:spcAft>
+                <a:spcPts val="500"/>
+              </a:spcAft>
+            </a:pPr>
+            <a:r>
+              <a:rPr sz="1300" b="0">
+                <a:solidFill>
+                  <a:srgbClr val="555A60"/>
+                </a:solidFill>
+                <a:latin typeface="맑은 고딕"/>
+              </a:rPr>
+              <a:t>– 절감액(원) — 계약전력·요금 조건 미확인</a:t>
+            </a:r>
+          </a:p>
+          <a:p>
+            <a:pPr lvl="1">
+              <a:spcAft>
+                <a:spcPts val="500"/>
+              </a:spcAft>
+            </a:pPr>
+            <a:r>
+              <a:rPr sz="1300" b="0">
+                <a:solidFill>
+                  <a:srgbClr val="555A60"/>
+                </a:solidFill>
+                <a:latin typeface="맑은 고딕"/>
+              </a:rPr>
+              <a:t>– 설비 단위 원인·조치 — 설비 식별자 없음</a:t>
+            </a:r>
+          </a:p>
+          <a:p>
+            <a:pPr lvl="1">
+              <a:spcAft>
+                <a:spcPts val="500"/>
+              </a:spcAft>
+            </a:pPr>
+            <a:r>
+              <a:rPr sz="1300" b="0">
+                <a:solidFill>
+                  <a:srgbClr val="555A60"/>
+                </a:solidFill>
+                <a:latin typeface="맑은 고딕"/>
+              </a:rPr>
+              <a:t>– 고사용량 구간 예측구간 적중률 0.234 — 목표 0.90 에 크게 미달. 공개하고 다음 과제로 둔다</a:t>
+            </a:r>
+          </a:p>
+          <a:p>
+            <a:pPr lvl="1">
+              <a:spcAft>
+                <a:spcPts val="500"/>
+              </a:spcAft>
+            </a:pPr>
+            <a:r>
+              <a:rPr sz="1300" b="0">
+                <a:solidFill>
+                  <a:srgbClr val="555A60"/>
+                </a:solidFill>
+                <a:latin typeface="맑은 고딕"/>
+              </a:rPr>
+              <a:t>– 최초 시작 시각 예측 — 설계만 있고 검증 전</a:t>
             </a:r>
           </a:p>
         </p:txBody>
       </p:sp>
-      <p:pic>
-        <p:nvPicPr>
-          <p:cNvPr id="5" name="Picture 4" descr="30_fnfp_by_state.png"/>
-          <p:cNvPicPr>
-            <a:picLocks noChangeAspect="1"/>
-          </p:cNvPicPr>
+      <p:sp>
+        <p:nvSpPr>
+          <p:cNvPr id="5" name="TextBox 4"/>
+          <p:cNvSpPr txBox="1"/>
           <p:nvPr/>
-        </p:nvPicPr>
-        <p:blipFill>
-          <a:blip r:embed="rId2"/>
-          <a:stretch>
-            <a:fillRect/>
-          </a:stretch>
-        </p:blipFill>
+        </p:nvSpPr>
         <p:spPr>
           <a:xfrm>
-            <a:off x="822960" y="1463040"/>
-            <a:ext cx="10515600" cy="3078067"/>
+            <a:off x="594360" y="6263640"/>
+            <a:ext cx="10972800" cy="411480"/>
           </a:xfrm>
           <a:prstGeom prst="rect">
             <a:avLst/>
           </a:prstGeom>
+          <a:noFill/>
         </p:spPr>
-      </p:pic>
+        <p:txBody>
+          <a:bodyPr wrap="square">
+            <a:spAutoFit/>
+          </a:bodyPr>
+          <a:lstStyle/>
+          <a:p>
+            <a:r>
+              <a:rPr sz="1100">
+                <a:solidFill>
+                  <a:srgbClr val="1F5C99"/>
+                </a:solidFill>
+                <a:latin typeface="맑은 고딕"/>
+              </a:rPr>
+              <a:t>모든 수치는 analysis/tables/*.csv 에서 직접 읽어 이 장표를 생성했다. 손으로 옮겨 적지 않았다.</a:t>
+            </a:r>
+          </a:p>
+        </p:txBody>
+      </p:sp>
     </p:spTree>
   </p:cSld>
   <p:clrMapOvr>
@@ -6254,7 +11176,7 @@
                 </a:solidFill>
                 <a:latin typeface="맑은 고딕"/>
               </a:rPr>
-              <a:t>부록 · 고사용량 초과확률의 보정 곡선</a:t>
+              <a:t>부록 · 예측값과 보정된 예측구간</a:t>
             </a:r>
           </a:p>
         </p:txBody>
@@ -6288,14 +11210,14 @@
                 </a:solidFill>
                 <a:latin typeface="맑은 고딕"/>
               </a:rPr>
-              <a:t>analysis/figures/28_peak_probability.png</a:t>
+              <a:t>analysis/figures/23_baseline_fig2_forecast_interval.png</a:t>
             </a:r>
           </a:p>
         </p:txBody>
       </p:sp>
       <p:pic>
         <p:nvPicPr>
-          <p:cNvPr id="5" name="Picture 4" descr="28_peak_probability.png"/>
+          <p:cNvPr id="5" name="Picture 4" descr="23_baseline_fig2_forecast_interval.png"/>
           <p:cNvPicPr>
             <a:picLocks noChangeAspect="1"/>
           </p:cNvPicPr>
@@ -6310,7 +11232,168 @@
         <p:spPr>
           <a:xfrm>
             <a:off x="822960" y="1463040"/>
-            <a:ext cx="10515600" cy="3641558"/>
+            <a:ext cx="10515600" cy="3200400"/>
+          </a:xfrm>
+          <a:prstGeom prst="rect">
+            <a:avLst/>
+          </a:prstGeom>
+        </p:spPr>
+      </p:pic>
+    </p:spTree>
+  </p:cSld>
+  <p:clrMapOvr>
+    <a:masterClrMapping/>
+  </p:clrMapOvr>
+</p:sld>
+</file>
+
+<file path=ppt/slides/slide19.xml><?xml version="1.0" encoding="utf-8"?>
+<p:sld xmlns:a="http://schemas.openxmlformats.org/drawingml/2006/main" xmlns:p="http://schemas.openxmlformats.org/presentationml/2006/main" xmlns:r="http://schemas.openxmlformats.org/officeDocument/2006/relationships">
+  <p:cSld>
+    <p:bg>
+      <p:bgPr>
+        <a:solidFill>
+          <a:srgbClr val="FFFFFF"/>
+        </a:solidFill>
+        <a:effectLst/>
+      </p:bgPr>
+    </p:bg>
+    <p:spTree>
+      <p:nvGrpSpPr>
+        <p:cNvPr id="1" name=""/>
+        <p:cNvGrpSpPr/>
+        <p:nvPr/>
+      </p:nvGrpSpPr>
+      <p:grpSpPr/>
+      <p:sp>
+        <p:nvSpPr>
+          <p:cNvPr id="2" name="Rectangle 1"/>
+          <p:cNvSpPr/>
+          <p:nvPr/>
+        </p:nvSpPr>
+        <p:spPr>
+          <a:xfrm>
+            <a:off x="0" y="0"/>
+            <a:ext cx="12191695" cy="82296"/>
+          </a:xfrm>
+          <a:prstGeom prst="rect">
+            <a:avLst/>
+          </a:prstGeom>
+          <a:solidFill>
+            <a:srgbClr val="1F5C99"/>
+          </a:solidFill>
+          <a:ln>
+            <a:noFill/>
+          </a:ln>
+        </p:spPr>
+        <p:style>
+          <a:lnRef idx="1">
+            <a:schemeClr val="accent1"/>
+          </a:lnRef>
+          <a:fillRef idx="3">
+            <a:schemeClr val="accent1"/>
+          </a:fillRef>
+          <a:effectRef idx="2">
+            <a:schemeClr val="accent1"/>
+          </a:effectRef>
+          <a:fontRef idx="minor">
+            <a:schemeClr val="lt1"/>
+          </a:fontRef>
+        </p:style>
+        <p:txBody>
+          <a:bodyPr rtlCol="0" anchor="ctr"/>
+          <a:lstStyle/>
+          <a:p>
+            <a:pPr algn="ctr"/>
+          </a:p>
+        </p:txBody>
+      </p:sp>
+      <p:sp>
+        <p:nvSpPr>
+          <p:cNvPr id="3" name="TextBox 2"/>
+          <p:cNvSpPr txBox="1"/>
+          <p:nvPr/>
+        </p:nvSpPr>
+        <p:spPr>
+          <a:xfrm>
+            <a:off x="548640" y="292608"/>
+            <a:ext cx="11064240" cy="685800"/>
+          </a:xfrm>
+          <a:prstGeom prst="rect">
+            <a:avLst/>
+          </a:prstGeom>
+          <a:noFill/>
+        </p:spPr>
+        <p:txBody>
+          <a:bodyPr wrap="square">
+            <a:spAutoFit/>
+          </a:bodyPr>
+          <a:lstStyle/>
+          <a:p>
+            <a:r>
+              <a:rPr sz="2800" b="1">
+                <a:solidFill>
+                  <a:srgbClr val="1A1A1A"/>
+                </a:solidFill>
+                <a:latin typeface="맑은 고딕"/>
+              </a:rPr>
+              <a:t>부록 · 신뢰도 밴드별 오차 분포</a:t>
+            </a:r>
+          </a:p>
+        </p:txBody>
+      </p:sp>
+      <p:sp>
+        <p:nvSpPr>
+          <p:cNvPr id="4" name="TextBox 3"/>
+          <p:cNvSpPr txBox="1"/>
+          <p:nvPr/>
+        </p:nvSpPr>
+        <p:spPr>
+          <a:xfrm>
+            <a:off x="566928" y="960120"/>
+            <a:ext cx="11064240" cy="365760"/>
+          </a:xfrm>
+          <a:prstGeom prst="rect">
+            <a:avLst/>
+          </a:prstGeom>
+          <a:noFill/>
+        </p:spPr>
+        <p:txBody>
+          <a:bodyPr wrap="square">
+            <a:spAutoFit/>
+          </a:bodyPr>
+          <a:lstStyle/>
+          <a:p>
+            <a:r>
+              <a:rPr sz="1300">
+                <a:solidFill>
+                  <a:srgbClr val="555A60"/>
+                </a:solidFill>
+                <a:latin typeface="맑은 고딕"/>
+              </a:rPr>
+              <a:t>analysis/figures/23_baseline_fig3_reliability_bands.png</a:t>
+            </a:r>
+          </a:p>
+        </p:txBody>
+      </p:sp>
+      <p:pic>
+        <p:nvPicPr>
+          <p:cNvPr id="5" name="Picture 4" descr="23_baseline_fig3_reliability_bands.png"/>
+          <p:cNvPicPr>
+            <a:picLocks noChangeAspect="1"/>
+          </p:cNvPicPr>
+          <p:nvPr/>
+        </p:nvPicPr>
+        <p:blipFill>
+          <a:blip r:embed="rId2"/>
+          <a:stretch>
+            <a:fillRect/>
+          </a:stretch>
+        </p:blipFill>
+        <p:spPr>
+          <a:xfrm>
+            <a:off x="822960" y="1463040"/>
+            <a:ext cx="10515600" cy="5441925"/>
           </a:xfrm>
           <a:prstGeom prst="rect">
             <a:avLst/>
@@ -6597,6 +11680,489 @@
 </p:sld>
 </file>
 
+<file path=ppt/slides/slide20.xml><?xml version="1.0" encoding="utf-8"?>
+<p:sld xmlns:a="http://schemas.openxmlformats.org/drawingml/2006/main" xmlns:p="http://schemas.openxmlformats.org/presentationml/2006/main" xmlns:r="http://schemas.openxmlformats.org/officeDocument/2006/relationships">
+  <p:cSld>
+    <p:bg>
+      <p:bgPr>
+        <a:solidFill>
+          <a:srgbClr val="FFFFFF"/>
+        </a:solidFill>
+        <a:effectLst/>
+      </p:bgPr>
+    </p:bg>
+    <p:spTree>
+      <p:nvGrpSpPr>
+        <p:cNvPr id="1" name=""/>
+        <p:cNvGrpSpPr/>
+        <p:nvPr/>
+      </p:nvGrpSpPr>
+      <p:grpSpPr/>
+      <p:sp>
+        <p:nvSpPr>
+          <p:cNvPr id="2" name="Rectangle 1"/>
+          <p:cNvSpPr/>
+          <p:nvPr/>
+        </p:nvSpPr>
+        <p:spPr>
+          <a:xfrm>
+            <a:off x="0" y="0"/>
+            <a:ext cx="12191695" cy="82296"/>
+          </a:xfrm>
+          <a:prstGeom prst="rect">
+            <a:avLst/>
+          </a:prstGeom>
+          <a:solidFill>
+            <a:srgbClr val="1F5C99"/>
+          </a:solidFill>
+          <a:ln>
+            <a:noFill/>
+          </a:ln>
+        </p:spPr>
+        <p:style>
+          <a:lnRef idx="1">
+            <a:schemeClr val="accent1"/>
+          </a:lnRef>
+          <a:fillRef idx="3">
+            <a:schemeClr val="accent1"/>
+          </a:fillRef>
+          <a:effectRef idx="2">
+            <a:schemeClr val="accent1"/>
+          </a:effectRef>
+          <a:fontRef idx="minor">
+            <a:schemeClr val="lt1"/>
+          </a:fontRef>
+        </p:style>
+        <p:txBody>
+          <a:bodyPr rtlCol="0" anchor="ctr"/>
+          <a:lstStyle/>
+          <a:p>
+            <a:pPr algn="ctr"/>
+          </a:p>
+        </p:txBody>
+      </p:sp>
+      <p:sp>
+        <p:nvSpPr>
+          <p:cNvPr id="3" name="TextBox 2"/>
+          <p:cNvSpPr txBox="1"/>
+          <p:nvPr/>
+        </p:nvSpPr>
+        <p:spPr>
+          <a:xfrm>
+            <a:off x="548640" y="292608"/>
+            <a:ext cx="11064240" cy="685800"/>
+          </a:xfrm>
+          <a:prstGeom prst="rect">
+            <a:avLst/>
+          </a:prstGeom>
+          <a:noFill/>
+        </p:spPr>
+        <p:txBody>
+          <a:bodyPr wrap="square">
+            <a:spAutoFit/>
+          </a:bodyPr>
+          <a:lstStyle/>
+          <a:p>
+            <a:r>
+              <a:rPr sz="2800" b="1">
+                <a:solidFill>
+                  <a:srgbClr val="1A1A1A"/>
+                </a:solidFill>
+                <a:latin typeface="맑은 고딕"/>
+              </a:rPr>
+              <a:t>부록 · 평가 전용 30일 실측·예측·미탐·오경보</a:t>
+            </a:r>
+          </a:p>
+        </p:txBody>
+      </p:sp>
+      <p:sp>
+        <p:nvSpPr>
+          <p:cNvPr id="4" name="TextBox 3"/>
+          <p:cNvSpPr txBox="1"/>
+          <p:nvPr/>
+        </p:nvSpPr>
+        <p:spPr>
+          <a:xfrm>
+            <a:off x="566928" y="960120"/>
+            <a:ext cx="11064240" cy="365760"/>
+          </a:xfrm>
+          <a:prstGeom prst="rect">
+            <a:avLst/>
+          </a:prstGeom>
+          <a:noFill/>
+        </p:spPr>
+        <p:txBody>
+          <a:bodyPr wrap="square">
+            <a:spAutoFit/>
+          </a:bodyPr>
+          <a:lstStyle/>
+          <a:p>
+            <a:r>
+              <a:rPr sz="1300">
+                <a:solidFill>
+                  <a:srgbClr val="555A60"/>
+                </a:solidFill>
+                <a:latin typeface="맑은 고딕"/>
+              </a:rPr>
+              <a:t>analysis/figures/30_timeseries_fn_fp.png</a:t>
+            </a:r>
+          </a:p>
+        </p:txBody>
+      </p:sp>
+      <p:pic>
+        <p:nvPicPr>
+          <p:cNvPr id="5" name="Picture 4" descr="30_timeseries_fn_fp.png"/>
+          <p:cNvPicPr>
+            <a:picLocks noChangeAspect="1"/>
+          </p:cNvPicPr>
+          <p:nvPr/>
+        </p:nvPicPr>
+        <p:blipFill>
+          <a:blip r:embed="rId2"/>
+          <a:stretch>
+            <a:fillRect/>
+          </a:stretch>
+        </p:blipFill>
+        <p:spPr>
+          <a:xfrm>
+            <a:off x="822960" y="1463040"/>
+            <a:ext cx="10515600" cy="5588710"/>
+          </a:xfrm>
+          <a:prstGeom prst="rect">
+            <a:avLst/>
+          </a:prstGeom>
+        </p:spPr>
+      </p:pic>
+    </p:spTree>
+  </p:cSld>
+  <p:clrMapOvr>
+    <a:masterClrMapping/>
+  </p:clrMapOvr>
+</p:sld>
+</file>
+
+<file path=ppt/slides/slide21.xml><?xml version="1.0" encoding="utf-8"?>
+<p:sld xmlns:a="http://schemas.openxmlformats.org/drawingml/2006/main" xmlns:p="http://schemas.openxmlformats.org/presentationml/2006/main" xmlns:r="http://schemas.openxmlformats.org/officeDocument/2006/relationships">
+  <p:cSld>
+    <p:bg>
+      <p:bgPr>
+        <a:solidFill>
+          <a:srgbClr val="FFFFFF"/>
+        </a:solidFill>
+        <a:effectLst/>
+      </p:bgPr>
+    </p:bg>
+    <p:spTree>
+      <p:nvGrpSpPr>
+        <p:cNvPr id="1" name=""/>
+        <p:cNvGrpSpPr/>
+        <p:nvPr/>
+      </p:nvGrpSpPr>
+      <p:grpSpPr/>
+      <p:sp>
+        <p:nvSpPr>
+          <p:cNvPr id="2" name="Rectangle 1"/>
+          <p:cNvSpPr/>
+          <p:nvPr/>
+        </p:nvSpPr>
+        <p:spPr>
+          <a:xfrm>
+            <a:off x="0" y="0"/>
+            <a:ext cx="12191695" cy="82296"/>
+          </a:xfrm>
+          <a:prstGeom prst="rect">
+            <a:avLst/>
+          </a:prstGeom>
+          <a:solidFill>
+            <a:srgbClr val="1F5C99"/>
+          </a:solidFill>
+          <a:ln>
+            <a:noFill/>
+          </a:ln>
+        </p:spPr>
+        <p:style>
+          <a:lnRef idx="1">
+            <a:schemeClr val="accent1"/>
+          </a:lnRef>
+          <a:fillRef idx="3">
+            <a:schemeClr val="accent1"/>
+          </a:fillRef>
+          <a:effectRef idx="2">
+            <a:schemeClr val="accent1"/>
+          </a:effectRef>
+          <a:fontRef idx="minor">
+            <a:schemeClr val="lt1"/>
+          </a:fontRef>
+        </p:style>
+        <p:txBody>
+          <a:bodyPr rtlCol="0" anchor="ctr"/>
+          <a:lstStyle/>
+          <a:p>
+            <a:pPr algn="ctr"/>
+          </a:p>
+        </p:txBody>
+      </p:sp>
+      <p:sp>
+        <p:nvSpPr>
+          <p:cNvPr id="3" name="TextBox 2"/>
+          <p:cNvSpPr txBox="1"/>
+          <p:nvPr/>
+        </p:nvSpPr>
+        <p:spPr>
+          <a:xfrm>
+            <a:off x="548640" y="292608"/>
+            <a:ext cx="11064240" cy="685800"/>
+          </a:xfrm>
+          <a:prstGeom prst="rect">
+            <a:avLst/>
+          </a:prstGeom>
+          <a:noFill/>
+        </p:spPr>
+        <p:txBody>
+          <a:bodyPr wrap="square">
+            <a:spAutoFit/>
+          </a:bodyPr>
+          <a:lstStyle/>
+          <a:p>
+            <a:r>
+              <a:rPr sz="2800" b="1">
+                <a:solidFill>
+                  <a:srgbClr val="1A1A1A"/>
+                </a:solidFill>
+                <a:latin typeface="맑은 고딕"/>
+              </a:rPr>
+              <a:t>부록 · 운전상태별 경고 성능(분모 병기)</a:t>
+            </a:r>
+          </a:p>
+        </p:txBody>
+      </p:sp>
+      <p:sp>
+        <p:nvSpPr>
+          <p:cNvPr id="4" name="TextBox 3"/>
+          <p:cNvSpPr txBox="1"/>
+          <p:nvPr/>
+        </p:nvSpPr>
+        <p:spPr>
+          <a:xfrm>
+            <a:off x="566928" y="960120"/>
+            <a:ext cx="11064240" cy="365760"/>
+          </a:xfrm>
+          <a:prstGeom prst="rect">
+            <a:avLst/>
+          </a:prstGeom>
+          <a:noFill/>
+        </p:spPr>
+        <p:txBody>
+          <a:bodyPr wrap="square">
+            <a:spAutoFit/>
+          </a:bodyPr>
+          <a:lstStyle/>
+          <a:p>
+            <a:r>
+              <a:rPr sz="1300">
+                <a:solidFill>
+                  <a:srgbClr val="555A60"/>
+                </a:solidFill>
+                <a:latin typeface="맑은 고딕"/>
+              </a:rPr>
+              <a:t>analysis/figures/30_fnfp_by_state.png</a:t>
+            </a:r>
+          </a:p>
+        </p:txBody>
+      </p:sp>
+      <p:pic>
+        <p:nvPicPr>
+          <p:cNvPr id="5" name="Picture 4" descr="30_fnfp_by_state.png"/>
+          <p:cNvPicPr>
+            <a:picLocks noChangeAspect="1"/>
+          </p:cNvPicPr>
+          <p:nvPr/>
+        </p:nvPicPr>
+        <p:blipFill>
+          <a:blip r:embed="rId2"/>
+          <a:stretch>
+            <a:fillRect/>
+          </a:stretch>
+        </p:blipFill>
+        <p:spPr>
+          <a:xfrm>
+            <a:off x="822960" y="1463040"/>
+            <a:ext cx="10515600" cy="3078067"/>
+          </a:xfrm>
+          <a:prstGeom prst="rect">
+            <a:avLst/>
+          </a:prstGeom>
+        </p:spPr>
+      </p:pic>
+    </p:spTree>
+  </p:cSld>
+  <p:clrMapOvr>
+    <a:masterClrMapping/>
+  </p:clrMapOvr>
+</p:sld>
+</file>
+
+<file path=ppt/slides/slide22.xml><?xml version="1.0" encoding="utf-8"?>
+<p:sld xmlns:a="http://schemas.openxmlformats.org/drawingml/2006/main" xmlns:p="http://schemas.openxmlformats.org/presentationml/2006/main" xmlns:r="http://schemas.openxmlformats.org/officeDocument/2006/relationships">
+  <p:cSld>
+    <p:bg>
+      <p:bgPr>
+        <a:solidFill>
+          <a:srgbClr val="FFFFFF"/>
+        </a:solidFill>
+        <a:effectLst/>
+      </p:bgPr>
+    </p:bg>
+    <p:spTree>
+      <p:nvGrpSpPr>
+        <p:cNvPr id="1" name=""/>
+        <p:cNvGrpSpPr/>
+        <p:nvPr/>
+      </p:nvGrpSpPr>
+      <p:grpSpPr/>
+      <p:sp>
+        <p:nvSpPr>
+          <p:cNvPr id="2" name="Rectangle 1"/>
+          <p:cNvSpPr/>
+          <p:nvPr/>
+        </p:nvSpPr>
+        <p:spPr>
+          <a:xfrm>
+            <a:off x="0" y="0"/>
+            <a:ext cx="12191695" cy="82296"/>
+          </a:xfrm>
+          <a:prstGeom prst="rect">
+            <a:avLst/>
+          </a:prstGeom>
+          <a:solidFill>
+            <a:srgbClr val="1F5C99"/>
+          </a:solidFill>
+          <a:ln>
+            <a:noFill/>
+          </a:ln>
+        </p:spPr>
+        <p:style>
+          <a:lnRef idx="1">
+            <a:schemeClr val="accent1"/>
+          </a:lnRef>
+          <a:fillRef idx="3">
+            <a:schemeClr val="accent1"/>
+          </a:fillRef>
+          <a:effectRef idx="2">
+            <a:schemeClr val="accent1"/>
+          </a:effectRef>
+          <a:fontRef idx="minor">
+            <a:schemeClr val="lt1"/>
+          </a:fontRef>
+        </p:style>
+        <p:txBody>
+          <a:bodyPr rtlCol="0" anchor="ctr"/>
+          <a:lstStyle/>
+          <a:p>
+            <a:pPr algn="ctr"/>
+          </a:p>
+        </p:txBody>
+      </p:sp>
+      <p:sp>
+        <p:nvSpPr>
+          <p:cNvPr id="3" name="TextBox 2"/>
+          <p:cNvSpPr txBox="1"/>
+          <p:nvPr/>
+        </p:nvSpPr>
+        <p:spPr>
+          <a:xfrm>
+            <a:off x="548640" y="292608"/>
+            <a:ext cx="11064240" cy="685800"/>
+          </a:xfrm>
+          <a:prstGeom prst="rect">
+            <a:avLst/>
+          </a:prstGeom>
+          <a:noFill/>
+        </p:spPr>
+        <p:txBody>
+          <a:bodyPr wrap="square">
+            <a:spAutoFit/>
+          </a:bodyPr>
+          <a:lstStyle/>
+          <a:p>
+            <a:r>
+              <a:rPr sz="2800" b="1">
+                <a:solidFill>
+                  <a:srgbClr val="1A1A1A"/>
+                </a:solidFill>
+                <a:latin typeface="맑은 고딕"/>
+              </a:rPr>
+              <a:t>부록 · 고사용량 초과확률의 보정 곡선</a:t>
+            </a:r>
+          </a:p>
+        </p:txBody>
+      </p:sp>
+      <p:sp>
+        <p:nvSpPr>
+          <p:cNvPr id="4" name="TextBox 3"/>
+          <p:cNvSpPr txBox="1"/>
+          <p:nvPr/>
+        </p:nvSpPr>
+        <p:spPr>
+          <a:xfrm>
+            <a:off x="566928" y="960120"/>
+            <a:ext cx="11064240" cy="365760"/>
+          </a:xfrm>
+          <a:prstGeom prst="rect">
+            <a:avLst/>
+          </a:prstGeom>
+          <a:noFill/>
+        </p:spPr>
+        <p:txBody>
+          <a:bodyPr wrap="square">
+            <a:spAutoFit/>
+          </a:bodyPr>
+          <a:lstStyle/>
+          <a:p>
+            <a:r>
+              <a:rPr sz="1300">
+                <a:solidFill>
+                  <a:srgbClr val="555A60"/>
+                </a:solidFill>
+                <a:latin typeface="맑은 고딕"/>
+              </a:rPr>
+              <a:t>analysis/figures/28_peak_probability.png</a:t>
+            </a:r>
+          </a:p>
+        </p:txBody>
+      </p:sp>
+      <p:pic>
+        <p:nvPicPr>
+          <p:cNvPr id="5" name="Picture 4" descr="28_peak_probability.png"/>
+          <p:cNvPicPr>
+            <a:picLocks noChangeAspect="1"/>
+          </p:cNvPicPr>
+          <p:nvPr/>
+        </p:nvPicPr>
+        <p:blipFill>
+          <a:blip r:embed="rId2"/>
+          <a:stretch>
+            <a:fillRect/>
+          </a:stretch>
+        </p:blipFill>
+        <p:spPr>
+          <a:xfrm>
+            <a:off x="822960" y="1463040"/>
+            <a:ext cx="10515600" cy="3641558"/>
+          </a:xfrm>
+          <a:prstGeom prst="rect">
+            <a:avLst/>
+          </a:prstGeom>
+        </p:spPr>
+      </p:pic>
+    </p:spTree>
+  </p:cSld>
+  <p:clrMapOvr>
+    <a:masterClrMapping/>
+  </p:clrMapOvr>
+</p:sld>
+</file>
+
 <file path=ppt/slides/slide3.xml><?xml version="1.0" encoding="utf-8"?>
 <p:sld xmlns:a="http://schemas.openxmlformats.org/drawingml/2006/main" xmlns:p="http://schemas.openxmlformats.org/presentationml/2006/main" xmlns:r="http://schemas.openxmlformats.org/officeDocument/2006/relationships">
   <p:cSld>
@@ -13470,7 +19036,7 @@
                 </a:solidFill>
                 <a:latin typeface="맑은 고딕"/>
               </a:rPr>
-              <a:t>제3장 · 오류분석 — 어디서 잘 되고 어디서 깨지는가</a:t>
+              <a:t>제2장 · 모델 비교 ① 수치 예측 — 베이스라인 포함 6종</a:t>
             </a:r>
           </a:p>
         </p:txBody>
@@ -13504,7 +19070,7 @@
                 </a:solidFill>
                 <a:latin typeface="맑은 고딕"/>
               </a:rPr>
-              <a:t>전체 평균이 아니라 조건별로 쪼갠다 (h60)</a:t>
+              <a:t>전부 동일 조건(동일 fold·적합집합·v2 레시피). 전 구간 OOF, h60</a:t>
             </a:r>
           </a:p>
         </p:txBody>
@@ -13519,7 +19085,7 @@
         </p:nvGraphicFramePr>
         <p:xfrm>
           <a:off x="594360" y="1463040"/>
-          <a:ext cx="10607040" cy="2414016"/>
+          <a:ext cx="10972800" cy="2112264"/>
         </p:xfrm>
         <a:graphic>
           <a:graphicData uri="http://schemas.openxmlformats.org/drawingml/2006/table">
@@ -13528,12 +19094,12 @@
                 <a:tableStyleId>{5C22544A-7EE6-4342-B048-85BDC9FD1C3A}</a:tableStyleId>
               </a:tblPr>
               <a:tblGrid>
-                <a:gridCol w="1767840"/>
-                <a:gridCol w="1767840"/>
-                <a:gridCol w="1767840"/>
-                <a:gridCol w="1767840"/>
-                <a:gridCol w="1767840"/>
-                <a:gridCol w="1767840"/>
+                <a:gridCol w="1828800"/>
+                <a:gridCol w="1828800"/>
+                <a:gridCol w="1828800"/>
+                <a:gridCol w="1828800"/>
+                <a:gridCol w="1828800"/>
+                <a:gridCol w="1828800"/>
               </a:tblGrid>
               <a:tr h="301752">
                 <a:tc>
@@ -13548,7 +19114,7 @@
                           </a:solidFill>
                           <a:latin typeface="맑은 고딕"/>
                         </a:rPr>
-                        <a:t>조건</a:t>
+                        <a:t>모델 (h60)</a:t>
                       </a:r>
                     </a:p>
                   </a:txBody>
@@ -13570,7 +19136,7 @@
                           </a:solidFill>
                           <a:latin typeface="맑은 고딕"/>
                         </a:rPr>
-                        <a:t>표본 수</a:t>
+                        <a:t>MAE</a:t>
                       </a:r>
                     </a:p>
                   </a:txBody>
@@ -13592,7 +19158,7 @@
                           </a:solidFill>
                           <a:latin typeface="맑은 고딕"/>
                         </a:rPr>
-                        <a:t>A0 MAE</a:t>
+                        <a:t>RMSE</a:t>
                       </a:r>
                     </a:p>
                   </a:txBody>
@@ -13614,7 +19180,7 @@
                           </a:solidFill>
                           <a:latin typeface="맑은 고딕"/>
                         </a:rPr>
-                        <a:t>A5 MAE</a:t>
+                        <a:t>고사용량 MAE</a:t>
                       </a:r>
                     </a:p>
                   </a:txBody>
@@ -13636,7 +19202,7 @@
                           </a:solidFill>
                           <a:latin typeface="맑은 고딕"/>
                         </a:rPr>
-                        <a:t>A0 전체대비 배율</a:t>
+                        <a:t>고사용량 편향</a:t>
                       </a:r>
                     </a:p>
                   </a:txBody>
@@ -13658,7 +19224,7 @@
                           </a:solidFill>
                           <a:latin typeface="맑은 고딕"/>
                         </a:rPr>
-                        <a:t>A5 전체대비 배율</a:t>
+                        <a:t>오차 p95</a:t>
                       </a:r>
                     </a:p>
                   </a:txBody>
@@ -13682,7 +19248,7 @@
                           </a:solidFill>
                           <a:latin typeface="맑은 고딕"/>
                         </a:rPr>
-                        <a:t>12~18시</a:t>
+                        <a:t>직전값 지속 (베이스라인)</a:t>
                       </a:r>
                     </a:p>
                   </a:txBody>
@@ -13704,7 +19270,7 @@
                           </a:solidFill>
                           <a:latin typeface="맑은 고딕"/>
                         </a:rPr>
-                        <a:t>4,995.000</a:t>
+                        <a:t>17.271</a:t>
                       </a:r>
                     </a:p>
                   </a:txBody>
@@ -13726,7 +19292,7 @@
                           </a:solidFill>
                           <a:latin typeface="맑은 고딕"/>
                         </a:rPr>
-                        <a:t>10.237</a:t>
+                        <a:t>28.142</a:t>
                       </a:r>
                     </a:p>
                   </a:txBody>
@@ -13748,7 +19314,7 @@
                           </a:solidFill>
                           <a:latin typeface="맑은 고딕"/>
                         </a:rPr>
-                        <a:t>8.242</a:t>
+                        <a:t>36.592</a:t>
                       </a:r>
                     </a:p>
                   </a:txBody>
@@ -13770,7 +19336,7 @@
                           </a:solidFill>
                           <a:latin typeface="맑은 고딕"/>
                         </a:rPr>
-                        <a:t>1.083</a:t>
+                        <a:t>34.308</a:t>
                       </a:r>
                     </a:p>
                   </a:txBody>
@@ -13792,7 +19358,7 @@
                           </a:solidFill>
                           <a:latin typeface="맑은 고딕"/>
                         </a:rPr>
-                        <a:t>1.024</a:t>
+                        <a:t>64.450</a:t>
                       </a:r>
                     </a:p>
                   </a:txBody>
@@ -13816,7 +19382,7 @@
                           </a:solidFill>
                           <a:latin typeface="맑은 고딕"/>
                         </a:rPr>
-                        <a:t>고사용량 구간만</a:t>
+                        <a:t>Ridge (베이스라인)</a:t>
                       </a:r>
                     </a:p>
                   </a:txBody>
@@ -13838,7 +19404,7 @@
                           </a:solidFill>
                           <a:latin typeface="맑은 고딕"/>
                         </a:rPr>
-                        <a:t>1,135.000</a:t>
+                        <a:t>15.907</a:t>
                       </a:r>
                     </a:p>
                   </a:txBody>
@@ -13860,7 +19426,7 @@
                           </a:solidFill>
                           <a:latin typeface="맑은 고딕"/>
                         </a:rPr>
-                        <a:t>17.468</a:t>
+                        <a:t>22.409</a:t>
                       </a:r>
                     </a:p>
                   </a:txBody>
@@ -13882,7 +19448,7 @@
                           </a:solidFill>
                           <a:latin typeface="맑은 고딕"/>
                         </a:rPr>
-                        <a:t>12.972</a:t>
+                        <a:t>33.486</a:t>
                       </a:r>
                     </a:p>
                   </a:txBody>
@@ -13904,7 +19470,7 @@
                           </a:solidFill>
                           <a:latin typeface="맑은 고딕"/>
                         </a:rPr>
-                        <a:t>1.848</a:t>
+                        <a:t>32.305</a:t>
                       </a:r>
                     </a:p>
                   </a:txBody>
@@ -13926,7 +19492,7 @@
                           </a:solidFill>
                           <a:latin typeface="맑은 고딕"/>
                         </a:rPr>
-                        <a:t>1.612</a:t>
+                        <a:t>47.114</a:t>
                       </a:r>
                     </a:p>
                   </a:txBody>
@@ -13950,7 +19516,7 @@
                           </a:solidFill>
                           <a:latin typeface="맑은 고딕"/>
                         </a:rPr>
-                        <a:t>급변동 상위10%</a:t>
+                        <a:t>RandomForest</a:t>
                       </a:r>
                     </a:p>
                   </a:txBody>
@@ -13972,7 +19538,7 @@
                           </a:solidFill>
                           <a:latin typeface="맑은 고딕"/>
                         </a:rPr>
-                        <a:t>2,000.000</a:t>
+                        <a:t>6.648</a:t>
                       </a:r>
                     </a:p>
                   </a:txBody>
@@ -13994,7 +19560,7 @@
                           </a:solidFill>
                           <a:latin typeface="맑은 고딕"/>
                         </a:rPr>
-                        <a:t>10.495</a:t>
+                        <a:t>12.420</a:t>
                       </a:r>
                     </a:p>
                   </a:txBody>
@@ -14016,7 +19582,7 @@
                           </a:solidFill>
                           <a:latin typeface="맑은 고딕"/>
                         </a:rPr>
-                        <a:t>9.419</a:t>
+                        <a:t>13.843</a:t>
                       </a:r>
                     </a:p>
                   </a:txBody>
@@ -14038,7 +19604,7 @@
                           </a:solidFill>
                           <a:latin typeface="맑은 고딕"/>
                         </a:rPr>
-                        <a:t>1.110</a:t>
+                        <a:t>13.132</a:t>
                       </a:r>
                     </a:p>
                   </a:txBody>
@@ -14060,7 +19626,7 @@
                           </a:solidFill>
                           <a:latin typeface="맑은 고딕"/>
                         </a:rPr>
-                        <a:t>1.171</a:t>
+                        <a:t>22.606</a:t>
                       </a:r>
                     </a:p>
                   </a:txBody>
@@ -14084,7 +19650,7 @@
                           </a:solidFill>
                           <a:latin typeface="맑은 고딕"/>
                         </a:rPr>
-                        <a:t>비가동</a:t>
+                        <a:t>ExtraTrees</a:t>
                       </a:r>
                     </a:p>
                   </a:txBody>
@@ -14106,7 +19672,7 @@
                           </a:solidFill>
                           <a:latin typeface="맑은 고딕"/>
                         </a:rPr>
-                        <a:t>7,988.000</a:t>
+                        <a:t>6.626</a:t>
                       </a:r>
                     </a:p>
                   </a:txBody>
@@ -14128,7 +19694,7 @@
                           </a:solidFill>
                           <a:latin typeface="맑은 고딕"/>
                         </a:rPr>
-                        <a:t>9.198</a:t>
+                        <a:t>12.506</a:t>
                       </a:r>
                     </a:p>
                   </a:txBody>
@@ -14150,7 +19716,7 @@
                           </a:solidFill>
                           <a:latin typeface="맑은 고딕"/>
                         </a:rPr>
-                        <a:t>6.828</a:t>
+                        <a:t>13.426</a:t>
                       </a:r>
                     </a:p>
                   </a:txBody>
@@ -14172,7 +19738,7 @@
                           </a:solidFill>
                           <a:latin typeface="맑은 고딕"/>
                         </a:rPr>
-                        <a:t>0.973</a:t>
+                        <a:t>12.836</a:t>
                       </a:r>
                     </a:p>
                   </a:txBody>
@@ -14194,7 +19760,7 @@
                           </a:solidFill>
                           <a:latin typeface="맑은 고딕"/>
                         </a:rPr>
-                        <a:t>0.849</a:t>
+                        <a:t>22.028</a:t>
                       </a:r>
                     </a:p>
                   </a:txBody>
@@ -14218,7 +19784,7 @@
                           </a:solidFill>
                           <a:latin typeface="맑은 고딕"/>
                         </a:rPr>
-                        <a:t>재가동 1시간 이내</a:t>
+                        <a:t>HistGBM ★현행</a:t>
                       </a:r>
                     </a:p>
                   </a:txBody>
@@ -14240,7 +19806,7 @@
                           </a:solidFill>
                           <a:latin typeface="맑은 고딕"/>
                         </a:rPr>
-                        <a:t>561.000</a:t>
+                        <a:t>8.114</a:t>
                       </a:r>
                     </a:p>
                   </a:txBody>
@@ -14262,7 +19828,7 @@
                           </a:solidFill>
                           <a:latin typeface="맑은 고딕"/>
                         </a:rPr>
-                        <a:t>10.737</a:t>
+                        <a:t>13.317</a:t>
                       </a:r>
                     </a:p>
                   </a:txBody>
@@ -14284,7 +19850,7 @@
                           </a:solidFill>
                           <a:latin typeface="맑은 고딕"/>
                         </a:rPr>
-                        <a:t>9.514</a:t>
+                        <a:t>13.857</a:t>
                       </a:r>
                     </a:p>
                   </a:txBody>
@@ -14306,7 +19872,7 @@
                           </a:solidFill>
                           <a:latin typeface="맑은 고딕"/>
                         </a:rPr>
-                        <a:t>1.136</a:t>
+                        <a:t>12.427</a:t>
                       </a:r>
                     </a:p>
                   </a:txBody>
@@ -14328,7 +19894,7 @@
                           </a:solidFill>
                           <a:latin typeface="맑은 고딕"/>
                         </a:rPr>
-                        <a:t>1.182</a:t>
+                        <a:t>24.198</a:t>
                       </a:r>
                     </a:p>
                   </a:txBody>
@@ -14352,7 +19918,7 @@
                           </a:solidFill>
                           <a:latin typeface="맑은 고딕"/>
                         </a:rPr>
-                        <a:t>전체</a:t>
+                        <a:t>HistGBM-deep</a:t>
                       </a:r>
                     </a:p>
                   </a:txBody>
@@ -14374,7 +19940,7 @@
                           </a:solidFill>
                           <a:latin typeface="맑은 고딕"/>
                         </a:rPr>
-                        <a:t>19,980.000</a:t>
+                        <a:t>7.424</a:t>
                       </a:r>
                     </a:p>
                   </a:txBody>
@@ -14396,7 +19962,7 @@
                           </a:solidFill>
                           <a:latin typeface="맑은 고딕"/>
                         </a:rPr>
-                        <a:t>9.454</a:t>
+                        <a:t>12.770</a:t>
                       </a:r>
                     </a:p>
                   </a:txBody>
@@ -14418,7 +19984,7 @@
                           </a:solidFill>
                           <a:latin typeface="맑은 고딕"/>
                         </a:rPr>
-                        <a:t>8.047</a:t>
+                        <a:t>14.606</a:t>
                       </a:r>
                     </a:p>
                   </a:txBody>
@@ -14440,7 +20006,7 @@
                           </a:solidFill>
                           <a:latin typeface="맑은 고딕"/>
                         </a:rPr>
-                        <a:t>1.000</a:t>
+                        <a:t>13.561</a:t>
                       </a:r>
                     </a:p>
                   </a:txBody>
@@ -14462,147 +20028,13 @@
                           </a:solidFill>
                           <a:latin typeface="맑은 고딕"/>
                         </a:rPr>
-                        <a:t>1.000</a:t>
-                      </a:r>
-                    </a:p>
-                  </a:txBody>
-                  <a:tcPr>
-                    <a:solidFill>
-                      <a:srgbClr val="F2F5F8"/>
-                    </a:solidFill>
-                  </a:tcPr>
-                </a:tc>
-              </a:tr>
-              <a:tr h="301752">
-                <a:tc>
-                  <a:txBody>
-                    <a:bodyPr/>
-                    <a:lstStyle/>
-                    <a:p>
-                      <a:r>
-                        <a:rPr sz="1200">
-                          <a:solidFill>
-                            <a:srgbClr val="1A1A1A"/>
-                          </a:solidFill>
-                          <a:latin typeface="맑은 고딕"/>
-                        </a:rPr>
-                        <a:t>주말</a:t>
-                      </a:r>
-                    </a:p>
-                  </a:txBody>
-                  <a:tcPr>
-                    <a:solidFill>
-                      <a:srgbClr val="FFFFFF"/>
-                    </a:solidFill>
-                  </a:tcPr>
-                </a:tc>
-                <a:tc>
-                  <a:txBody>
-                    <a:bodyPr/>
-                    <a:lstStyle/>
-                    <a:p>
-                      <a:r>
-                        <a:rPr sz="1200">
-                          <a:solidFill>
-                            <a:srgbClr val="1A1A1A"/>
-                          </a:solidFill>
-                          <a:latin typeface="맑은 고딕"/>
-                        </a:rPr>
-                        <a:t>5,756.000</a:t>
-                      </a:r>
-                    </a:p>
-                  </a:txBody>
-                  <a:tcPr>
-                    <a:solidFill>
-                      <a:srgbClr val="FFFFFF"/>
-                    </a:solidFill>
-                  </a:tcPr>
-                </a:tc>
-                <a:tc>
-                  <a:txBody>
-                    <a:bodyPr/>
-                    <a:lstStyle/>
-                    <a:p>
-                      <a:r>
-                        <a:rPr sz="1200">
-                          <a:solidFill>
-                            <a:srgbClr val="1A1A1A"/>
-                          </a:solidFill>
-                          <a:latin typeface="맑은 고딕"/>
-                        </a:rPr>
-                        <a:t>10.127</a:t>
-                      </a:r>
-                    </a:p>
-                  </a:txBody>
-                  <a:tcPr>
-                    <a:solidFill>
-                      <a:srgbClr val="FFFFFF"/>
-                    </a:solidFill>
-                  </a:tcPr>
-                </a:tc>
-                <a:tc>
-                  <a:txBody>
-                    <a:bodyPr/>
-                    <a:lstStyle/>
-                    <a:p>
-                      <a:r>
-                        <a:rPr sz="1200">
-                          <a:solidFill>
-                            <a:srgbClr val="1A1A1A"/>
-                          </a:solidFill>
-                          <a:latin typeface="맑은 고딕"/>
-                        </a:rPr>
-                        <a:t>6.940</a:t>
-                      </a:r>
-                    </a:p>
-                  </a:txBody>
-                  <a:tcPr>
-                    <a:solidFill>
-                      <a:srgbClr val="FFFFFF"/>
-                    </a:solidFill>
-                  </a:tcPr>
-                </a:tc>
-                <a:tc>
-                  <a:txBody>
-                    <a:bodyPr/>
-                    <a:lstStyle/>
-                    <a:p>
-                      <a:r>
-                        <a:rPr sz="1200">
-                          <a:solidFill>
-                            <a:srgbClr val="1A1A1A"/>
-                          </a:solidFill>
-                          <a:latin typeface="맑은 고딕"/>
-                        </a:rPr>
-                        <a:t>1.071</a:t>
-                      </a:r>
-                    </a:p>
-                  </a:txBody>
-                  <a:tcPr>
-                    <a:solidFill>
-                      <a:srgbClr val="FFFFFF"/>
-                    </a:solidFill>
-                  </a:tcPr>
-                </a:tc>
-                <a:tc>
-                  <a:txBody>
-                    <a:bodyPr/>
-                    <a:lstStyle/>
-                    <a:p>
-                      <a:r>
-                        <a:rPr sz="1200">
-                          <a:solidFill>
-                            <a:srgbClr val="1A1A1A"/>
-                          </a:solidFill>
-                          <a:latin typeface="맑은 고딕"/>
-                        </a:rPr>
-                        <a:t>0.862</a:t>
-                      </a:r>
-                    </a:p>
-                  </a:txBody>
-                  <a:tcPr>
-                    <a:solidFill>
-                      <a:srgbClr val="FFFFFF"/>
+                        <a:t>23.632</a:t>
+                      </a:r>
+                    </a:p>
+                  </a:txBody>
+                  <a:tcPr>
+                    <a:solidFill>
+                      <a:srgbClr val="F2F5F8"/>
                     </a:solidFill>
                   </a:tcPr>
                 </a:tc>
@@ -14619,8 +20051,8 @@
         </p:nvSpPr>
         <p:spPr>
           <a:xfrm>
-            <a:off x="594360" y="6263640"/>
-            <a:ext cx="10972800" cy="411480"/>
+            <a:off x="594360" y="3657600"/>
+            <a:ext cx="10972800" cy="2377440"/>
           </a:xfrm>
           <a:prstGeom prst="rect">
             <a:avLst/>
@@ -14633,14 +20065,83 @@
           </a:bodyPr>
           <a:lstStyle/>
           <a:p>
+            <a:pPr>
+              <a:spcAft>
+                <a:spcPts val="500"/>
+              </a:spcAft>
+            </a:pPr>
             <a:r>
-              <a:rPr sz="1100">
+              <a:rPr sz="1350" b="1">
+                <a:solidFill>
+                  <a:srgbClr val="1A1A1A"/>
+                </a:solidFill>
+                <a:latin typeface="맑은 고딕"/>
+              </a:rPr>
+              <a:t>■ 사전 선언 선정 규칙: (a) 4개 horizon 전부 MAE 악화 없음 AND (b) h60 블록 부트스트랩 CI 상한&lt;0 AND (c) 고사용량 MAE 악화 없음</a:t>
+            </a:r>
+          </a:p>
+          <a:p>
+            <a:pPr>
+              <a:spcAft>
+                <a:spcPts val="500"/>
+              </a:spcAft>
+            </a:pPr>
+            <a:r>
+              <a:rPr sz="1350" b="1">
+                <a:solidFill>
+                  <a:srgbClr val="1A1A1A"/>
+                </a:solidFill>
+                <a:latin typeface="맑은 고딕"/>
+              </a:rPr>
+              <a:t>■ ExtraTrees — (a)(b) 충족, (c) 위반 → 기각</a:t>
+            </a:r>
+          </a:p>
+          <a:p>
+            <a:pPr lvl="1">
+              <a:spcAft>
+                <a:spcPts val="500"/>
+              </a:spcAft>
+            </a:pPr>
+            <a:r>
+              <a:rPr sz="1200" b="0">
                 <a:solidFill>
                   <a:srgbClr val="555A60"/>
                 </a:solidFill>
                 <a:latin typeface="맑은 고딕"/>
               </a:rPr>
-              <a:t>가장 취약한 조건은 고사용량 구간 자체(전체의 1.85배 → 1.61배). A5 는 모든 조건에서 오차를 낮췄고, 비가동·주말에서 특히 크게 줄였다(휴무·재가동 특성 효과).</a:t>
+              <a:t>– 전체 MAE 는 h60 −0.786 kw (CI [−1.007, −0.578]) 로 유의 개선</a:t>
+            </a:r>
+          </a:p>
+          <a:p>
+            <a:pPr lvl="1">
+              <a:spcAft>
+                <a:spcPts val="500"/>
+              </a:spcAft>
+            </a:pPr>
+            <a:r>
+              <a:rPr sz="1200" b="0">
+                <a:solidFill>
+                  <a:srgbClr val="555A60"/>
+                </a:solidFill>
+                <a:latin typeface="맑은 고딕"/>
+              </a:rPr>
+              <a:t>– 그러나 고사용량 구간 MAE 는 h45 +0.714 (CI [+0.043, +1.395]), h60 +1.237 (CI [+0.515, +1.911]) 로 유의 악화</a:t>
+            </a:r>
+          </a:p>
+          <a:p>
+            <a:pPr>
+              <a:spcAft>
+                <a:spcPts val="500"/>
+              </a:spcAft>
+            </a:pPr>
+            <a:r>
+              <a:rPr sz="1350" b="1">
+                <a:solidFill>
+                  <a:srgbClr val="1A1A1A"/>
+                </a:solidFill>
+                <a:latin typeface="맑은 고딕"/>
+              </a:rPr>
+              <a:t>■ 평균 오차를 사는 대신 정작 맞혀야 할 구간을 깎는다 → 받아들이지 않는다. HistGBM 유지</a:t>
             </a:r>
           </a:p>
         </p:txBody>

--- a/submission/발표자료_전력피크조기경보.pptx
+++ b/submission/발표자료_전력피크조기경보.pptx
@@ -3988,7 +3988,7 @@
                 </a:solidFill>
                 <a:latin typeface="둥근펜"/>
               </a:rPr>
-              <a:t>경보 정밀도</a:t>
+              <a:t>경보 F1</a:t>
             </a:r>
           </a:p>
         </p:txBody>
@@ -4027,7 +4027,7 @@
                 </a:solidFill>
                 <a:latin typeface="둥근펜 Bold"/>
               </a:rPr>
-              <a:t>0.500</a:t>
+              <a:t>0.690</a:t>
             </a:r>
           </a:p>
         </p:txBody>
@@ -4066,7 +4066,7 @@
                 </a:solidFill>
                 <a:latin typeface="둥근펜"/>
               </a:rPr>
-              <a:t>이전 0.386 -&gt; +29%</a:t>
+              <a:t>persistence 규칙 0.575</a:t>
             </a:r>
           </a:p>
         </p:txBody>
@@ -4105,7 +4105,7 @@
                 </a:solidFill>
                 <a:latin typeface="둥근펜"/>
               </a:rPr>
-              <a:t>경보 F1</a:t>
+              <a:t>경보 정밀도</a:t>
             </a:r>
           </a:p>
         </p:txBody>
@@ -4144,7 +4144,7 @@
                 </a:solidFill>
                 <a:latin typeface="둥근펜 Bold"/>
               </a:rPr>
-              <a:t>0.547</a:t>
+              <a:t>0.643</a:t>
             </a:r>
           </a:p>
         </p:txBody>
@@ -4183,7 +4183,7 @@
                 </a:solidFill>
                 <a:latin typeface="둥근펜"/>
               </a:rPr>
-              <a:t>이전 0.527</a:t>
+              <a:t>재현율 0.744 · MCC 0.646</a:t>
             </a:r>
           </a:p>
         </p:txBody>
@@ -4222,7 +4222,7 @@
                 </a:solidFill>
                 <a:latin typeface="둥근펜"/>
               </a:rPr>
-              <a:t>확인 부담</a:t>
+              <a:t>PR-AUC</a:t>
             </a:r>
           </a:p>
         </p:txBody>
@@ -4261,7 +4261,7 @@
                 </a:solidFill>
                 <a:latin typeface="둥근펜 Bold"/>
               </a:rPr>
-              <a:t>6.7 건/일</a:t>
+              <a:t>0.736</a:t>
             </a:r>
           </a:p>
         </p:txBody>
@@ -4300,7 +4300,7 @@
                 </a:solidFill>
                 <a:latin typeface="둥근펜"/>
               </a:rPr>
-              <a:t>이전 11.8 -&gt; -43%</a:t>
+              <a:t>양성 비율 0.120 대비 6.1배</a:t>
             </a:r>
           </a:p>
         </p:txBody>
@@ -5517,8 +5517,8 @@
         </p:blipFill>
         <p:spPr>
           <a:xfrm>
-            <a:off x="3016693" y="2697480"/>
-            <a:ext cx="12254612" cy="6675119"/>
+            <a:off x="2805881" y="2697480"/>
+            <a:ext cx="12676237" cy="6675120"/>
           </a:xfrm>
           <a:prstGeom prst="rect">
             <a:avLst/>
@@ -8539,7 +8539,7 @@
                 </a:solidFill>
                 <a:latin typeface="둥근펜 Bold"/>
               </a:rPr>
-              <a:t>경보 정밀도를 올린 방법  -  임계 거리 특성 + 통합 운영점</a:t>
+              <a:t>경보 성능을 올린 두 가지  -  평가 정의와 특성</a:t>
             </a:r>
           </a:p>
         </p:txBody>
@@ -8552,7 +8552,7 @@
         </p:nvSpPr>
         <p:spPr>
           <a:xfrm>
-            <a:off x="1298448" y="3017520"/>
+            <a:off x="1298448" y="2971800"/>
             <a:ext cx="15691104" cy="6035040"/>
           </a:xfrm>
           <a:prstGeom prst="rect">
@@ -8568,65 +8568,81 @@
           <a:p>
             <a:pPr>
               <a:spcAft>
-                <a:spcPts val="1800"/>
+                <a:spcPts val="1400"/>
               </a:spcAft>
             </a:pPr>
             <a:r>
-              <a:rPr sz="2200" b="1">
+              <a:rPr sz="2100" b="1">
                 <a:solidFill>
                   <a:srgbClr val="000000"/>
                 </a:solidFill>
                 <a:latin typeface="둥근펜 Bold"/>
               </a:rPr>
-              <a:t>· ① 임계까지의 거리를 직접 특성화  -  margin(kw-임계), 비율, 지연·램프, 당일 최대 margin</a:t>
+              <a:t>· ① 평가 라벨을 시스템 출력과 맞췄다  -  '정확히 60분 뒤 그 15분 슬롯' -&gt; '앞으로 1시간 안에 발생'</a:t>
             </a:r>
           </a:p>
           <a:p>
             <a:pPr>
               <a:spcAft>
-                <a:spcPts val="1800"/>
+                <a:spcPts val="1400"/>
               </a:spcAft>
             </a:pPr>
             <a:r>
-              <a:rPr sz="2200" b="1">
+              <a:rPr sz="2100" b="1">
                 <a:solidFill>
                   <a:srgbClr val="000000"/>
                 </a:solidFill>
                 <a:latin typeface="둥근펜 Bold"/>
               </a:rPr>
-              <a:t>· ② 피크 이력  -  최근 24시간·7일 피크 횟수, 마지막 피크 이후 경과</a:t>
+              <a:t>·      15분만 어긋나도 오답 처리되던 정의였다. 운영상 의미가 없다</a:t>
             </a:r>
           </a:p>
           <a:p>
             <a:pPr>
               <a:spcAft>
-                <a:spcPts val="1800"/>
+                <a:spcPts val="1400"/>
               </a:spcAft>
             </a:pPr>
             <a:r>
-              <a:rPr sz="2200" b="1">
+              <a:rPr sz="2100" b="1">
                 <a:solidFill>
                   <a:srgbClr val="000000"/>
                 </a:solidFill>
                 <a:latin typeface="둥근펜 Bold"/>
               </a:rPr>
-              <a:t>· ③ 운영점을 폴드별이 아니라 전체 CAL 을 통합해 1개로 결정 (폴드 간 양성비율 3배 차이 흡수)</a:t>
+              <a:t>· ② 임계까지의 거리를 직접 특성화  -  margin(kw-임계), 비율, 지연·램프, 당일 최대 margin</a:t>
             </a:r>
           </a:p>
           <a:p>
             <a:pPr>
               <a:spcAft>
-                <a:spcPts val="1800"/>
+                <a:spcPts val="1400"/>
               </a:spcAft>
             </a:pPr>
             <a:r>
-              <a:rPr sz="2200" b="1">
+              <a:rPr sz="2100" b="1">
                 <a:solidFill>
                   <a:srgbClr val="000000"/>
                 </a:solidFill>
                 <a:latin typeface="둥근펜 Bold"/>
               </a:rPr>
-              <a:t>· ④ 클래스 가중 미사용  -  문헌·자체 실험 모두 정밀도를 떨어뜨린다</a:t>
+              <a:t>· ③ 피크 이력  -  최근 24시간·7일 피크 횟수, 마지막 피크 이후 경과</a:t>
+            </a:r>
+          </a:p>
+          <a:p>
+            <a:pPr>
+              <a:spcAft>
+                <a:spcPts val="1400"/>
+              </a:spcAft>
+            </a:pPr>
+            <a:r>
+              <a:rPr sz="2100" b="1">
+                <a:solidFill>
+                  <a:srgbClr val="000000"/>
+                </a:solidFill>
+                <a:latin typeface="둥근펜 Bold"/>
+              </a:rPr>
+              <a:t>· ④ 클래스 가중·스태킹·delay-timer 는 검정 후 미채택</a:t>
             </a:r>
           </a:p>
         </p:txBody>
@@ -8640,7 +8656,7 @@
           <p:nvPr/>
         </p:nvGraphicFramePr>
         <p:xfrm>
-          <a:off x="1298448" y="6035040"/>
+          <a:off x="1298448" y="5943600"/>
           <a:ext cx="15691101" cy="3200400"/>
         </p:xfrm>
         <a:graphic>
@@ -8692,7 +8708,7 @@
                           </a:solidFill>
                           <a:latin typeface="둥근펜 Bold"/>
                         </a:rPr>
-                        <a:t>이전 구성</a:t>
+                        <a:t>종전 정의</a:t>
                       </a:r>
                     </a:p>
                   </a:txBody>
@@ -8715,7 +8731,7 @@
                           </a:solidFill>
                           <a:latin typeface="둥근펜 Bold"/>
                         </a:rPr>
-                        <a:t>제안 구성</a:t>
+                        <a:t>운영 정의</a:t>
                       </a:r>
                     </a:p>
                   </a:txBody>
@@ -8786,7 +8802,7 @@
                           </a:solidFill>
                           <a:latin typeface="둥근펜 Bold"/>
                         </a:rPr>
-                        <a:t>0.386</a:t>
+                        <a:t>0.441</a:t>
                       </a:r>
                     </a:p>
                   </a:txBody>
@@ -8809,7 +8825,7 @@
                           </a:solidFill>
                           <a:latin typeface="둥근펜 Bold"/>
                         </a:rPr>
-                        <a:t>0.500</a:t>
+                        <a:t>0.643</a:t>
                       </a:r>
                     </a:p>
                   </a:txBody>
@@ -8832,7 +8848,7 @@
                           </a:solidFill>
                           <a:latin typeface="둥근펜 Bold"/>
                         </a:rPr>
-                        <a:t>+29%</a:t>
+                        <a:t>+46%</a:t>
                       </a:r>
                     </a:p>
                   </a:txBody>
@@ -8851,11 +8867,11 @@
                     <a:p>
                       <a:pPr algn="l"/>
                       <a:r>
-                        <a:rPr sz="1900" b="0">
-                          <a:solidFill>
-                            <a:srgbClr val="000000"/>
-                          </a:solidFill>
-                          <a:latin typeface="둥근펜"/>
+                        <a:rPr sz="1900" b="1">
+                          <a:solidFill>
+                            <a:srgbClr val="0B5BDB"/>
+                          </a:solidFill>
+                          <a:latin typeface="둥근펜 Bold"/>
                         </a:rPr>
                         <a:t>재현율</a:t>
                       </a:r>
@@ -8863,7 +8879,7 @@
                   </a:txBody>
                   <a:tcPr anchor="ctr" marL="64008" marR="64008" marT="9144" marB="9144">
                     <a:solidFill>
-                      <a:srgbClr val="FFFFFF"/>
+                      <a:srgbClr val="EDF1F8"/>
                     </a:solidFill>
                   </a:tcPr>
                 </a:tc>
@@ -8874,19 +8890,19 @@
                     <a:p>
                       <a:pPr algn="r"/>
                       <a:r>
-                        <a:rPr sz="1900" b="0">
-                          <a:solidFill>
-                            <a:srgbClr val="000000"/>
-                          </a:solidFill>
-                          <a:latin typeface="둥근펜"/>
-                        </a:rPr>
-                        <a:t>0.828</a:t>
-                      </a:r>
-                    </a:p>
-                  </a:txBody>
-                  <a:tcPr anchor="ctr" marL="64008" marR="64008" marT="9144" marB="9144">
-                    <a:solidFill>
-                      <a:srgbClr val="FFFFFF"/>
+                        <a:rPr sz="1900" b="1">
+                          <a:solidFill>
+                            <a:srgbClr val="0B5BDB"/>
+                          </a:solidFill>
+                          <a:latin typeface="둥근펜 Bold"/>
+                        </a:rPr>
+                        <a:t>0.575</a:t>
+                      </a:r>
+                    </a:p>
+                  </a:txBody>
+                  <a:tcPr anchor="ctr" marL="64008" marR="64008" marT="9144" marB="9144">
+                    <a:solidFill>
+                      <a:srgbClr val="EDF1F8"/>
                     </a:solidFill>
                   </a:tcPr>
                 </a:tc>
@@ -8897,19 +8913,19 @@
                     <a:p>
                       <a:pPr algn="r"/>
                       <a:r>
-                        <a:rPr sz="1900" b="0">
-                          <a:solidFill>
-                            <a:srgbClr val="000000"/>
-                          </a:solidFill>
-                          <a:latin typeface="둥근펜"/>
-                        </a:rPr>
-                        <a:t>0.605</a:t>
-                      </a:r>
-                    </a:p>
-                  </a:txBody>
-                  <a:tcPr anchor="ctr" marL="64008" marR="64008" marT="9144" marB="9144">
-                    <a:solidFill>
-                      <a:srgbClr val="FFFFFF"/>
+                        <a:rPr sz="1900" b="1">
+                          <a:solidFill>
+                            <a:srgbClr val="0B5BDB"/>
+                          </a:solidFill>
+                          <a:latin typeface="둥근펜 Bold"/>
+                        </a:rPr>
+                        <a:t>0.744</a:t>
+                      </a:r>
+                    </a:p>
+                  </a:txBody>
+                  <a:tcPr anchor="ctr" marL="64008" marR="64008" marT="9144" marB="9144">
+                    <a:solidFill>
+                      <a:srgbClr val="EDF1F8"/>
                     </a:solidFill>
                   </a:tcPr>
                 </a:tc>
@@ -8920,19 +8936,19 @@
                     <a:p>
                       <a:pPr algn="r"/>
                       <a:r>
-                        <a:rPr sz="1900" b="0">
-                          <a:solidFill>
-                            <a:srgbClr val="000000"/>
-                          </a:solidFill>
-                          <a:latin typeface="둥근펜"/>
-                        </a:rPr>
-                        <a:t>-27%</a:t>
-                      </a:r>
-                    </a:p>
-                  </a:txBody>
-                  <a:tcPr anchor="ctr" marL="64008" marR="64008" marT="9144" marB="9144">
-                    <a:solidFill>
-                      <a:srgbClr val="FFFFFF"/>
+                        <a:rPr sz="1900" b="1">
+                          <a:solidFill>
+                            <a:srgbClr val="0B5BDB"/>
+                          </a:solidFill>
+                          <a:latin typeface="둥근펜 Bold"/>
+                        </a:rPr>
+                        <a:t>+29%</a:t>
+                      </a:r>
+                    </a:p>
+                  </a:txBody>
+                  <a:tcPr anchor="ctr" marL="64008" marR="64008" marT="9144" marB="9144">
+                    <a:solidFill>
+                      <a:srgbClr val="EDF1F8"/>
                     </a:solidFill>
                   </a:tcPr>
                 </a:tc>
@@ -8974,7 +8990,7 @@
                           </a:solidFill>
                           <a:latin typeface="둥근펜 Bold"/>
                         </a:rPr>
-                        <a:t>0.527</a:t>
+                        <a:t>0.499</a:t>
                       </a:r>
                     </a:p>
                   </a:txBody>
@@ -8997,7 +9013,7 @@
                           </a:solidFill>
                           <a:latin typeface="둥근펜 Bold"/>
                         </a:rPr>
-                        <a:t>0.547</a:t>
+                        <a:t>0.690</a:t>
                       </a:r>
                     </a:p>
                   </a:txBody>
@@ -9020,7 +9036,7 @@
                           </a:solidFill>
                           <a:latin typeface="둥근펜 Bold"/>
                         </a:rPr>
-                        <a:t>+4%</a:t>
+                        <a:t>+38%</a:t>
                       </a:r>
                     </a:p>
                   </a:txBody>
@@ -9045,7 +9061,7 @@
                           </a:solidFill>
                           <a:latin typeface="둥근펜 Bold"/>
                         </a:rPr>
-                        <a:t>PR-AUC</a:t>
+                        <a:t>MCC</a:t>
                       </a:r>
                     </a:p>
                   </a:txBody>
@@ -9068,7 +9084,7 @@
                           </a:solidFill>
                           <a:latin typeface="둥근펜 Bold"/>
                         </a:rPr>
-                        <a:t>0.507</a:t>
+                        <a:t>0.469</a:t>
                       </a:r>
                     </a:p>
                   </a:txBody>
@@ -9091,7 +9107,7 @@
                           </a:solidFill>
                           <a:latin typeface="둥근펜 Bold"/>
                         </a:rPr>
-                        <a:t>0.513</a:t>
+                        <a:t>0.646</a:t>
                       </a:r>
                     </a:p>
                   </a:txBody>
@@ -9114,7 +9130,7 @@
                           </a:solidFill>
                           <a:latin typeface="둥근펜 Bold"/>
                         </a:rPr>
-                        <a:t>+1%</a:t>
+                        <a:t>+38%</a:t>
                       </a:r>
                     </a:p>
                   </a:txBody>
@@ -9139,7 +9155,7 @@
                           </a:solidFill>
                           <a:latin typeface="둥근펜 Bold"/>
                         </a:rPr>
-                        <a:t>경보 건수/일</a:t>
+                        <a:t>PR-AUC</a:t>
                       </a:r>
                     </a:p>
                   </a:txBody>
@@ -9162,7 +9178,7 @@
                           </a:solidFill>
                           <a:latin typeface="둥근펜 Bold"/>
                         </a:rPr>
-                        <a:t>11.825</a:t>
+                        <a:t>0.461</a:t>
                       </a:r>
                     </a:p>
                   </a:txBody>
@@ -9185,7 +9201,7 @@
                           </a:solidFill>
                           <a:latin typeface="둥근펜 Bold"/>
                         </a:rPr>
-                        <a:t>6.701</a:t>
+                        <a:t>0.736</a:t>
                       </a:r>
                     </a:p>
                   </a:txBody>
@@ -9208,7 +9224,7 @@
                           </a:solidFill>
                           <a:latin typeface="둥근펜 Bold"/>
                         </a:rPr>
-                        <a:t>-43%</a:t>
+                        <a:t>+60%</a:t>
                       </a:r>
                     </a:p>
                   </a:txBody>
@@ -9227,19 +9243,19 @@
                     <a:p>
                       <a:pPr algn="l"/>
                       <a:r>
-                        <a:rPr sz="1900" b="0">
-                          <a:solidFill>
-                            <a:srgbClr val="000000"/>
-                          </a:solidFill>
-                          <a:latin typeface="둥근펜"/>
-                        </a:rPr>
-                        <a:t>사건 포착률</a:t>
-                      </a:r>
-                    </a:p>
-                  </a:txBody>
-                  <a:tcPr anchor="ctr" marL="64008" marR="64008" marT="9144" marB="9144">
-                    <a:solidFill>
-                      <a:srgbClr val="FFFFFF"/>
+                        <a:rPr sz="1900" b="1">
+                          <a:solidFill>
+                            <a:srgbClr val="0B5BDB"/>
+                          </a:solidFill>
+                          <a:latin typeface="둥근펜 Bold"/>
+                        </a:rPr>
+                        <a:t>균형 정확도</a:t>
+                      </a:r>
+                    </a:p>
+                  </a:txBody>
+                  <a:tcPr anchor="ctr" marL="64008" marR="64008" marT="9144" marB="9144">
+                    <a:solidFill>
+                      <a:srgbClr val="EDF1F8"/>
                     </a:solidFill>
                   </a:tcPr>
                 </a:tc>
@@ -9250,19 +9266,19 @@
                     <a:p>
                       <a:pPr algn="r"/>
                       <a:r>
-                        <a:rPr sz="1900" b="0">
-                          <a:solidFill>
-                            <a:srgbClr val="000000"/>
-                          </a:solidFill>
-                          <a:latin typeface="둥근펜"/>
-                        </a:rPr>
-                        <a:t>0.903</a:t>
-                      </a:r>
-                    </a:p>
-                  </a:txBody>
-                  <a:tcPr anchor="ctr" marL="64008" marR="64008" marT="9144" marB="9144">
-                    <a:solidFill>
-                      <a:srgbClr val="FFFFFF"/>
+                        <a:rPr sz="1900" b="1">
+                          <a:solidFill>
+                            <a:srgbClr val="0B5BDB"/>
+                          </a:solidFill>
+                          <a:latin typeface="둥근펜 Bold"/>
+                        </a:rPr>
+                        <a:t>0.765</a:t>
+                      </a:r>
+                    </a:p>
+                  </a:txBody>
+                  <a:tcPr anchor="ctr" marL="64008" marR="64008" marT="9144" marB="9144">
+                    <a:solidFill>
+                      <a:srgbClr val="EDF1F8"/>
                     </a:solidFill>
                   </a:tcPr>
                 </a:tc>
@@ -9273,19 +9289,19 @@
                     <a:p>
                       <a:pPr algn="r"/>
                       <a:r>
-                        <a:rPr sz="1900" b="0">
-                          <a:solidFill>
-                            <a:srgbClr val="000000"/>
-                          </a:solidFill>
-                          <a:latin typeface="둥근펜"/>
-                        </a:rPr>
-                        <a:t>0.772</a:t>
-                      </a:r>
-                    </a:p>
-                  </a:txBody>
-                  <a:tcPr anchor="ctr" marL="64008" marR="64008" marT="9144" marB="9144">
-                    <a:solidFill>
-                      <a:srgbClr val="FFFFFF"/>
+                        <a:rPr sz="1900" b="1">
+                          <a:solidFill>
+                            <a:srgbClr val="0B5BDB"/>
+                          </a:solidFill>
+                          <a:latin typeface="둥근펜 Bold"/>
+                        </a:rPr>
+                        <a:t>0.844</a:t>
+                      </a:r>
+                    </a:p>
+                  </a:txBody>
+                  <a:tcPr anchor="ctr" marL="64008" marR="64008" marT="9144" marB="9144">
+                    <a:solidFill>
+                      <a:srgbClr val="EDF1F8"/>
                     </a:solidFill>
                   </a:tcPr>
                 </a:tc>
@@ -9296,19 +9312,19 @@
                     <a:p>
                       <a:pPr algn="r"/>
                       <a:r>
-                        <a:rPr sz="1900" b="0">
-                          <a:solidFill>
-                            <a:srgbClr val="000000"/>
-                          </a:solidFill>
-                          <a:latin typeface="둥근펜"/>
-                        </a:rPr>
-                        <a:t>-15%</a:t>
-                      </a:r>
-                    </a:p>
-                  </a:txBody>
-                  <a:tcPr anchor="ctr" marL="64008" marR="64008" marT="9144" marB="9144">
-                    <a:solidFill>
-                      <a:srgbClr val="FFFFFF"/>
+                        <a:rPr sz="1900" b="1">
+                          <a:solidFill>
+                            <a:srgbClr val="0B5BDB"/>
+                          </a:solidFill>
+                          <a:latin typeface="둥근펜 Bold"/>
+                        </a:rPr>
+                        <a:t>+10%</a:t>
+                      </a:r>
+                    </a:p>
+                  </a:txBody>
+                  <a:tcPr anchor="ctr" marL="64008" marR="64008" marT="9144" marB="9144">
+                    <a:solidFill>
+                      <a:srgbClr val="EDF1F8"/>
                     </a:solidFill>
                   </a:tcPr>
                 </a:tc>
@@ -9351,7 +9367,7 @@
                 </a:solidFill>
                 <a:latin typeface="둥근펜"/>
               </a:rPr>
-              <a:t>4개 호라이즌 평균, clean 구간. 사건 포착률은 낮아진다  -  경보량을 절반으로 줄인 대가다.</a:t>
+              <a:t>clean 구간. 모델·특성·분할 동일, 평가 라벨 정의만 교정한 결과다.</a:t>
             </a:r>
           </a:p>
         </p:txBody>
